--- a/Equip_29/Results/2026_06__01_StaySpain_Presentacion.pptx
+++ b/Equip_29/Results/2026_06__01_StaySpain_Presentacion.pptx
@@ -5,17 +5,18 @@
     <p:sldMasterId id="2147483648" r:id="rId1"/>
   </p:sldMasterIdLst>
   <p:notesMasterIdLst>
-    <p:notesMasterId r:id="rId10"/>
+    <p:notesMasterId r:id="rId11"/>
   </p:notesMasterIdLst>
   <p:sldIdLst>
     <p:sldId id="256" r:id="rId2"/>
     <p:sldId id="257" r:id="rId3"/>
     <p:sldId id="258" r:id="rId4"/>
-    <p:sldId id="259" r:id="rId5"/>
-    <p:sldId id="260" r:id="rId6"/>
-    <p:sldId id="261" r:id="rId7"/>
-    <p:sldId id="262" r:id="rId8"/>
-    <p:sldId id="263" r:id="rId9"/>
+    <p:sldId id="264" r:id="rId5"/>
+    <p:sldId id="259" r:id="rId6"/>
+    <p:sldId id="260" r:id="rId7"/>
+    <p:sldId id="261" r:id="rId8"/>
+    <p:sldId id="262" r:id="rId9"/>
+    <p:sldId id="263" r:id="rId10"/>
   </p:sldIdLst>
   <p:sldSz cx="9144000" cy="5143500" type="screen16x9"/>
   <p:notesSz cx="5143500" cy="9144000"/>
@@ -122,7 +123,7 @@
 <file path=ppt/charts/chart1.xml><?xml version="1.0" encoding="utf-8"?>
 <c:chartSpace xmlns:c="http://schemas.openxmlformats.org/drawingml/2006/chart" xmlns:a="http://schemas.openxmlformats.org/drawingml/2006/main" xmlns:r="http://schemas.openxmlformats.org/officeDocument/2006/relationships" xmlns:c16r2="http://schemas.microsoft.com/office/drawing/2015/06/chart">
   <c:date1904 val="0"/>
-  <c:lang val="es-ES"/>
+  <c:lang val="en-US"/>
   <c:roundedCorners val="1"/>
   <c:style val="2"/>
   <c:chart>
@@ -1101,7 +1102,7 @@
     </p:spTree>
     <p:extLst>
       <p:ext uri="{BB962C8B-B14F-4D97-AF65-F5344CB8AC3E}">
-        <p14:creationId xmlns:p14="http://schemas.microsoft.com/office/powerpoint/2010/main" val="1024086991"/>
+        <p14:creationId xmlns:p14="http://schemas.microsoft.com/office/powerpoint/2010/main" val="792647931"/>
       </p:ext>
     </p:extLst>
   </p:cSld>
@@ -1429,6 +1430,90 @@
             <a:fld id="{F7021451-1387-4CA6-816F-3879F97B5CBC}" type="slidenum">
               <a:rPr lang="en-US"/>
               <a:t>8</a:t>
+            </a:fld>
+            <a:endParaRPr lang="en-US"/>
+          </a:p>
+        </p:txBody>
+      </p:sp>
+    </p:spTree>
+    <p:extLst>
+      <p:ext uri="{BB962C8B-B14F-4D97-AF65-F5344CB8AC3E}">
+        <p14:creationId xmlns:p14="http://schemas.microsoft.com/office/powerpoint/2010/main" val="1024086991"/>
+      </p:ext>
+    </p:extLst>
+  </p:cSld>
+  <p:clrMapOvr>
+    <a:masterClrMapping/>
+  </p:clrMapOvr>
+</p:notes>
+</file>
+
+<file path=ppt/notesSlides/notesSlide9.xml><?xml version="1.0" encoding="utf-8"?>
+<p:notes xmlns:a="http://schemas.openxmlformats.org/drawingml/2006/main" xmlns:r="http://schemas.openxmlformats.org/officeDocument/2006/relationships" xmlns:p="http://schemas.openxmlformats.org/presentationml/2006/main">
+  <p:cSld>
+    <p:spTree>
+      <p:nvGrpSpPr>
+        <p:cNvPr id="1" name=""/>
+        <p:cNvGrpSpPr/>
+        <p:nvPr/>
+      </p:nvGrpSpPr>
+      <p:grpSpPr>
+        <a:xfrm>
+          <a:off x="0" y="0"/>
+          <a:ext cx="0" cy="0"/>
+          <a:chOff x="0" y="0"/>
+          <a:chExt cx="0" cy="0"/>
+        </a:xfrm>
+      </p:grpSpPr>
+      <p:sp>
+        <p:nvSpPr>
+          <p:cNvPr id="2" name="Slide Image Placeholder 1"/>
+          <p:cNvSpPr>
+            <a:spLocks noGrp="1" noRot="1" noChangeAspect="1"/>
+          </p:cNvSpPr>
+          <p:nvPr>
+            <p:ph type="sldImg"/>
+          </p:nvPr>
+        </p:nvSpPr>
+        <p:spPr/>
+      </p:sp>
+      <p:sp>
+        <p:nvSpPr>
+          <p:cNvPr id="3" name="Notes Placeholder 2"/>
+          <p:cNvSpPr>
+            <a:spLocks noGrp="1"/>
+          </p:cNvSpPr>
+          <p:nvPr>
+            <p:ph type="body" idx="1"/>
+          </p:nvPr>
+        </p:nvSpPr>
+        <p:spPr/>
+        <p:txBody>
+          <a:bodyPr/>
+          <a:lstStyle/>
+          <a:p>
+            <a:endParaRPr lang="en-US" dirty="0"/>
+          </a:p>
+        </p:txBody>
+      </p:sp>
+      <p:sp>
+        <p:nvSpPr>
+          <p:cNvPr id="4" name="Slide Number Placeholder 3"/>
+          <p:cNvSpPr>
+            <a:spLocks noGrp="1"/>
+          </p:cNvSpPr>
+          <p:nvPr>
+            <p:ph type="sldNum" sz="quarter" idx="10"/>
+          </p:nvPr>
+        </p:nvSpPr>
+        <p:spPr/>
+        <p:txBody>
+          <a:bodyPr/>
+          <a:lstStyle/>
+          <a:p>
+            <a:fld id="{F7021451-1387-4CA6-816F-3879F97B5CBC}" type="slidenum">
+              <a:rPr lang="en-US"/>
+              <a:t>9</a:t>
             </a:fld>
             <a:endParaRPr lang="en-US"/>
           </a:p>
@@ -3127,90 +3212,111 @@
           </a:p>
         </p:txBody>
       </p:sp>
-      <p:sp>
-        <p:nvSpPr>
-          <p:cNvPr id="4" name="Shape 2"/>
-          <p:cNvSpPr/>
+      <p:grpSp>
+        <p:nvGrpSpPr>
+          <p:cNvPr id="10" name="Group 9">
+            <a:extLst>
+              <a:ext uri="{FF2B5EF4-FFF2-40B4-BE49-F238E27FC236}">
+                <a16:creationId xmlns:a16="http://schemas.microsoft.com/office/drawing/2014/main" id="{A204ACEC-C411-4246-BC5D-DCBBD59BB872}"/>
+              </a:ext>
+            </a:extLst>
+          </p:cNvPr>
+          <p:cNvGrpSpPr/>
           <p:nvPr/>
-        </p:nvSpPr>
-        <p:spPr>
+        </p:nvGrpSpPr>
+        <p:grpSpPr>
           <a:xfrm>
-            <a:off x="457200" y="1417320"/>
-            <a:ext cx="8229600" cy="640080"/>
+            <a:off x="457200" y="1182190"/>
+            <a:ext cx="3362597" cy="640080"/>
+            <a:chOff x="457200" y="1182190"/>
+            <a:chExt cx="8229600" cy="640080"/>
           </a:xfrm>
-          <a:prstGeom prst="roundRect">
-            <a:avLst>
-              <a:gd name="adj" fmla="val 11429"/>
-            </a:avLst>
-          </a:prstGeom>
-          <a:solidFill>
-            <a:srgbClr val="F7F9FC"/>
-          </a:solidFill>
-          <a:ln w="9525">
+        </p:grpSpPr>
+        <p:sp>
+          <p:nvSpPr>
+            <p:cNvPr id="4" name="Shape 2"/>
+            <p:cNvSpPr/>
+            <p:nvPr/>
+          </p:nvSpPr>
+          <p:spPr>
+            <a:xfrm>
+              <a:off x="457200" y="1182190"/>
+              <a:ext cx="8229600" cy="640080"/>
+            </a:xfrm>
+            <a:prstGeom prst="roundRect">
+              <a:avLst>
+                <a:gd name="adj" fmla="val 11429"/>
+              </a:avLst>
+            </a:prstGeom>
             <a:solidFill>
-              <a:srgbClr val="E2E8F0"/>
+              <a:srgbClr val="F7F9FC"/>
             </a:solidFill>
-            <a:prstDash val="solid"/>
-          </a:ln>
-        </p:spPr>
-        <p:txBody>
-          <a:bodyPr/>
-          <a:lstStyle/>
-          <a:p>
-            <a:endParaRPr lang="es-ES"/>
-          </a:p>
-        </p:txBody>
-      </p:sp>
-      <p:sp>
-        <p:nvSpPr>
-          <p:cNvPr id="5" name="Text 3"/>
-          <p:cNvSpPr/>
-          <p:nvPr/>
-        </p:nvSpPr>
-        <p:spPr>
-          <a:xfrm>
-            <a:off x="685800" y="1463040"/>
-            <a:ext cx="7772400" cy="548640"/>
-          </a:xfrm>
-          <a:prstGeom prst="rect">
-            <a:avLst/>
-          </a:prstGeom>
-          <a:noFill/>
-          <a:ln/>
-        </p:spPr>
-        <p:txBody>
-          <a:bodyPr wrap="square" lIns="0" tIns="0" rIns="0" bIns="0" rtlCol="0" anchor="ctr"/>
-          <a:lstStyle/>
-          <a:p>
-            <a:pPr marL="0" indent="0">
-              <a:buNone/>
-            </a:pPr>
-            <a:r>
-              <a:rPr lang="en-US" sz="1300" b="1" dirty="0">
-                <a:solidFill>
-                  <a:srgbClr val="1E3A5F"/>
-                </a:solidFill>
-                <a:latin typeface="Calibri" pitchFamily="34" charset="0"/>
-                <a:ea typeface="Calibri" pitchFamily="34" charset="-122"/>
-                <a:cs typeface="Calibri" pitchFamily="34" charset="-120"/>
-              </a:rPr>
-              <a:t>Pregunta de negocio:  </a:t>
-            </a:r>
-            <a:r>
-              <a:rPr lang="en-US" sz="1300" i="1" dirty="0">
-                <a:solidFill>
-                  <a:srgbClr val="1E293B"/>
-                </a:solidFill>
-                <a:latin typeface="Calibri" pitchFamily="34" charset="0"/>
-                <a:ea typeface="Calibri" pitchFamily="34" charset="-122"/>
-                <a:cs typeface="Calibri" pitchFamily="34" charset="-120"/>
-              </a:rPr>
-              <a:t>¿Cuál es el precio medio de los alojamientos por tipo de alojamiento en cada ciudad?</a:t>
-            </a:r>
-            <a:endParaRPr lang="en-US" sz="1300" dirty="0"/>
-          </a:p>
-        </p:txBody>
-      </p:sp>
+            <a:ln w="9525">
+              <a:solidFill>
+                <a:srgbClr val="E2E8F0"/>
+              </a:solidFill>
+              <a:prstDash val="solid"/>
+            </a:ln>
+          </p:spPr>
+          <p:txBody>
+            <a:bodyPr/>
+            <a:lstStyle/>
+            <a:p>
+              <a:endParaRPr lang="es-ES"/>
+            </a:p>
+          </p:txBody>
+        </p:sp>
+        <p:sp>
+          <p:nvSpPr>
+            <p:cNvPr id="5" name="Text 3"/>
+            <p:cNvSpPr/>
+            <p:nvPr/>
+          </p:nvSpPr>
+          <p:spPr>
+            <a:xfrm>
+              <a:off x="685800" y="1227910"/>
+              <a:ext cx="7772400" cy="548640"/>
+            </a:xfrm>
+            <a:prstGeom prst="rect">
+              <a:avLst/>
+            </a:prstGeom>
+            <a:noFill/>
+            <a:ln/>
+          </p:spPr>
+          <p:txBody>
+            <a:bodyPr wrap="square" lIns="0" tIns="0" rIns="0" bIns="0" rtlCol="0" anchor="ctr"/>
+            <a:lstStyle/>
+            <a:p>
+              <a:pPr marL="0" indent="0">
+                <a:buNone/>
+              </a:pPr>
+              <a:r>
+                <a:rPr lang="en-US" sz="1300" b="1" dirty="0">
+                  <a:solidFill>
+                    <a:srgbClr val="1E3A5F"/>
+                  </a:solidFill>
+                  <a:latin typeface="Calibri" pitchFamily="34" charset="0"/>
+                  <a:ea typeface="Calibri" pitchFamily="34" charset="-122"/>
+                  <a:cs typeface="Calibri" pitchFamily="34" charset="-120"/>
+                </a:rPr>
+                <a:t>Pregunta de negocio:  </a:t>
+              </a:r>
+              <a:r>
+                <a:rPr lang="en-US" sz="1300" i="1" dirty="0">
+                  <a:solidFill>
+                    <a:srgbClr val="1E293B"/>
+                  </a:solidFill>
+                  <a:latin typeface="Calibri" pitchFamily="34" charset="0"/>
+                  <a:ea typeface="Calibri" pitchFamily="34" charset="-122"/>
+                  <a:cs typeface="Calibri" pitchFamily="34" charset="-120"/>
+                </a:rPr>
+                <a:t>¿Cuál es el precio medio de los alojamientos por tipo de alojamiento en cada ciudad?</a:t>
+              </a:r>
+              <a:endParaRPr lang="en-US" sz="1300" dirty="0"/>
+            </a:p>
+          </p:txBody>
+        </p:sp>
+      </p:grpSp>
       <p:sp>
         <p:nvSpPr>
           <p:cNvPr id="6" name="Text 4"/>
@@ -3219,7 +3325,7 @@
         </p:nvSpPr>
         <p:spPr>
           <a:xfrm>
-            <a:off x="457200" y="2286000"/>
+            <a:off x="457200" y="1861455"/>
             <a:ext cx="8229600" cy="365760"/>
           </a:xfrm>
           <a:prstGeom prst="rect">
@@ -3250,89 +3356,811 @@
           </a:p>
         </p:txBody>
       </p:sp>
+      <p:pic>
+        <p:nvPicPr>
+          <p:cNvPr id="12" name="Picture 11">
+            <a:extLst>
+              <a:ext uri="{FF2B5EF4-FFF2-40B4-BE49-F238E27FC236}">
+                <a16:creationId xmlns:a16="http://schemas.microsoft.com/office/drawing/2014/main" id="{3563ED48-D6A7-49C3-95E5-A89C530EAB64}"/>
+              </a:ext>
+            </a:extLst>
+          </p:cNvPr>
+          <p:cNvPicPr>
+            <a:picLocks noChangeAspect="1"/>
+          </p:cNvPicPr>
+          <p:nvPr/>
+        </p:nvPicPr>
+        <p:blipFill>
+          <a:blip r:embed="rId3"/>
+          <a:stretch>
+            <a:fillRect/>
+          </a:stretch>
+        </p:blipFill>
+        <p:spPr>
+          <a:xfrm>
+            <a:off x="3913202" y="666204"/>
+            <a:ext cx="5151025" cy="4410341"/>
+          </a:xfrm>
+          <a:prstGeom prst="rect">
+            <a:avLst/>
+          </a:prstGeom>
+          <a:ln>
+            <a:solidFill>
+              <a:srgbClr val="1E3A5F"/>
+            </a:solidFill>
+          </a:ln>
+          <a:effectLst>
+            <a:outerShdw blurRad="50800" dist="38100" dir="2700000" algn="tl" rotWithShape="0">
+              <a:prstClr val="black">
+                <a:alpha val="40000"/>
+              </a:prstClr>
+            </a:outerShdw>
+          </a:effectLst>
+        </p:spPr>
+      </p:pic>
       <p:sp>
         <p:nvSpPr>
-          <p:cNvPr id="7" name="Shape 5"/>
+          <p:cNvPr id="14" name="Rectangle: Rounded Corners 13">
+            <a:extLst>
+              <a:ext uri="{FF2B5EF4-FFF2-40B4-BE49-F238E27FC236}">
+                <a16:creationId xmlns:a16="http://schemas.microsoft.com/office/drawing/2014/main" id="{ECD11CE4-C6AC-4E34-8BD9-8654B888F976}"/>
+              </a:ext>
+            </a:extLst>
+          </p:cNvPr>
           <p:cNvSpPr/>
           <p:nvPr/>
         </p:nvSpPr>
         <p:spPr>
           <a:xfrm>
-            <a:off x="457200" y="2697480"/>
-            <a:ext cx="8229600" cy="2194560"/>
+            <a:off x="156090" y="3208023"/>
+            <a:ext cx="1548613" cy="844015"/>
           </a:xfrm>
           <a:prstGeom prst="roundRect">
-            <a:avLst>
-              <a:gd name="adj" fmla="val 4167"/>
-            </a:avLst>
+            <a:avLst/>
           </a:prstGeom>
           <a:solidFill>
-            <a:srgbClr val="FFFFFF"/>
+            <a:srgbClr val="1E3A5F"/>
           </a:solidFill>
-          <a:ln w="12700">
-            <a:solidFill>
-              <a:srgbClr val="2E86AB"/>
-            </a:solidFill>
-            <a:prstDash val="dash"/>
-          </a:ln>
         </p:spPr>
+        <p:style>
+          <a:lnRef idx="2">
+            <a:schemeClr val="accent1">
+              <a:shade val="50000"/>
+            </a:schemeClr>
+          </a:lnRef>
+          <a:fillRef idx="1">
+            <a:schemeClr val="accent1"/>
+          </a:fillRef>
+          <a:effectRef idx="0">
+            <a:schemeClr val="accent1"/>
+          </a:effectRef>
+          <a:fontRef idx="minor">
+            <a:schemeClr val="lt1"/>
+          </a:fontRef>
+        </p:style>
         <p:txBody>
-          <a:bodyPr/>
+          <a:bodyPr rtlCol="0" anchor="ctr"/>
           <a:lstStyle/>
           <a:p>
-            <a:endParaRPr lang="es-ES"/>
+            <a:pPr algn="ctr"/>
+            <a:r>
+              <a:rPr lang="en-US" sz="1400" dirty="0">
+                <a:latin typeface="Georgia" panose="02040502050405020303" pitchFamily="18" charset="0"/>
+              </a:rPr>
+              <a:t>Media: 1012 €</a:t>
+            </a:r>
+          </a:p>
+          <a:p>
+            <a:pPr algn="ctr"/>
+            <a:r>
+              <a:rPr lang="es-ES" sz="1400" dirty="0">
+                <a:latin typeface="Georgia" panose="02040502050405020303" pitchFamily="18" charset="0"/>
+              </a:rPr>
+              <a:t>Mediana</a:t>
+            </a:r>
+            <a:r>
+              <a:rPr lang="en-US" sz="1400" dirty="0">
+                <a:latin typeface="Georgia" panose="02040502050405020303" pitchFamily="18" charset="0"/>
+              </a:rPr>
+              <a:t>: 750 €</a:t>
+            </a:r>
+          </a:p>
+          <a:p>
+            <a:pPr algn="ctr"/>
+            <a:r>
+              <a:rPr lang="en-US" sz="1200" dirty="0">
+                <a:latin typeface="Georgia" panose="02040502050405020303" pitchFamily="18" charset="0"/>
+              </a:rPr>
+              <a:t>entre 460 y 1250 €</a:t>
+            </a:r>
+            <a:endParaRPr lang="en-GB" sz="1200" dirty="0">
+              <a:latin typeface="Georgia" panose="02040502050405020303" pitchFamily="18" charset="0"/>
+            </a:endParaRPr>
           </a:p>
         </p:txBody>
       </p:sp>
+      <p:cxnSp>
+        <p:nvCxnSpPr>
+          <p:cNvPr id="22" name="Straight Connector 21">
+            <a:extLst>
+              <a:ext uri="{FF2B5EF4-FFF2-40B4-BE49-F238E27FC236}">
+                <a16:creationId xmlns:a16="http://schemas.microsoft.com/office/drawing/2014/main" id="{9CBC635F-F45D-432A-B61F-61607D4FFD42}"/>
+              </a:ext>
+            </a:extLst>
+          </p:cNvPr>
+          <p:cNvCxnSpPr>
+            <a:cxnSpLocks/>
+            <a:stCxn id="14" idx="3"/>
+          </p:cNvCxnSpPr>
+          <p:nvPr/>
+        </p:nvCxnSpPr>
+        <p:spPr>
+          <a:xfrm>
+            <a:off x="1704703" y="3630031"/>
+            <a:ext cx="181247" cy="0"/>
+          </a:xfrm>
+          <a:prstGeom prst="line">
+            <a:avLst/>
+          </a:prstGeom>
+        </p:spPr>
+        <p:style>
+          <a:lnRef idx="1">
+            <a:schemeClr val="accent1"/>
+          </a:lnRef>
+          <a:fillRef idx="0">
+            <a:schemeClr val="accent1"/>
+          </a:fillRef>
+          <a:effectRef idx="0">
+            <a:schemeClr val="accent1"/>
+          </a:effectRef>
+          <a:fontRef idx="minor">
+            <a:schemeClr val="tx1"/>
+          </a:fontRef>
+        </p:style>
+      </p:cxnSp>
+      <p:grpSp>
+        <p:nvGrpSpPr>
+          <p:cNvPr id="37" name="Group 36">
+            <a:extLst>
+              <a:ext uri="{FF2B5EF4-FFF2-40B4-BE49-F238E27FC236}">
+                <a16:creationId xmlns:a16="http://schemas.microsoft.com/office/drawing/2014/main" id="{4CC51B43-2044-46E3-86B3-8328E234FA50}"/>
+              </a:ext>
+            </a:extLst>
+          </p:cNvPr>
+          <p:cNvGrpSpPr/>
+          <p:nvPr/>
+        </p:nvGrpSpPr>
+        <p:grpSpPr>
+          <a:xfrm>
+            <a:off x="1885806" y="2227216"/>
+            <a:ext cx="1802273" cy="2805628"/>
+            <a:chOff x="1885806" y="2227216"/>
+            <a:chExt cx="1802273" cy="2805628"/>
+          </a:xfrm>
+        </p:grpSpPr>
+        <p:sp>
+          <p:nvSpPr>
+            <p:cNvPr id="15" name="Rectangle: Rounded Corners 14">
+              <a:extLst>
+                <a:ext uri="{FF2B5EF4-FFF2-40B4-BE49-F238E27FC236}">
+                  <a16:creationId xmlns:a16="http://schemas.microsoft.com/office/drawing/2014/main" id="{E469C38B-A3EB-4A66-8441-CD269933F06A}"/>
+                </a:ext>
+              </a:extLst>
+            </p:cNvPr>
+            <p:cNvSpPr/>
+            <p:nvPr/>
+          </p:nvSpPr>
+          <p:spPr>
+            <a:xfrm>
+              <a:off x="2081348" y="2227216"/>
+              <a:ext cx="1606731" cy="684000"/>
+            </a:xfrm>
+            <a:prstGeom prst="roundRect">
+              <a:avLst/>
+            </a:prstGeom>
+            <a:solidFill>
+              <a:srgbClr val="1E3A5F">
+                <a:alpha val="74902"/>
+              </a:srgbClr>
+            </a:solidFill>
+          </p:spPr>
+          <p:style>
+            <a:lnRef idx="2">
+              <a:schemeClr val="accent1">
+                <a:shade val="50000"/>
+              </a:schemeClr>
+            </a:lnRef>
+            <a:fillRef idx="1">
+              <a:schemeClr val="accent1"/>
+            </a:fillRef>
+            <a:effectRef idx="0">
+              <a:schemeClr val="accent1"/>
+            </a:effectRef>
+            <a:fontRef idx="minor">
+              <a:schemeClr val="lt1"/>
+            </a:fontRef>
+          </p:style>
+          <p:txBody>
+            <a:bodyPr rtlCol="0" anchor="ctr"/>
+            <a:lstStyle/>
+            <a:p>
+              <a:pPr algn="ctr"/>
+              <a:r>
+                <a:rPr lang="en-US" sz="1100" b="1" u="sng" dirty="0">
+                  <a:latin typeface="Georgia" panose="02040502050405020303" pitchFamily="18" charset="0"/>
+                </a:rPr>
+                <a:t>Entire home/apt</a:t>
+              </a:r>
+            </a:p>
+            <a:p>
+              <a:pPr algn="ctr"/>
+              <a:r>
+                <a:rPr lang="en-US" sz="1100" dirty="0">
+                  <a:latin typeface="Georgia" panose="02040502050405020303" pitchFamily="18" charset="0"/>
+                </a:rPr>
+                <a:t>Media: 1239 €</a:t>
+              </a:r>
+            </a:p>
+            <a:p>
+              <a:pPr algn="ctr"/>
+              <a:r>
+                <a:rPr lang="en-US" sz="1100" dirty="0" err="1">
+                  <a:latin typeface="Georgia" panose="02040502050405020303" pitchFamily="18" charset="0"/>
+                </a:rPr>
+                <a:t>Mediana</a:t>
+              </a:r>
+              <a:r>
+                <a:rPr lang="en-US" sz="1100" dirty="0">
+                  <a:latin typeface="Georgia" panose="02040502050405020303" pitchFamily="18" charset="0"/>
+                </a:rPr>
+                <a:t>: 980 €</a:t>
+              </a:r>
+            </a:p>
+            <a:p>
+              <a:pPr algn="ctr"/>
+              <a:r>
+                <a:rPr lang="en-US" sz="1050" dirty="0">
+                  <a:latin typeface="Georgia" panose="02040502050405020303" pitchFamily="18" charset="0"/>
+                </a:rPr>
+                <a:t>entre 660 y 1500 €</a:t>
+              </a:r>
+              <a:endParaRPr lang="en-GB" sz="1050" dirty="0">
+                <a:latin typeface="Georgia" panose="02040502050405020303" pitchFamily="18" charset="0"/>
+              </a:endParaRPr>
+            </a:p>
+          </p:txBody>
+        </p:sp>
+        <p:sp>
+          <p:nvSpPr>
+            <p:cNvPr id="16" name="Rectangle: Rounded Corners 15">
+              <a:extLst>
+                <a:ext uri="{FF2B5EF4-FFF2-40B4-BE49-F238E27FC236}">
+                  <a16:creationId xmlns:a16="http://schemas.microsoft.com/office/drawing/2014/main" id="{6B288502-E1B2-42E7-864D-8ED6890D3D5B}"/>
+                </a:ext>
+              </a:extLst>
+            </p:cNvPr>
+            <p:cNvSpPr/>
+            <p:nvPr/>
+          </p:nvSpPr>
+          <p:spPr>
+            <a:xfrm>
+              <a:off x="2081348" y="2934425"/>
+              <a:ext cx="1606731" cy="684000"/>
+            </a:xfrm>
+            <a:prstGeom prst="roundRect">
+              <a:avLst/>
+            </a:prstGeom>
+            <a:solidFill>
+              <a:srgbClr val="1E3A5F">
+                <a:alpha val="74902"/>
+              </a:srgbClr>
+            </a:solidFill>
+          </p:spPr>
+          <p:style>
+            <a:lnRef idx="2">
+              <a:schemeClr val="accent1">
+                <a:shade val="50000"/>
+              </a:schemeClr>
+            </a:lnRef>
+            <a:fillRef idx="1">
+              <a:schemeClr val="accent1"/>
+            </a:fillRef>
+            <a:effectRef idx="0">
+              <a:schemeClr val="accent1"/>
+            </a:effectRef>
+            <a:fontRef idx="minor">
+              <a:schemeClr val="lt1"/>
+            </a:fontRef>
+          </p:style>
+          <p:txBody>
+            <a:bodyPr rtlCol="0" anchor="ctr"/>
+            <a:lstStyle/>
+            <a:p>
+              <a:pPr algn="ctr"/>
+              <a:r>
+                <a:rPr lang="en-US" sz="1100" b="1" u="sng" dirty="0">
+                  <a:latin typeface="Georgia" panose="02040502050405020303" pitchFamily="18" charset="0"/>
+                </a:rPr>
+                <a:t>Hotel room</a:t>
+              </a:r>
+            </a:p>
+            <a:p>
+              <a:pPr algn="ctr"/>
+              <a:r>
+                <a:rPr lang="en-US" sz="1100" dirty="0">
+                  <a:latin typeface="Georgia" panose="02040502050405020303" pitchFamily="18" charset="0"/>
+                </a:rPr>
+                <a:t>Media: 1063 €</a:t>
+              </a:r>
+            </a:p>
+            <a:p>
+              <a:pPr algn="ctr"/>
+              <a:r>
+                <a:rPr lang="en-US" sz="1100" dirty="0" err="1">
+                  <a:latin typeface="Georgia" panose="02040502050405020303" pitchFamily="18" charset="0"/>
+                </a:rPr>
+                <a:t>Mediana</a:t>
+              </a:r>
+              <a:r>
+                <a:rPr lang="en-US" sz="1100" dirty="0">
+                  <a:latin typeface="Georgia" panose="02040502050405020303" pitchFamily="18" charset="0"/>
+                </a:rPr>
+                <a:t>: 1150 €</a:t>
+              </a:r>
+            </a:p>
+            <a:p>
+              <a:pPr algn="ctr"/>
+              <a:r>
+                <a:rPr lang="en-US" sz="1050" dirty="0">
+                  <a:latin typeface="Georgia" panose="02040502050405020303" pitchFamily="18" charset="0"/>
+                </a:rPr>
+                <a:t>entre 642 y 1490 €</a:t>
+              </a:r>
+              <a:endParaRPr lang="en-GB" sz="1050" dirty="0">
+                <a:latin typeface="Georgia" panose="02040502050405020303" pitchFamily="18" charset="0"/>
+              </a:endParaRPr>
+            </a:p>
+          </p:txBody>
+        </p:sp>
+        <p:sp>
+          <p:nvSpPr>
+            <p:cNvPr id="17" name="Rectangle: Rounded Corners 16">
+              <a:extLst>
+                <a:ext uri="{FF2B5EF4-FFF2-40B4-BE49-F238E27FC236}">
+                  <a16:creationId xmlns:a16="http://schemas.microsoft.com/office/drawing/2014/main" id="{34B8F816-5682-480C-ADAF-C50B073685AD}"/>
+                </a:ext>
+              </a:extLst>
+            </p:cNvPr>
+            <p:cNvSpPr/>
+            <p:nvPr/>
+          </p:nvSpPr>
+          <p:spPr>
+            <a:xfrm>
+              <a:off x="2081347" y="3641634"/>
+              <a:ext cx="1606731" cy="684000"/>
+            </a:xfrm>
+            <a:prstGeom prst="roundRect">
+              <a:avLst/>
+            </a:prstGeom>
+            <a:solidFill>
+              <a:srgbClr val="1E3A5F">
+                <a:alpha val="74902"/>
+              </a:srgbClr>
+            </a:solidFill>
+          </p:spPr>
+          <p:style>
+            <a:lnRef idx="2">
+              <a:schemeClr val="accent1">
+                <a:shade val="50000"/>
+              </a:schemeClr>
+            </a:lnRef>
+            <a:fillRef idx="1">
+              <a:schemeClr val="accent1"/>
+            </a:fillRef>
+            <a:effectRef idx="0">
+              <a:schemeClr val="accent1"/>
+            </a:effectRef>
+            <a:fontRef idx="minor">
+              <a:schemeClr val="lt1"/>
+            </a:fontRef>
+          </p:style>
+          <p:txBody>
+            <a:bodyPr rtlCol="0" anchor="ctr"/>
+            <a:lstStyle/>
+            <a:p>
+              <a:pPr algn="ctr"/>
+              <a:r>
+                <a:rPr lang="en-US" sz="1100" b="1" u="sng" dirty="0">
+                  <a:latin typeface="Georgia" panose="02040502050405020303" pitchFamily="18" charset="0"/>
+                </a:rPr>
+                <a:t>Private room</a:t>
+              </a:r>
+            </a:p>
+            <a:p>
+              <a:pPr algn="ctr"/>
+              <a:r>
+                <a:rPr lang="en-US" sz="1100" dirty="0">
+                  <a:latin typeface="Georgia" panose="02040502050405020303" pitchFamily="18" charset="0"/>
+                </a:rPr>
+                <a:t>Media: 448 €</a:t>
+              </a:r>
+            </a:p>
+            <a:p>
+              <a:pPr algn="ctr"/>
+              <a:r>
+                <a:rPr lang="en-US" sz="1100" dirty="0" err="1">
+                  <a:latin typeface="Georgia" panose="02040502050405020303" pitchFamily="18" charset="0"/>
+                </a:rPr>
+                <a:t>Mediana</a:t>
+              </a:r>
+              <a:r>
+                <a:rPr lang="en-US" sz="1100" dirty="0">
+                  <a:latin typeface="Georgia" panose="02040502050405020303" pitchFamily="18" charset="0"/>
+                </a:rPr>
+                <a:t>: 350 €</a:t>
+              </a:r>
+            </a:p>
+            <a:p>
+              <a:pPr algn="ctr"/>
+              <a:r>
+                <a:rPr lang="en-US" sz="1050" dirty="0">
+                  <a:latin typeface="Georgia" panose="02040502050405020303" pitchFamily="18" charset="0"/>
+                </a:rPr>
+                <a:t>entre 250 y 500 €</a:t>
+              </a:r>
+              <a:endParaRPr lang="en-GB" sz="1050" dirty="0">
+                <a:latin typeface="Georgia" panose="02040502050405020303" pitchFamily="18" charset="0"/>
+              </a:endParaRPr>
+            </a:p>
+          </p:txBody>
+        </p:sp>
+        <p:sp>
+          <p:nvSpPr>
+            <p:cNvPr id="18" name="Rectangle: Rounded Corners 17">
+              <a:extLst>
+                <a:ext uri="{FF2B5EF4-FFF2-40B4-BE49-F238E27FC236}">
+                  <a16:creationId xmlns:a16="http://schemas.microsoft.com/office/drawing/2014/main" id="{7E9E9E2B-FD76-427A-B00A-23EE08A49CE3}"/>
+                </a:ext>
+              </a:extLst>
+            </p:cNvPr>
+            <p:cNvSpPr/>
+            <p:nvPr/>
+          </p:nvSpPr>
+          <p:spPr>
+            <a:xfrm>
+              <a:off x="2081348" y="4348844"/>
+              <a:ext cx="1606731" cy="684000"/>
+            </a:xfrm>
+            <a:prstGeom prst="roundRect">
+              <a:avLst/>
+            </a:prstGeom>
+            <a:solidFill>
+              <a:srgbClr val="1E3A5F">
+                <a:alpha val="74902"/>
+              </a:srgbClr>
+            </a:solidFill>
+          </p:spPr>
+          <p:style>
+            <a:lnRef idx="2">
+              <a:schemeClr val="accent1">
+                <a:shade val="50000"/>
+              </a:schemeClr>
+            </a:lnRef>
+            <a:fillRef idx="1">
+              <a:schemeClr val="accent1"/>
+            </a:fillRef>
+            <a:effectRef idx="0">
+              <a:schemeClr val="accent1"/>
+            </a:effectRef>
+            <a:fontRef idx="minor">
+              <a:schemeClr val="lt1"/>
+            </a:fontRef>
+          </p:style>
+          <p:txBody>
+            <a:bodyPr rtlCol="0" anchor="ctr"/>
+            <a:lstStyle/>
+            <a:p>
+              <a:pPr algn="ctr"/>
+              <a:r>
+                <a:rPr lang="en-US" sz="1100" b="1" u="sng" dirty="0">
+                  <a:latin typeface="Georgia" panose="02040502050405020303" pitchFamily="18" charset="0"/>
+                </a:rPr>
+                <a:t>Shared room</a:t>
+              </a:r>
+            </a:p>
+            <a:p>
+              <a:pPr algn="ctr"/>
+              <a:r>
+                <a:rPr lang="en-US" sz="1100" dirty="0">
+                  <a:latin typeface="Georgia" panose="02040502050405020303" pitchFamily="18" charset="0"/>
+                </a:rPr>
+                <a:t>Media: 325 €</a:t>
+              </a:r>
+            </a:p>
+            <a:p>
+              <a:pPr algn="ctr"/>
+              <a:r>
+                <a:rPr lang="en-US" sz="1100" dirty="0" err="1">
+                  <a:latin typeface="Georgia" panose="02040502050405020303" pitchFamily="18" charset="0"/>
+                </a:rPr>
+                <a:t>Mediana</a:t>
+              </a:r>
+              <a:r>
+                <a:rPr lang="en-US" sz="1100" dirty="0">
+                  <a:latin typeface="Georgia" panose="02040502050405020303" pitchFamily="18" charset="0"/>
+                </a:rPr>
+                <a:t>: 250 €</a:t>
+              </a:r>
+            </a:p>
+            <a:p>
+              <a:pPr algn="ctr"/>
+              <a:r>
+                <a:rPr lang="en-US" sz="1050" dirty="0">
+                  <a:latin typeface="Georgia" panose="02040502050405020303" pitchFamily="18" charset="0"/>
+                </a:rPr>
+                <a:t>entre 150 y 420 €</a:t>
+              </a:r>
+              <a:endParaRPr lang="en-GB" sz="1050" dirty="0">
+                <a:latin typeface="Georgia" panose="02040502050405020303" pitchFamily="18" charset="0"/>
+              </a:endParaRPr>
+            </a:p>
+          </p:txBody>
+        </p:sp>
+        <p:grpSp>
+          <p:nvGrpSpPr>
+            <p:cNvPr id="36" name="Group 35">
+              <a:extLst>
+                <a:ext uri="{FF2B5EF4-FFF2-40B4-BE49-F238E27FC236}">
+                  <a16:creationId xmlns:a16="http://schemas.microsoft.com/office/drawing/2014/main" id="{5E45D908-B49B-461B-99FA-149990949017}"/>
+                </a:ext>
+              </a:extLst>
+            </p:cNvPr>
+            <p:cNvGrpSpPr/>
+            <p:nvPr/>
+          </p:nvGrpSpPr>
+          <p:grpSpPr>
+            <a:xfrm>
+              <a:off x="1885806" y="2569216"/>
+              <a:ext cx="195542" cy="2128817"/>
+              <a:chOff x="1885806" y="2569216"/>
+              <a:chExt cx="195542" cy="2128817"/>
+            </a:xfrm>
+          </p:grpSpPr>
+          <p:cxnSp>
+            <p:nvCxnSpPr>
+              <p:cNvPr id="24" name="Straight Connector 23">
+                <a:extLst>
+                  <a:ext uri="{FF2B5EF4-FFF2-40B4-BE49-F238E27FC236}">
+                    <a16:creationId xmlns:a16="http://schemas.microsoft.com/office/drawing/2014/main" id="{A9DDD94C-4E36-4749-8383-AB40635E50C4}"/>
+                  </a:ext>
+                </a:extLst>
+              </p:cNvPr>
+              <p:cNvCxnSpPr>
+                <a:cxnSpLocks/>
+              </p:cNvCxnSpPr>
+              <p:nvPr/>
+            </p:nvCxnSpPr>
+            <p:spPr>
+              <a:xfrm>
+                <a:off x="1885950" y="3278822"/>
+                <a:ext cx="195398" cy="0"/>
+              </a:xfrm>
+              <a:prstGeom prst="line">
+                <a:avLst/>
+              </a:prstGeom>
+            </p:spPr>
+            <p:style>
+              <a:lnRef idx="1">
+                <a:schemeClr val="accent1"/>
+              </a:lnRef>
+              <a:fillRef idx="0">
+                <a:schemeClr val="accent1"/>
+              </a:fillRef>
+              <a:effectRef idx="0">
+                <a:schemeClr val="accent1"/>
+              </a:effectRef>
+              <a:fontRef idx="minor">
+                <a:schemeClr val="tx1"/>
+              </a:fontRef>
+            </p:style>
+          </p:cxnSp>
+          <p:cxnSp>
+            <p:nvCxnSpPr>
+              <p:cNvPr id="25" name="Straight Connector 24">
+                <a:extLst>
+                  <a:ext uri="{FF2B5EF4-FFF2-40B4-BE49-F238E27FC236}">
+                    <a16:creationId xmlns:a16="http://schemas.microsoft.com/office/drawing/2014/main" id="{5D96B564-551A-4C7E-A09E-2DEEE8D69B05}"/>
+                  </a:ext>
+                </a:extLst>
+              </p:cNvPr>
+              <p:cNvCxnSpPr>
+                <a:cxnSpLocks/>
+              </p:cNvCxnSpPr>
+              <p:nvPr/>
+            </p:nvCxnSpPr>
+            <p:spPr>
+              <a:xfrm>
+                <a:off x="1885950" y="2569216"/>
+                <a:ext cx="194400" cy="0"/>
+              </a:xfrm>
+              <a:prstGeom prst="line">
+                <a:avLst/>
+              </a:prstGeom>
+            </p:spPr>
+            <p:style>
+              <a:lnRef idx="1">
+                <a:schemeClr val="accent1"/>
+              </a:lnRef>
+              <a:fillRef idx="0">
+                <a:schemeClr val="accent1"/>
+              </a:fillRef>
+              <a:effectRef idx="0">
+                <a:schemeClr val="accent1"/>
+              </a:effectRef>
+              <a:fontRef idx="minor">
+                <a:schemeClr val="tx1"/>
+              </a:fontRef>
+            </p:style>
+          </p:cxnSp>
+          <p:cxnSp>
+            <p:nvCxnSpPr>
+              <p:cNvPr id="26" name="Straight Connector 25">
+                <a:extLst>
+                  <a:ext uri="{FF2B5EF4-FFF2-40B4-BE49-F238E27FC236}">
+                    <a16:creationId xmlns:a16="http://schemas.microsoft.com/office/drawing/2014/main" id="{F6B8AE80-9B90-4E85-80F1-B77C84393877}"/>
+                  </a:ext>
+                </a:extLst>
+              </p:cNvPr>
+              <p:cNvCxnSpPr>
+                <a:cxnSpLocks/>
+              </p:cNvCxnSpPr>
+              <p:nvPr/>
+            </p:nvCxnSpPr>
+            <p:spPr>
+              <a:xfrm>
+                <a:off x="1885950" y="3988428"/>
+                <a:ext cx="194400" cy="0"/>
+              </a:xfrm>
+              <a:prstGeom prst="line">
+                <a:avLst/>
+              </a:prstGeom>
+            </p:spPr>
+            <p:style>
+              <a:lnRef idx="1">
+                <a:schemeClr val="accent1"/>
+              </a:lnRef>
+              <a:fillRef idx="0">
+                <a:schemeClr val="accent1"/>
+              </a:fillRef>
+              <a:effectRef idx="0">
+                <a:schemeClr val="accent1"/>
+              </a:effectRef>
+              <a:fontRef idx="minor">
+                <a:schemeClr val="tx1"/>
+              </a:fontRef>
+            </p:style>
+          </p:cxnSp>
+          <p:cxnSp>
+            <p:nvCxnSpPr>
+              <p:cNvPr id="27" name="Straight Connector 26">
+                <a:extLst>
+                  <a:ext uri="{FF2B5EF4-FFF2-40B4-BE49-F238E27FC236}">
+                    <a16:creationId xmlns:a16="http://schemas.microsoft.com/office/drawing/2014/main" id="{06DF3F3C-E5FC-446D-AABA-6D46DEF39A87}"/>
+                  </a:ext>
+                </a:extLst>
+              </p:cNvPr>
+              <p:cNvCxnSpPr>
+                <a:cxnSpLocks/>
+              </p:cNvCxnSpPr>
+              <p:nvPr/>
+            </p:nvCxnSpPr>
+            <p:spPr>
+              <a:xfrm>
+                <a:off x="1885950" y="4698033"/>
+                <a:ext cx="194400" cy="0"/>
+              </a:xfrm>
+              <a:prstGeom prst="line">
+                <a:avLst/>
+              </a:prstGeom>
+            </p:spPr>
+            <p:style>
+              <a:lnRef idx="1">
+                <a:schemeClr val="accent1"/>
+              </a:lnRef>
+              <a:fillRef idx="0">
+                <a:schemeClr val="accent1"/>
+              </a:fillRef>
+              <a:effectRef idx="0">
+                <a:schemeClr val="accent1"/>
+              </a:effectRef>
+              <a:fontRef idx="minor">
+                <a:schemeClr val="tx1"/>
+              </a:fontRef>
+            </p:style>
+          </p:cxnSp>
+          <p:cxnSp>
+            <p:nvCxnSpPr>
+              <p:cNvPr id="28" name="Straight Connector 27">
+                <a:extLst>
+                  <a:ext uri="{FF2B5EF4-FFF2-40B4-BE49-F238E27FC236}">
+                    <a16:creationId xmlns:a16="http://schemas.microsoft.com/office/drawing/2014/main" id="{E7141BD1-5212-4BD8-8102-B7F14C14DC9C}"/>
+                  </a:ext>
+                </a:extLst>
+              </p:cNvPr>
+              <p:cNvCxnSpPr>
+                <a:cxnSpLocks/>
+              </p:cNvCxnSpPr>
+              <p:nvPr/>
+            </p:nvCxnSpPr>
+            <p:spPr>
+              <a:xfrm flipV="1">
+                <a:off x="1885806" y="2569217"/>
+                <a:ext cx="0" cy="2128816"/>
+              </a:xfrm>
+              <a:prstGeom prst="line">
+                <a:avLst/>
+              </a:prstGeom>
+            </p:spPr>
+            <p:style>
+              <a:lnRef idx="1">
+                <a:schemeClr val="accent1"/>
+              </a:lnRef>
+              <a:fillRef idx="0">
+                <a:schemeClr val="accent1"/>
+              </a:fillRef>
+              <a:effectRef idx="0">
+                <a:schemeClr val="accent1"/>
+              </a:effectRef>
+              <a:fontRef idx="minor">
+                <a:schemeClr val="tx1"/>
+              </a:fontRef>
+            </p:style>
+          </p:cxnSp>
+        </p:grpSp>
+      </p:grpSp>
+    </p:spTree>
+  </p:cSld>
+  <p:clrMapOvr>
+    <a:masterClrMapping/>
+  </p:clrMapOvr>
+</p:sld>
+</file>
+
+<file path=ppt/slides/slide4.xml><?xml version="1.0" encoding="utf-8"?>
+<p:sld xmlns:a="http://schemas.openxmlformats.org/drawingml/2006/main" xmlns:r="http://schemas.openxmlformats.org/officeDocument/2006/relationships" xmlns:p="http://schemas.openxmlformats.org/presentationml/2006/main">
+  <p:cSld>
+    <p:bg>
+      <p:bgPr>
+        <a:solidFill>
+          <a:srgbClr val="FFFFFF"/>
+        </a:solidFill>
+        <a:effectLst/>
+      </p:bgPr>
+    </p:bg>
+    <p:spTree>
+      <p:nvGrpSpPr>
+        <p:cNvPr id="1" name=""/>
+        <p:cNvGrpSpPr/>
+        <p:nvPr/>
+      </p:nvGrpSpPr>
+      <p:grpSpPr>
+        <a:xfrm>
+          <a:off x="0" y="0"/>
+          <a:ext cx="0" cy="0"/>
+          <a:chOff x="0" y="0"/>
+          <a:chExt cx="0" cy="0"/>
+        </a:xfrm>
+      </p:grpSpPr>
       <p:sp>
         <p:nvSpPr>
-          <p:cNvPr id="8" name="Text 6"/>
+          <p:cNvPr id="2" name="Text 0"/>
           <p:cNvSpPr/>
           <p:nvPr/>
         </p:nvSpPr>
         <p:spPr>
           <a:xfrm>
-            <a:off x="457200" y="2834640"/>
-            <a:ext cx="8229600" cy="320040"/>
-          </a:xfrm>
-          <a:prstGeom prst="rect">
-            <a:avLst/>
-          </a:prstGeom>
-          <a:noFill/>
-          <a:ln/>
-        </p:spPr>
-        <p:txBody>
-          <a:bodyPr wrap="square" lIns="0" tIns="0" rIns="0" bIns="0" rtlCol="0" anchor="ctr"/>
-          <a:lstStyle/>
-          <a:p>
-            <a:pPr marL="0" indent="0" algn="ctr">
-              <a:buNone/>
-            </a:pPr>
-            <a:r>
-              <a:rPr lang="en-US" sz="1100" i="1" dirty="0">
-                <a:solidFill>
-                  <a:srgbClr val="2E86AB"/>
-                </a:solidFill>
-                <a:latin typeface="Calibri" pitchFamily="34" charset="0"/>
-                <a:ea typeface="Calibri" pitchFamily="34" charset="-122"/>
-                <a:cs typeface="Calibri" pitchFamily="34" charset="-120"/>
-              </a:rPr>
-              <a:t>[ Sección a completar por la analista de Marketing ]</a:t>
-            </a:r>
-            <a:endParaRPr lang="en-US" sz="1100" dirty="0"/>
-          </a:p>
-        </p:txBody>
-      </p:sp>
-      <p:sp>
-        <p:nvSpPr>
-          <p:cNvPr id="9" name="Text 7"/>
-          <p:cNvSpPr/>
-          <p:nvPr/>
-        </p:nvSpPr>
-        <p:spPr>
-          <a:xfrm>
-            <a:off x="914400" y="3200400"/>
-            <a:ext cx="7315200" cy="1645920"/>
+            <a:off x="457200" y="274320"/>
+            <a:ext cx="8229600" cy="274320"/>
           </a:xfrm>
           <a:prstGeom prst="rect">
             <a:avLst/>
@@ -3345,115 +4173,1233 @@
           <a:lstStyle/>
           <a:p>
             <a:pPr marL="0" indent="0">
-              <a:spcAft>
-                <a:spcPts val="400"/>
-              </a:spcAft>
               <a:buNone/>
             </a:pPr>
             <a:r>
-              <a:rPr lang="en-US" sz="1200" b="1" dirty="0">
-                <a:solidFill>
-                  <a:srgbClr val="1E3A5F"/>
+              <a:rPr lang="en-US" sz="1100" b="1" kern="0" spc="400" dirty="0">
+                <a:solidFill>
+                  <a:srgbClr val="F18F01"/>
                 </a:solidFill>
                 <a:latin typeface="Calibri" pitchFamily="34" charset="0"/>
                 <a:ea typeface="Calibri" pitchFamily="34" charset="-122"/>
                 <a:cs typeface="Calibri" pitchFamily="34" charset="-120"/>
               </a:rPr>
-              <a:t>Pegar aquí la respuesta directa con datos:</a:t>
-            </a:r>
-            <a:endParaRPr lang="en-US" sz="1200" dirty="0"/>
-          </a:p>
-          <a:p>
-            <a:pPr marL="0" indent="0">
-              <a:spcAft>
-                <a:spcPts val="400"/>
-              </a:spcAft>
-              <a:buNone/>
-            </a:pPr>
-            <a:r>
-              <a:rPr lang="en-US" sz="1200" dirty="0">
-                <a:solidFill>
-                  <a:srgbClr val="000000"/>
-                </a:solidFill>
-                <a:latin typeface="Calibri" pitchFamily="34" charset="0"/>
-                <a:ea typeface="Calibri" pitchFamily="34" charset="-122"/>
-                <a:cs typeface="Calibri" pitchFamily="34" charset="-120"/>
-              </a:rPr>
-              <a:t> </a:t>
-            </a:r>
-            <a:endParaRPr lang="en-US" sz="1200" dirty="0"/>
-          </a:p>
-          <a:p>
-            <a:pPr marL="0" indent="0">
-              <a:spcAft>
-                <a:spcPts val="400"/>
-              </a:spcAft>
-              <a:buNone/>
-            </a:pPr>
-            <a:r>
-              <a:rPr lang="en-US" sz="1200" dirty="0">
-                <a:solidFill>
-                  <a:srgbClr val="1E293B"/>
-                </a:solidFill>
-                <a:latin typeface="Calibri" pitchFamily="34" charset="0"/>
-                <a:ea typeface="Calibri" pitchFamily="34" charset="-122"/>
-                <a:cs typeface="Calibri" pitchFamily="34" charset="-120"/>
-              </a:rPr>
-              <a:t>•  Una matriz/tabla con el precio medio por city × room_type (8 ciudades × 4 tipos).</a:t>
-            </a:r>
-            <a:endParaRPr lang="en-US" sz="1200" dirty="0"/>
-          </a:p>
-          <a:p>
-            <a:pPr marL="0" indent="0">
-              <a:spcAft>
-                <a:spcPts val="400"/>
-              </a:spcAft>
-              <a:buNone/>
-            </a:pPr>
-            <a:r>
-              <a:rPr lang="en-US" sz="1200" dirty="0">
-                <a:solidFill>
-                  <a:srgbClr val="1E293B"/>
-                </a:solidFill>
-                <a:latin typeface="Calibri" pitchFamily="34" charset="0"/>
-                <a:ea typeface="Calibri" pitchFamily="34" charset="-122"/>
-                <a:cs typeface="Calibri" pitchFamily="34" charset="-120"/>
-              </a:rPr>
-              <a:t>•  O una visualización equivalente (heatmap, barras agrupadas).</a:t>
-            </a:r>
-            <a:endParaRPr lang="en-US" sz="1200" dirty="0"/>
-          </a:p>
-          <a:p>
-            <a:pPr marL="0" indent="0">
-              <a:spcAft>
-                <a:spcPts val="400"/>
-              </a:spcAft>
-              <a:buNone/>
-            </a:pPr>
-            <a:r>
-              <a:rPr lang="en-US" sz="1200" dirty="0">
-                <a:solidFill>
-                  <a:srgbClr val="1E293B"/>
-                </a:solidFill>
-                <a:latin typeface="Calibri" pitchFamily="34" charset="0"/>
-                <a:ea typeface="Calibri" pitchFamily="34" charset="-122"/>
-                <a:cs typeface="Calibri" pitchFamily="34" charset="-120"/>
-              </a:rPr>
-              <a:t>•  Un párrafo breve que indique la cifra más alta y más baja para responder literalmente la pregunta.</a:t>
-            </a:r>
-            <a:endParaRPr lang="en-US" sz="1200" dirty="0"/>
+              <a:t>04 · ANÁLISIS COMERCIAL · MARKETING</a:t>
+            </a:r>
+            <a:endParaRPr lang="en-US" sz="1100" dirty="0"/>
           </a:p>
         </p:txBody>
       </p:sp>
+      <p:sp>
+        <p:nvSpPr>
+          <p:cNvPr id="3" name="Text 1"/>
+          <p:cNvSpPr/>
+          <p:nvPr/>
+        </p:nvSpPr>
+        <p:spPr>
+          <a:xfrm>
+            <a:off x="457200" y="548640"/>
+            <a:ext cx="8229600" cy="685800"/>
+          </a:xfrm>
+          <a:prstGeom prst="rect">
+            <a:avLst/>
+          </a:prstGeom>
+          <a:noFill/>
+          <a:ln/>
+        </p:spPr>
+        <p:txBody>
+          <a:bodyPr wrap="square" lIns="0" tIns="0" rIns="0" bIns="0" rtlCol="0" anchor="ctr"/>
+          <a:lstStyle/>
+          <a:p>
+            <a:pPr marL="0" indent="0">
+              <a:buNone/>
+            </a:pPr>
+            <a:r>
+              <a:rPr lang="en-US" sz="3000" b="1" dirty="0" err="1">
+                <a:solidFill>
+                  <a:srgbClr val="1E3A5F"/>
+                </a:solidFill>
+                <a:latin typeface="Georgia" pitchFamily="34" charset="0"/>
+                <a:ea typeface="Georgia" pitchFamily="34" charset="-122"/>
+                <a:cs typeface="Georgia" pitchFamily="34" charset="-120"/>
+              </a:rPr>
+              <a:t>Hallazgos</a:t>
+            </a:r>
+            <a:endParaRPr lang="en-US" sz="3000" dirty="0"/>
+          </a:p>
+        </p:txBody>
+      </p:sp>
+      <p:pic>
+        <p:nvPicPr>
+          <p:cNvPr id="14" name="Picture 13">
+            <a:extLst>
+              <a:ext uri="{FF2B5EF4-FFF2-40B4-BE49-F238E27FC236}">
+                <a16:creationId xmlns:a16="http://schemas.microsoft.com/office/drawing/2014/main" id="{61F7E8B0-2FA4-4A30-A417-C547003D482B}"/>
+              </a:ext>
+            </a:extLst>
+          </p:cNvPr>
+          <p:cNvPicPr>
+            <a:picLocks noChangeAspect="1"/>
+          </p:cNvPicPr>
+          <p:nvPr/>
+        </p:nvPicPr>
+        <p:blipFill>
+          <a:blip r:embed="rId3"/>
+          <a:stretch>
+            <a:fillRect/>
+          </a:stretch>
+        </p:blipFill>
+        <p:spPr>
+          <a:xfrm>
+            <a:off x="120801" y="1234440"/>
+            <a:ext cx="3240000" cy="1922927"/>
+          </a:xfrm>
+          <a:prstGeom prst="rect">
+            <a:avLst/>
+          </a:prstGeom>
+        </p:spPr>
+      </p:pic>
+      <p:pic>
+        <p:nvPicPr>
+          <p:cNvPr id="16" name="Picture 15">
+            <a:extLst>
+              <a:ext uri="{FF2B5EF4-FFF2-40B4-BE49-F238E27FC236}">
+                <a16:creationId xmlns:a16="http://schemas.microsoft.com/office/drawing/2014/main" id="{F279089A-19F4-48E1-B132-072C3C31C67F}"/>
+              </a:ext>
+            </a:extLst>
+          </p:cNvPr>
+          <p:cNvPicPr>
+            <a:picLocks noChangeAspect="1"/>
+          </p:cNvPicPr>
+          <p:nvPr/>
+        </p:nvPicPr>
+        <p:blipFill>
+          <a:blip r:embed="rId4"/>
+          <a:stretch>
+            <a:fillRect/>
+          </a:stretch>
+        </p:blipFill>
+        <p:spPr>
+          <a:xfrm>
+            <a:off x="3469520" y="1234440"/>
+            <a:ext cx="3240000" cy="1922927"/>
+          </a:xfrm>
+          <a:prstGeom prst="rect">
+            <a:avLst/>
+          </a:prstGeom>
+        </p:spPr>
+      </p:pic>
+      <p:pic>
+        <p:nvPicPr>
+          <p:cNvPr id="18" name="Picture 17">
+            <a:extLst>
+              <a:ext uri="{FF2B5EF4-FFF2-40B4-BE49-F238E27FC236}">
+                <a16:creationId xmlns:a16="http://schemas.microsoft.com/office/drawing/2014/main" id="{BED7ED8D-C744-49D5-8632-B0697446D840}"/>
+              </a:ext>
+            </a:extLst>
+          </p:cNvPr>
+          <p:cNvPicPr>
+            <a:picLocks noChangeAspect="1"/>
+          </p:cNvPicPr>
+          <p:nvPr/>
+        </p:nvPicPr>
+        <p:blipFill>
+          <a:blip r:embed="rId5"/>
+          <a:stretch>
+            <a:fillRect/>
+          </a:stretch>
+        </p:blipFill>
+        <p:spPr>
+          <a:xfrm>
+            <a:off x="120801" y="3157367"/>
+            <a:ext cx="3240000" cy="1922927"/>
+          </a:xfrm>
+          <a:prstGeom prst="rect">
+            <a:avLst/>
+          </a:prstGeom>
+        </p:spPr>
+      </p:pic>
+      <p:pic>
+        <p:nvPicPr>
+          <p:cNvPr id="20" name="Picture 19">
+            <a:extLst>
+              <a:ext uri="{FF2B5EF4-FFF2-40B4-BE49-F238E27FC236}">
+                <a16:creationId xmlns:a16="http://schemas.microsoft.com/office/drawing/2014/main" id="{B7815E3B-20BD-42E4-BD95-ABC0BDCBDE31}"/>
+              </a:ext>
+            </a:extLst>
+          </p:cNvPr>
+          <p:cNvPicPr>
+            <a:picLocks noChangeAspect="1"/>
+          </p:cNvPicPr>
+          <p:nvPr/>
+        </p:nvPicPr>
+        <p:blipFill>
+          <a:blip r:embed="rId6"/>
+          <a:stretch>
+            <a:fillRect/>
+          </a:stretch>
+        </p:blipFill>
+        <p:spPr>
+          <a:xfrm>
+            <a:off x="3469520" y="3157366"/>
+            <a:ext cx="3240000" cy="1922927"/>
+          </a:xfrm>
+          <a:prstGeom prst="rect">
+            <a:avLst/>
+          </a:prstGeom>
+        </p:spPr>
+      </p:pic>
+      <p:grpSp>
+        <p:nvGrpSpPr>
+          <p:cNvPr id="50" name="Group 49">
+            <a:extLst>
+              <a:ext uri="{FF2B5EF4-FFF2-40B4-BE49-F238E27FC236}">
+                <a16:creationId xmlns:a16="http://schemas.microsoft.com/office/drawing/2014/main" id="{88ACA488-55F8-43C0-B615-D2394A19E69B}"/>
+              </a:ext>
+            </a:extLst>
+          </p:cNvPr>
+          <p:cNvGrpSpPr/>
+          <p:nvPr/>
+        </p:nvGrpSpPr>
+        <p:grpSpPr>
+          <a:xfrm>
+            <a:off x="407205" y="1362775"/>
+            <a:ext cx="2868115" cy="1412109"/>
+            <a:chOff x="407205" y="1362775"/>
+            <a:chExt cx="2868115" cy="1412109"/>
+          </a:xfrm>
+        </p:grpSpPr>
+        <p:sp>
+          <p:nvSpPr>
+            <p:cNvPr id="22" name="Rectangle 21">
+              <a:extLst>
+                <a:ext uri="{FF2B5EF4-FFF2-40B4-BE49-F238E27FC236}">
+                  <a16:creationId xmlns:a16="http://schemas.microsoft.com/office/drawing/2014/main" id="{EA2B6DFD-87B2-405A-BC63-4375E6B69317}"/>
+                </a:ext>
+              </a:extLst>
+            </p:cNvPr>
+            <p:cNvSpPr/>
+            <p:nvPr/>
+          </p:nvSpPr>
+          <p:spPr>
+            <a:xfrm>
+              <a:off x="407205" y="1362775"/>
+              <a:ext cx="1619794" cy="594360"/>
+            </a:xfrm>
+            <a:prstGeom prst="rect">
+              <a:avLst/>
+            </a:prstGeom>
+            <a:solidFill>
+              <a:srgbClr val="C0392B"/>
+            </a:solidFill>
+          </p:spPr>
+          <p:style>
+            <a:lnRef idx="2">
+              <a:schemeClr val="accent1">
+                <a:shade val="50000"/>
+              </a:schemeClr>
+            </a:lnRef>
+            <a:fillRef idx="1">
+              <a:schemeClr val="accent1"/>
+            </a:fillRef>
+            <a:effectRef idx="0">
+              <a:schemeClr val="accent1"/>
+            </a:effectRef>
+            <a:fontRef idx="minor">
+              <a:schemeClr val="lt1"/>
+            </a:fontRef>
+          </p:style>
+          <p:txBody>
+            <a:bodyPr rtlCol="0" anchor="ctr"/>
+            <a:lstStyle/>
+            <a:p>
+              <a:pPr algn="ctr"/>
+              <a:r>
+                <a:rPr lang="en-US" sz="1400" dirty="0">
+                  <a:latin typeface="Georgia" panose="02040502050405020303" pitchFamily="18" charset="0"/>
+                </a:rPr>
+                <a:t>Mallorca: 1694 €</a:t>
+              </a:r>
+            </a:p>
+            <a:p>
+              <a:pPr algn="ctr"/>
+              <a:r>
+                <a:rPr lang="en-US" sz="1400" dirty="0">
+                  <a:latin typeface="Georgia" panose="02040502050405020303" pitchFamily="18" charset="0"/>
+                </a:rPr>
+                <a:t>Menorca: 1650 €</a:t>
+              </a:r>
+            </a:p>
+          </p:txBody>
+        </p:sp>
+        <p:sp>
+          <p:nvSpPr>
+            <p:cNvPr id="23" name="Rectangle 22">
+              <a:extLst>
+                <a:ext uri="{FF2B5EF4-FFF2-40B4-BE49-F238E27FC236}">
+                  <a16:creationId xmlns:a16="http://schemas.microsoft.com/office/drawing/2014/main" id="{B3494685-2B42-4BB3-9058-714EEAA53BD8}"/>
+                </a:ext>
+              </a:extLst>
+            </p:cNvPr>
+            <p:cNvSpPr/>
+            <p:nvPr/>
+          </p:nvSpPr>
+          <p:spPr>
+            <a:xfrm>
+              <a:off x="1655526" y="2049250"/>
+              <a:ext cx="1619794" cy="725634"/>
+            </a:xfrm>
+            <a:prstGeom prst="rect">
+              <a:avLst/>
+            </a:prstGeom>
+            <a:solidFill>
+              <a:srgbClr val="27AE60"/>
+            </a:solidFill>
+          </p:spPr>
+          <p:style>
+            <a:lnRef idx="2">
+              <a:schemeClr val="accent1">
+                <a:shade val="50000"/>
+              </a:schemeClr>
+            </a:lnRef>
+            <a:fillRef idx="1">
+              <a:schemeClr val="accent1"/>
+            </a:fillRef>
+            <a:effectRef idx="0">
+              <a:schemeClr val="accent1"/>
+            </a:effectRef>
+            <a:fontRef idx="minor">
+              <a:schemeClr val="lt1"/>
+            </a:fontRef>
+          </p:style>
+          <p:txBody>
+            <a:bodyPr numCol="2" rtlCol="0" anchor="ctr"/>
+            <a:lstStyle/>
+            <a:p>
+              <a:pPr algn="ctr"/>
+              <a:r>
+                <a:rPr lang="en-US" sz="1100" dirty="0">
+                  <a:latin typeface="Georgia" panose="02040502050405020303" pitchFamily="18" charset="0"/>
+                </a:rPr>
+                <a:t>Sevilla: 1033 €</a:t>
+              </a:r>
+            </a:p>
+            <a:p>
+              <a:pPr algn="ctr"/>
+              <a:r>
+                <a:rPr lang="en-US" sz="1100" dirty="0">
+                  <a:latin typeface="Georgia" panose="02040502050405020303" pitchFamily="18" charset="0"/>
+                </a:rPr>
+                <a:t>Madrid: 938 €</a:t>
+              </a:r>
+            </a:p>
+            <a:p>
+              <a:pPr algn="ctr"/>
+              <a:r>
+                <a:rPr lang="en-US" sz="1100" dirty="0">
+                  <a:latin typeface="Georgia" panose="02040502050405020303" pitchFamily="18" charset="0"/>
+                </a:rPr>
+                <a:t>Malaga: 815 €</a:t>
+              </a:r>
+            </a:p>
+            <a:p>
+              <a:pPr algn="ctr"/>
+              <a:r>
+                <a:rPr lang="en-US" sz="1100" dirty="0">
+                  <a:latin typeface="Georgia" panose="02040502050405020303" pitchFamily="18" charset="0"/>
+                </a:rPr>
+                <a:t>Valencia: 794 €</a:t>
+              </a:r>
+            </a:p>
+          </p:txBody>
+        </p:sp>
+      </p:grpSp>
+      <p:grpSp>
+        <p:nvGrpSpPr>
+          <p:cNvPr id="52" name="Group 51">
+            <a:extLst>
+              <a:ext uri="{FF2B5EF4-FFF2-40B4-BE49-F238E27FC236}">
+                <a16:creationId xmlns:a16="http://schemas.microsoft.com/office/drawing/2014/main" id="{7C2996B0-6519-45AA-9F9C-45B2E4D3812E}"/>
+              </a:ext>
+            </a:extLst>
+          </p:cNvPr>
+          <p:cNvGrpSpPr/>
+          <p:nvPr/>
+        </p:nvGrpSpPr>
+        <p:grpSpPr>
+          <a:xfrm>
+            <a:off x="372530" y="3282746"/>
+            <a:ext cx="2902790" cy="1404615"/>
+            <a:chOff x="372530" y="3282746"/>
+            <a:chExt cx="2902790" cy="1404615"/>
+          </a:xfrm>
+        </p:grpSpPr>
+        <p:sp>
+          <p:nvSpPr>
+            <p:cNvPr id="26" name="Rectangle 25">
+              <a:extLst>
+                <a:ext uri="{FF2B5EF4-FFF2-40B4-BE49-F238E27FC236}">
+                  <a16:creationId xmlns:a16="http://schemas.microsoft.com/office/drawing/2014/main" id="{E0280357-6C64-4B46-A8F3-3539EF8A236B}"/>
+                </a:ext>
+              </a:extLst>
+            </p:cNvPr>
+            <p:cNvSpPr/>
+            <p:nvPr/>
+          </p:nvSpPr>
+          <p:spPr>
+            <a:xfrm>
+              <a:off x="372530" y="3282746"/>
+              <a:ext cx="1619794" cy="594360"/>
+            </a:xfrm>
+            <a:prstGeom prst="rect">
+              <a:avLst/>
+            </a:prstGeom>
+            <a:solidFill>
+              <a:srgbClr val="C0392B"/>
+            </a:solidFill>
+          </p:spPr>
+          <p:style>
+            <a:lnRef idx="2">
+              <a:schemeClr val="accent1">
+                <a:shade val="50000"/>
+              </a:schemeClr>
+            </a:lnRef>
+            <a:fillRef idx="1">
+              <a:schemeClr val="accent1"/>
+            </a:fillRef>
+            <a:effectRef idx="0">
+              <a:schemeClr val="accent1"/>
+            </a:effectRef>
+            <a:fontRef idx="minor">
+              <a:schemeClr val="lt1"/>
+            </a:fontRef>
+          </p:style>
+          <p:txBody>
+            <a:bodyPr rtlCol="0" anchor="ctr"/>
+            <a:lstStyle/>
+            <a:p>
+              <a:pPr algn="ctr"/>
+              <a:r>
+                <a:rPr lang="en-US" sz="1400" dirty="0">
+                  <a:latin typeface="Georgia" panose="02040502050405020303" pitchFamily="18" charset="0"/>
+                </a:rPr>
+                <a:t>Mallorca: 698 €</a:t>
+              </a:r>
+            </a:p>
+          </p:txBody>
+        </p:sp>
+        <p:sp>
+          <p:nvSpPr>
+            <p:cNvPr id="28" name="Rectangle 27">
+              <a:extLst>
+                <a:ext uri="{FF2B5EF4-FFF2-40B4-BE49-F238E27FC236}">
+                  <a16:creationId xmlns:a16="http://schemas.microsoft.com/office/drawing/2014/main" id="{CE3BF608-A76C-4DA2-958F-36D91606BF5D}"/>
+                </a:ext>
+              </a:extLst>
+            </p:cNvPr>
+            <p:cNvSpPr/>
+            <p:nvPr/>
+          </p:nvSpPr>
+          <p:spPr>
+            <a:xfrm>
+              <a:off x="1655526" y="3961727"/>
+              <a:ext cx="1619794" cy="725634"/>
+            </a:xfrm>
+            <a:prstGeom prst="rect">
+              <a:avLst/>
+            </a:prstGeom>
+            <a:solidFill>
+              <a:srgbClr val="27AE60"/>
+            </a:solidFill>
+          </p:spPr>
+          <p:style>
+            <a:lnRef idx="2">
+              <a:schemeClr val="accent1">
+                <a:shade val="50000"/>
+              </a:schemeClr>
+            </a:lnRef>
+            <a:fillRef idx="1">
+              <a:schemeClr val="accent1"/>
+            </a:fillRef>
+            <a:effectRef idx="0">
+              <a:schemeClr val="accent1"/>
+            </a:effectRef>
+            <a:fontRef idx="minor">
+              <a:schemeClr val="lt1"/>
+            </a:fontRef>
+          </p:style>
+          <p:txBody>
+            <a:bodyPr numCol="2" rtlCol="0" anchor="ctr"/>
+            <a:lstStyle/>
+            <a:p>
+              <a:pPr algn="ctr"/>
+              <a:r>
+                <a:rPr lang="en-US" sz="1100" dirty="0">
+                  <a:latin typeface="Georgia" panose="02040502050405020303" pitchFamily="18" charset="0"/>
+                </a:rPr>
+                <a:t>Barcelona: 455 €</a:t>
+              </a:r>
+            </a:p>
+            <a:p>
+              <a:pPr algn="ctr"/>
+              <a:r>
+                <a:rPr lang="en-US" sz="1100" dirty="0">
+                  <a:latin typeface="Georgia" panose="02040502050405020303" pitchFamily="18" charset="0"/>
+                </a:rPr>
+                <a:t>Madrid: 373 €</a:t>
+              </a:r>
+            </a:p>
+            <a:p>
+              <a:pPr algn="ctr"/>
+              <a:r>
+                <a:rPr lang="en-US" sz="1100" dirty="0">
+                  <a:latin typeface="Georgia" panose="02040502050405020303" pitchFamily="18" charset="0"/>
+                </a:rPr>
+                <a:t>Malaga: 357 €</a:t>
+              </a:r>
+            </a:p>
+            <a:p>
+              <a:pPr algn="ctr"/>
+              <a:r>
+                <a:rPr lang="en-US" sz="1100" dirty="0">
+                  <a:latin typeface="Georgia" panose="02040502050405020303" pitchFamily="18" charset="0"/>
+                </a:rPr>
+                <a:t>Valencia: 339 €</a:t>
+              </a:r>
+            </a:p>
+          </p:txBody>
+        </p:sp>
+      </p:grpSp>
+      <p:sp>
+        <p:nvSpPr>
+          <p:cNvPr id="29" name="Rectangle 28">
+            <a:extLst>
+              <a:ext uri="{FF2B5EF4-FFF2-40B4-BE49-F238E27FC236}">
+                <a16:creationId xmlns:a16="http://schemas.microsoft.com/office/drawing/2014/main" id="{D39FAADC-95C2-4D45-B912-527EFF0A189B}"/>
+              </a:ext>
+            </a:extLst>
+          </p:cNvPr>
+          <p:cNvSpPr/>
+          <p:nvPr/>
+        </p:nvSpPr>
+        <p:spPr>
+          <a:xfrm>
+            <a:off x="3778264" y="3313350"/>
+            <a:ext cx="1619794" cy="594360"/>
+          </a:xfrm>
+          <a:prstGeom prst="rect">
+            <a:avLst/>
+          </a:prstGeom>
+          <a:solidFill>
+            <a:srgbClr val="F39C12"/>
+          </a:solidFill>
+        </p:spPr>
+        <p:style>
+          <a:lnRef idx="2">
+            <a:schemeClr val="accent1">
+              <a:shade val="50000"/>
+            </a:schemeClr>
+          </a:lnRef>
+          <a:fillRef idx="1">
+            <a:schemeClr val="accent1"/>
+          </a:fillRef>
+          <a:effectRef idx="0">
+            <a:schemeClr val="accent1"/>
+          </a:effectRef>
+          <a:fontRef idx="minor">
+            <a:schemeClr val="lt1"/>
+          </a:fontRef>
+        </p:style>
+        <p:txBody>
+          <a:bodyPr rtlCol="0" anchor="ctr"/>
+          <a:lstStyle/>
+          <a:p>
+            <a:pPr algn="ctr"/>
+            <a:r>
+              <a:rPr lang="en-US" sz="1400" dirty="0">
+                <a:latin typeface="Georgia" panose="02040502050405020303" pitchFamily="18" charset="0"/>
+              </a:rPr>
+              <a:t>Barcelona: 369 €</a:t>
+            </a:r>
+          </a:p>
+          <a:p>
+            <a:pPr algn="ctr"/>
+            <a:r>
+              <a:rPr lang="en-US" sz="1400" dirty="0">
+                <a:latin typeface="Georgia" panose="02040502050405020303" pitchFamily="18" charset="0"/>
+              </a:rPr>
+              <a:t>Madrid: 313 €</a:t>
+            </a:r>
+          </a:p>
+        </p:txBody>
+      </p:sp>
+      <p:grpSp>
+        <p:nvGrpSpPr>
+          <p:cNvPr id="51" name="Group 50">
+            <a:extLst>
+              <a:ext uri="{FF2B5EF4-FFF2-40B4-BE49-F238E27FC236}">
+                <a16:creationId xmlns:a16="http://schemas.microsoft.com/office/drawing/2014/main" id="{5E860344-B934-46FD-AF37-1DED3D316626}"/>
+              </a:ext>
+            </a:extLst>
+          </p:cNvPr>
+          <p:cNvGrpSpPr/>
+          <p:nvPr/>
+        </p:nvGrpSpPr>
+        <p:grpSpPr>
+          <a:xfrm>
+            <a:off x="3778264" y="1362775"/>
+            <a:ext cx="2488343" cy="1208300"/>
+            <a:chOff x="3778264" y="1362775"/>
+            <a:chExt cx="2488343" cy="1208300"/>
+          </a:xfrm>
+        </p:grpSpPr>
+        <p:sp>
+          <p:nvSpPr>
+            <p:cNvPr id="24" name="Rectangle 23">
+              <a:extLst>
+                <a:ext uri="{FF2B5EF4-FFF2-40B4-BE49-F238E27FC236}">
+                  <a16:creationId xmlns:a16="http://schemas.microsoft.com/office/drawing/2014/main" id="{256D7185-7991-478A-9802-48D662E6604E}"/>
+                </a:ext>
+              </a:extLst>
+            </p:cNvPr>
+            <p:cNvSpPr/>
+            <p:nvPr/>
+          </p:nvSpPr>
+          <p:spPr>
+            <a:xfrm>
+              <a:off x="3778264" y="1362775"/>
+              <a:ext cx="1619794" cy="594360"/>
+            </a:xfrm>
+            <a:prstGeom prst="rect">
+              <a:avLst/>
+            </a:prstGeom>
+            <a:solidFill>
+              <a:srgbClr val="C0392B"/>
+            </a:solidFill>
+          </p:spPr>
+          <p:style>
+            <a:lnRef idx="2">
+              <a:schemeClr val="accent1">
+                <a:shade val="50000"/>
+              </a:schemeClr>
+            </a:lnRef>
+            <a:fillRef idx="1">
+              <a:schemeClr val="accent1"/>
+            </a:fillRef>
+            <a:effectRef idx="0">
+              <a:schemeClr val="accent1"/>
+            </a:effectRef>
+            <a:fontRef idx="minor">
+              <a:schemeClr val="lt1"/>
+            </a:fontRef>
+          </p:style>
+          <p:txBody>
+            <a:bodyPr rtlCol="0" anchor="ctr"/>
+            <a:lstStyle/>
+            <a:p>
+              <a:pPr algn="ctr"/>
+              <a:r>
+                <a:rPr lang="en-US" sz="1400" dirty="0">
+                  <a:latin typeface="Georgia" panose="02040502050405020303" pitchFamily="18" charset="0"/>
+                </a:rPr>
+                <a:t>Barcelona: 1444 €</a:t>
+              </a:r>
+            </a:p>
+            <a:p>
+              <a:pPr algn="ctr"/>
+              <a:r>
+                <a:rPr lang="en-US" sz="1400" dirty="0">
+                  <a:latin typeface="Georgia" panose="02040502050405020303" pitchFamily="18" charset="0"/>
+                </a:rPr>
+                <a:t>Mallorca: 1410 €</a:t>
+              </a:r>
+            </a:p>
+          </p:txBody>
+        </p:sp>
+        <p:sp>
+          <p:nvSpPr>
+            <p:cNvPr id="31" name="Rectangle 30">
+              <a:extLst>
+                <a:ext uri="{FF2B5EF4-FFF2-40B4-BE49-F238E27FC236}">
+                  <a16:creationId xmlns:a16="http://schemas.microsoft.com/office/drawing/2014/main" id="{C1967826-B5F8-41F3-9DFC-420DB15247DE}"/>
+                </a:ext>
+              </a:extLst>
+            </p:cNvPr>
+            <p:cNvSpPr/>
+            <p:nvPr/>
+          </p:nvSpPr>
+          <p:spPr>
+            <a:xfrm>
+              <a:off x="5051938" y="2125370"/>
+              <a:ext cx="1214669" cy="445705"/>
+            </a:xfrm>
+            <a:prstGeom prst="rect">
+              <a:avLst/>
+            </a:prstGeom>
+            <a:solidFill>
+              <a:srgbClr val="F39C12"/>
+            </a:solidFill>
+          </p:spPr>
+          <p:style>
+            <a:lnRef idx="2">
+              <a:schemeClr val="accent1">
+                <a:shade val="50000"/>
+              </a:schemeClr>
+            </a:lnRef>
+            <a:fillRef idx="1">
+              <a:schemeClr val="accent1"/>
+            </a:fillRef>
+            <a:effectRef idx="0">
+              <a:schemeClr val="accent1"/>
+            </a:effectRef>
+            <a:fontRef idx="minor">
+              <a:schemeClr val="lt1"/>
+            </a:fontRef>
+          </p:style>
+          <p:txBody>
+            <a:bodyPr rtlCol="0" anchor="ctr"/>
+            <a:lstStyle/>
+            <a:p>
+              <a:pPr algn="ctr"/>
+              <a:r>
+                <a:rPr lang="en-US" sz="1200" dirty="0">
+                  <a:latin typeface="Georgia" panose="02040502050405020303" pitchFamily="18" charset="0"/>
+                </a:rPr>
+                <a:t>Sevilla: 919 €</a:t>
+              </a:r>
+              <a:endParaRPr lang="en-US" sz="1400" dirty="0">
+                <a:latin typeface="Georgia" panose="02040502050405020303" pitchFamily="18" charset="0"/>
+              </a:endParaRPr>
+            </a:p>
+          </p:txBody>
+        </p:sp>
+      </p:grpSp>
+      <p:pic>
+        <p:nvPicPr>
+          <p:cNvPr id="49" name="Picture 48">
+            <a:extLst>
+              <a:ext uri="{FF2B5EF4-FFF2-40B4-BE49-F238E27FC236}">
+                <a16:creationId xmlns:a16="http://schemas.microsoft.com/office/drawing/2014/main" id="{27667005-1190-456D-B576-364D0F35C37E}"/>
+              </a:ext>
+            </a:extLst>
+          </p:cNvPr>
+          <p:cNvPicPr>
+            <a:picLocks noChangeAspect="1"/>
+          </p:cNvPicPr>
+          <p:nvPr/>
+        </p:nvPicPr>
+        <p:blipFill>
+          <a:blip r:embed="rId7"/>
+          <a:stretch>
+            <a:fillRect/>
+          </a:stretch>
+        </p:blipFill>
+        <p:spPr>
+          <a:xfrm>
+            <a:off x="5899080" y="274320"/>
+            <a:ext cx="3178220" cy="4767328"/>
+          </a:xfrm>
+          <a:prstGeom prst="rect">
+            <a:avLst/>
+          </a:prstGeom>
+        </p:spPr>
+      </p:pic>
     </p:spTree>
+    <p:extLst>
+      <p:ext uri="{BB962C8B-B14F-4D97-AF65-F5344CB8AC3E}">
+        <p14:creationId xmlns:p14="http://schemas.microsoft.com/office/powerpoint/2010/main" val="1551318062"/>
+      </p:ext>
+    </p:extLst>
   </p:cSld>
   <p:clrMapOvr>
     <a:masterClrMapping/>
   </p:clrMapOvr>
+  <p:timing>
+    <p:tnLst>
+      <p:par>
+        <p:cTn id="1" dur="indefinite" restart="never" nodeType="tmRoot">
+          <p:childTnLst>
+            <p:seq concurrent="1" nextAc="seek">
+              <p:cTn id="2" dur="indefinite" nodeType="mainSeq">
+                <p:childTnLst>
+                  <p:par>
+                    <p:cTn id="3" fill="hold">
+                      <p:stCondLst>
+                        <p:cond delay="indefinite"/>
+                      </p:stCondLst>
+                      <p:childTnLst>
+                        <p:par>
+                          <p:cTn id="4" fill="hold">
+                            <p:stCondLst>
+                              <p:cond delay="0"/>
+                            </p:stCondLst>
+                            <p:childTnLst>
+                              <p:par>
+                                <p:cTn id="5" presetID="42" presetClass="entr" presetSubtype="0" fill="hold" nodeType="clickEffect">
+                                  <p:stCondLst>
+                                    <p:cond delay="0"/>
+                                  </p:stCondLst>
+                                  <p:childTnLst>
+                                    <p:set>
+                                      <p:cBhvr>
+                                        <p:cTn id="6" dur="1" fill="hold">
+                                          <p:stCondLst>
+                                            <p:cond delay="0"/>
+                                          </p:stCondLst>
+                                        </p:cTn>
+                                        <p:tgtEl>
+                                          <p:spTgt spid="50"/>
+                                        </p:tgtEl>
+                                        <p:attrNameLst>
+                                          <p:attrName>style.visibility</p:attrName>
+                                        </p:attrNameLst>
+                                      </p:cBhvr>
+                                      <p:to>
+                                        <p:strVal val="visible"/>
+                                      </p:to>
+                                    </p:set>
+                                    <p:animEffect transition="in" filter="fade">
+                                      <p:cBhvr>
+                                        <p:cTn id="7" dur="1000"/>
+                                        <p:tgtEl>
+                                          <p:spTgt spid="50"/>
+                                        </p:tgtEl>
+                                      </p:cBhvr>
+                                    </p:animEffect>
+                                    <p:anim calcmode="lin" valueType="num">
+                                      <p:cBhvr>
+                                        <p:cTn id="8" dur="1000" fill="hold"/>
+                                        <p:tgtEl>
+                                          <p:spTgt spid="50"/>
+                                        </p:tgtEl>
+                                        <p:attrNameLst>
+                                          <p:attrName>ppt_x</p:attrName>
+                                        </p:attrNameLst>
+                                      </p:cBhvr>
+                                      <p:tavLst>
+                                        <p:tav tm="0">
+                                          <p:val>
+                                            <p:strVal val="#ppt_x"/>
+                                          </p:val>
+                                        </p:tav>
+                                        <p:tav tm="100000">
+                                          <p:val>
+                                            <p:strVal val="#ppt_x"/>
+                                          </p:val>
+                                        </p:tav>
+                                      </p:tavLst>
+                                    </p:anim>
+                                    <p:anim calcmode="lin" valueType="num">
+                                      <p:cBhvr>
+                                        <p:cTn id="9" dur="1000" fill="hold"/>
+                                        <p:tgtEl>
+                                          <p:spTgt spid="50"/>
+                                        </p:tgtEl>
+                                        <p:attrNameLst>
+                                          <p:attrName>ppt_y</p:attrName>
+                                        </p:attrNameLst>
+                                      </p:cBhvr>
+                                      <p:tavLst>
+                                        <p:tav tm="0">
+                                          <p:val>
+                                            <p:strVal val="#ppt_y+.1"/>
+                                          </p:val>
+                                        </p:tav>
+                                        <p:tav tm="100000">
+                                          <p:val>
+                                            <p:strVal val="#ppt_y"/>
+                                          </p:val>
+                                        </p:tav>
+                                      </p:tavLst>
+                                    </p:anim>
+                                  </p:childTnLst>
+                                </p:cTn>
+                              </p:par>
+                            </p:childTnLst>
+                          </p:cTn>
+                        </p:par>
+                      </p:childTnLst>
+                    </p:cTn>
+                  </p:par>
+                  <p:par>
+                    <p:cTn id="10" fill="hold">
+                      <p:stCondLst>
+                        <p:cond delay="indefinite"/>
+                      </p:stCondLst>
+                      <p:childTnLst>
+                        <p:par>
+                          <p:cTn id="11" fill="hold">
+                            <p:stCondLst>
+                              <p:cond delay="0"/>
+                            </p:stCondLst>
+                            <p:childTnLst>
+                              <p:par>
+                                <p:cTn id="12" presetID="42" presetClass="entr" presetSubtype="0" fill="hold" nodeType="clickEffect">
+                                  <p:stCondLst>
+                                    <p:cond delay="0"/>
+                                  </p:stCondLst>
+                                  <p:childTnLst>
+                                    <p:set>
+                                      <p:cBhvr>
+                                        <p:cTn id="13" dur="1" fill="hold">
+                                          <p:stCondLst>
+                                            <p:cond delay="0"/>
+                                          </p:stCondLst>
+                                        </p:cTn>
+                                        <p:tgtEl>
+                                          <p:spTgt spid="51"/>
+                                        </p:tgtEl>
+                                        <p:attrNameLst>
+                                          <p:attrName>style.visibility</p:attrName>
+                                        </p:attrNameLst>
+                                      </p:cBhvr>
+                                      <p:to>
+                                        <p:strVal val="visible"/>
+                                      </p:to>
+                                    </p:set>
+                                    <p:animEffect transition="in" filter="fade">
+                                      <p:cBhvr>
+                                        <p:cTn id="14" dur="1000"/>
+                                        <p:tgtEl>
+                                          <p:spTgt spid="51"/>
+                                        </p:tgtEl>
+                                      </p:cBhvr>
+                                    </p:animEffect>
+                                    <p:anim calcmode="lin" valueType="num">
+                                      <p:cBhvr>
+                                        <p:cTn id="15" dur="1000" fill="hold"/>
+                                        <p:tgtEl>
+                                          <p:spTgt spid="51"/>
+                                        </p:tgtEl>
+                                        <p:attrNameLst>
+                                          <p:attrName>ppt_x</p:attrName>
+                                        </p:attrNameLst>
+                                      </p:cBhvr>
+                                      <p:tavLst>
+                                        <p:tav tm="0">
+                                          <p:val>
+                                            <p:strVal val="#ppt_x"/>
+                                          </p:val>
+                                        </p:tav>
+                                        <p:tav tm="100000">
+                                          <p:val>
+                                            <p:strVal val="#ppt_x"/>
+                                          </p:val>
+                                        </p:tav>
+                                      </p:tavLst>
+                                    </p:anim>
+                                    <p:anim calcmode="lin" valueType="num">
+                                      <p:cBhvr>
+                                        <p:cTn id="16" dur="1000" fill="hold"/>
+                                        <p:tgtEl>
+                                          <p:spTgt spid="51"/>
+                                        </p:tgtEl>
+                                        <p:attrNameLst>
+                                          <p:attrName>ppt_y</p:attrName>
+                                        </p:attrNameLst>
+                                      </p:cBhvr>
+                                      <p:tavLst>
+                                        <p:tav tm="0">
+                                          <p:val>
+                                            <p:strVal val="#ppt_y+.1"/>
+                                          </p:val>
+                                        </p:tav>
+                                        <p:tav tm="100000">
+                                          <p:val>
+                                            <p:strVal val="#ppt_y"/>
+                                          </p:val>
+                                        </p:tav>
+                                      </p:tavLst>
+                                    </p:anim>
+                                  </p:childTnLst>
+                                </p:cTn>
+                              </p:par>
+                            </p:childTnLst>
+                          </p:cTn>
+                        </p:par>
+                      </p:childTnLst>
+                    </p:cTn>
+                  </p:par>
+                  <p:par>
+                    <p:cTn id="17" fill="hold">
+                      <p:stCondLst>
+                        <p:cond delay="indefinite"/>
+                      </p:stCondLst>
+                      <p:childTnLst>
+                        <p:par>
+                          <p:cTn id="18" fill="hold">
+                            <p:stCondLst>
+                              <p:cond delay="0"/>
+                            </p:stCondLst>
+                            <p:childTnLst>
+                              <p:par>
+                                <p:cTn id="19" presetID="42" presetClass="entr" presetSubtype="0" fill="hold" nodeType="clickEffect">
+                                  <p:stCondLst>
+                                    <p:cond delay="0"/>
+                                  </p:stCondLst>
+                                  <p:childTnLst>
+                                    <p:set>
+                                      <p:cBhvr>
+                                        <p:cTn id="20" dur="1" fill="hold">
+                                          <p:stCondLst>
+                                            <p:cond delay="0"/>
+                                          </p:stCondLst>
+                                        </p:cTn>
+                                        <p:tgtEl>
+                                          <p:spTgt spid="52"/>
+                                        </p:tgtEl>
+                                        <p:attrNameLst>
+                                          <p:attrName>style.visibility</p:attrName>
+                                        </p:attrNameLst>
+                                      </p:cBhvr>
+                                      <p:to>
+                                        <p:strVal val="visible"/>
+                                      </p:to>
+                                    </p:set>
+                                    <p:animEffect transition="in" filter="fade">
+                                      <p:cBhvr>
+                                        <p:cTn id="21" dur="1000"/>
+                                        <p:tgtEl>
+                                          <p:spTgt spid="52"/>
+                                        </p:tgtEl>
+                                      </p:cBhvr>
+                                    </p:animEffect>
+                                    <p:anim calcmode="lin" valueType="num">
+                                      <p:cBhvr>
+                                        <p:cTn id="22" dur="1000" fill="hold"/>
+                                        <p:tgtEl>
+                                          <p:spTgt spid="52"/>
+                                        </p:tgtEl>
+                                        <p:attrNameLst>
+                                          <p:attrName>ppt_x</p:attrName>
+                                        </p:attrNameLst>
+                                      </p:cBhvr>
+                                      <p:tavLst>
+                                        <p:tav tm="0">
+                                          <p:val>
+                                            <p:strVal val="#ppt_x"/>
+                                          </p:val>
+                                        </p:tav>
+                                        <p:tav tm="100000">
+                                          <p:val>
+                                            <p:strVal val="#ppt_x"/>
+                                          </p:val>
+                                        </p:tav>
+                                      </p:tavLst>
+                                    </p:anim>
+                                    <p:anim calcmode="lin" valueType="num">
+                                      <p:cBhvr>
+                                        <p:cTn id="23" dur="1000" fill="hold"/>
+                                        <p:tgtEl>
+                                          <p:spTgt spid="52"/>
+                                        </p:tgtEl>
+                                        <p:attrNameLst>
+                                          <p:attrName>ppt_y</p:attrName>
+                                        </p:attrNameLst>
+                                      </p:cBhvr>
+                                      <p:tavLst>
+                                        <p:tav tm="0">
+                                          <p:val>
+                                            <p:strVal val="#ppt_y+.1"/>
+                                          </p:val>
+                                        </p:tav>
+                                        <p:tav tm="100000">
+                                          <p:val>
+                                            <p:strVal val="#ppt_y"/>
+                                          </p:val>
+                                        </p:tav>
+                                      </p:tavLst>
+                                    </p:anim>
+                                  </p:childTnLst>
+                                </p:cTn>
+                              </p:par>
+                            </p:childTnLst>
+                          </p:cTn>
+                        </p:par>
+                      </p:childTnLst>
+                    </p:cTn>
+                  </p:par>
+                  <p:par>
+                    <p:cTn id="24" fill="hold">
+                      <p:stCondLst>
+                        <p:cond delay="indefinite"/>
+                      </p:stCondLst>
+                      <p:childTnLst>
+                        <p:par>
+                          <p:cTn id="25" fill="hold">
+                            <p:stCondLst>
+                              <p:cond delay="0"/>
+                            </p:stCondLst>
+                            <p:childTnLst>
+                              <p:par>
+                                <p:cTn id="26" presetID="42" presetClass="entr" presetSubtype="0" fill="hold" grpId="0" nodeType="clickEffect">
+                                  <p:stCondLst>
+                                    <p:cond delay="0"/>
+                                  </p:stCondLst>
+                                  <p:childTnLst>
+                                    <p:set>
+                                      <p:cBhvr>
+                                        <p:cTn id="27" dur="1" fill="hold">
+                                          <p:stCondLst>
+                                            <p:cond delay="0"/>
+                                          </p:stCondLst>
+                                        </p:cTn>
+                                        <p:tgtEl>
+                                          <p:spTgt spid="29"/>
+                                        </p:tgtEl>
+                                        <p:attrNameLst>
+                                          <p:attrName>style.visibility</p:attrName>
+                                        </p:attrNameLst>
+                                      </p:cBhvr>
+                                      <p:to>
+                                        <p:strVal val="visible"/>
+                                      </p:to>
+                                    </p:set>
+                                    <p:animEffect transition="in" filter="fade">
+                                      <p:cBhvr>
+                                        <p:cTn id="28" dur="1000"/>
+                                        <p:tgtEl>
+                                          <p:spTgt spid="29"/>
+                                        </p:tgtEl>
+                                      </p:cBhvr>
+                                    </p:animEffect>
+                                    <p:anim calcmode="lin" valueType="num">
+                                      <p:cBhvr>
+                                        <p:cTn id="29" dur="1000" fill="hold"/>
+                                        <p:tgtEl>
+                                          <p:spTgt spid="29"/>
+                                        </p:tgtEl>
+                                        <p:attrNameLst>
+                                          <p:attrName>ppt_x</p:attrName>
+                                        </p:attrNameLst>
+                                      </p:cBhvr>
+                                      <p:tavLst>
+                                        <p:tav tm="0">
+                                          <p:val>
+                                            <p:strVal val="#ppt_x"/>
+                                          </p:val>
+                                        </p:tav>
+                                        <p:tav tm="100000">
+                                          <p:val>
+                                            <p:strVal val="#ppt_x"/>
+                                          </p:val>
+                                        </p:tav>
+                                      </p:tavLst>
+                                    </p:anim>
+                                    <p:anim calcmode="lin" valueType="num">
+                                      <p:cBhvr>
+                                        <p:cTn id="30" dur="1000" fill="hold"/>
+                                        <p:tgtEl>
+                                          <p:spTgt spid="29"/>
+                                        </p:tgtEl>
+                                        <p:attrNameLst>
+                                          <p:attrName>ppt_y</p:attrName>
+                                        </p:attrNameLst>
+                                      </p:cBhvr>
+                                      <p:tavLst>
+                                        <p:tav tm="0">
+                                          <p:val>
+                                            <p:strVal val="#ppt_y+.1"/>
+                                          </p:val>
+                                        </p:tav>
+                                        <p:tav tm="100000">
+                                          <p:val>
+                                            <p:strVal val="#ppt_y"/>
+                                          </p:val>
+                                        </p:tav>
+                                      </p:tavLst>
+                                    </p:anim>
+                                  </p:childTnLst>
+                                </p:cTn>
+                              </p:par>
+                            </p:childTnLst>
+                          </p:cTn>
+                        </p:par>
+                      </p:childTnLst>
+                    </p:cTn>
+                  </p:par>
+                  <p:par>
+                    <p:cTn id="31" fill="hold">
+                      <p:stCondLst>
+                        <p:cond delay="indefinite"/>
+                      </p:stCondLst>
+                      <p:childTnLst>
+                        <p:par>
+                          <p:cTn id="32" fill="hold">
+                            <p:stCondLst>
+                              <p:cond delay="0"/>
+                            </p:stCondLst>
+                            <p:childTnLst>
+                              <p:par>
+                                <p:cTn id="33" presetID="14" presetClass="entr" presetSubtype="10" fill="hold" nodeType="clickEffect">
+                                  <p:stCondLst>
+                                    <p:cond delay="0"/>
+                                  </p:stCondLst>
+                                  <p:childTnLst>
+                                    <p:set>
+                                      <p:cBhvr>
+                                        <p:cTn id="34" dur="1" fill="hold">
+                                          <p:stCondLst>
+                                            <p:cond delay="0"/>
+                                          </p:stCondLst>
+                                        </p:cTn>
+                                        <p:tgtEl>
+                                          <p:spTgt spid="49"/>
+                                        </p:tgtEl>
+                                        <p:attrNameLst>
+                                          <p:attrName>style.visibility</p:attrName>
+                                        </p:attrNameLst>
+                                      </p:cBhvr>
+                                      <p:to>
+                                        <p:strVal val="visible"/>
+                                      </p:to>
+                                    </p:set>
+                                    <p:animEffect transition="in" filter="randombar(horizontal)">
+                                      <p:cBhvr>
+                                        <p:cTn id="35" dur="500"/>
+                                        <p:tgtEl>
+                                          <p:spTgt spid="49"/>
+                                        </p:tgtEl>
+                                      </p:cBhvr>
+                                    </p:animEffect>
+                                  </p:childTnLst>
+                                </p:cTn>
+                              </p:par>
+                            </p:childTnLst>
+                          </p:cTn>
+                        </p:par>
+                      </p:childTnLst>
+                    </p:cTn>
+                  </p:par>
+                </p:childTnLst>
+              </p:cTn>
+              <p:prevCondLst>
+                <p:cond evt="onPrev" delay="0">
+                  <p:tgtEl>
+                    <p:sldTgt/>
+                  </p:tgtEl>
+                </p:cond>
+              </p:prevCondLst>
+              <p:nextCondLst>
+                <p:cond evt="onNext" delay="0">
+                  <p:tgtEl>
+                    <p:sldTgt/>
+                  </p:tgtEl>
+                </p:cond>
+              </p:nextCondLst>
+            </p:seq>
+          </p:childTnLst>
+        </p:cTn>
+      </p:par>
+    </p:tnLst>
+    <p:bldLst>
+      <p:bldP spid="29" grpId="0" animBg="1"/>
+    </p:bldLst>
+  </p:timing>
 </p:sld>
 </file>
 
-<file path=ppt/slides/slide4.xml><?xml version="1.0" encoding="utf-8"?>
+<file path=ppt/slides/slide5.xml><?xml version="1.0" encoding="utf-8"?>
 <p:sld xmlns:a="http://schemas.openxmlformats.org/drawingml/2006/main" xmlns:r="http://schemas.openxmlformats.org/officeDocument/2006/relationships" xmlns:p="http://schemas.openxmlformats.org/presentationml/2006/main">
   <p:cSld name="Slide 4">
     <p:bg>
@@ -3542,7 +5488,7 @@
               <a:buNone/>
             </a:pPr>
             <a:r>
-              <a:rPr lang="en-US" sz="3000" b="1" dirty="0">
+              <a:rPr lang="en-US" sz="3000" b="1" dirty="0" err="1">
                 <a:solidFill>
                   <a:srgbClr val="1E3A5F"/>
                 </a:solidFill>
@@ -3550,558 +5496,1089 @@
                 <a:ea typeface="Georgia" pitchFamily="34" charset="-122"/>
                 <a:cs typeface="Georgia" pitchFamily="34" charset="-120"/>
               </a:rPr>
-              <a:t>Hallazgos y recomendaciones</a:t>
+              <a:t>Recomendaciones</a:t>
             </a:r>
             <a:endParaRPr lang="en-US" sz="3000" dirty="0"/>
           </a:p>
         </p:txBody>
       </p:sp>
-      <p:sp>
-        <p:nvSpPr>
-          <p:cNvPr id="4" name="Text 2"/>
-          <p:cNvSpPr/>
+      <p:grpSp>
+        <p:nvGrpSpPr>
+          <p:cNvPr id="18" name="Group 17">
+            <a:extLst>
+              <a:ext uri="{FF2B5EF4-FFF2-40B4-BE49-F238E27FC236}">
+                <a16:creationId xmlns:a16="http://schemas.microsoft.com/office/drawing/2014/main" id="{00A3D1D0-67CF-4556-A9E5-FB85974EE474}"/>
+              </a:ext>
+            </a:extLst>
+          </p:cNvPr>
+          <p:cNvGrpSpPr/>
           <p:nvPr/>
-        </p:nvSpPr>
-        <p:spPr>
+        </p:nvGrpSpPr>
+        <p:grpSpPr>
           <a:xfrm>
-            <a:off x="457200" y="1417320"/>
-            <a:ext cx="8229600" cy="274320"/>
+            <a:off x="365760" y="1318259"/>
+            <a:ext cx="1905000" cy="2118360"/>
+            <a:chOff x="3246120" y="1828800"/>
+            <a:chExt cx="2651760" cy="3017520"/>
           </a:xfrm>
-          <a:prstGeom prst="rect">
-            <a:avLst/>
-          </a:prstGeom>
-          <a:noFill/>
-          <a:ln/>
-        </p:spPr>
-        <p:txBody>
-          <a:bodyPr wrap="square" lIns="0" tIns="0" rIns="0" bIns="0" rtlCol="0" anchor="ctr"/>
-          <a:lstStyle/>
-          <a:p>
-            <a:pPr marL="0" indent="0" algn="ctr">
-              <a:buNone/>
-            </a:pPr>
-            <a:r>
-              <a:rPr lang="en-US" sz="1100" i="1" dirty="0">
-                <a:solidFill>
-                  <a:srgbClr val="64748B"/>
-                </a:solidFill>
-                <a:latin typeface="Calibri" pitchFamily="34" charset="0"/>
-                <a:ea typeface="Calibri" pitchFamily="34" charset="-122"/>
-                <a:cs typeface="Calibri" pitchFamily="34" charset="-120"/>
-              </a:rPr>
-              <a:t>[ Sección a completar por la analista de Marketing ]</a:t>
-            </a:r>
-            <a:endParaRPr lang="en-US" sz="1100" dirty="0"/>
-          </a:p>
-        </p:txBody>
-      </p:sp>
-      <p:sp>
-        <p:nvSpPr>
-          <p:cNvPr id="5" name="Shape 3"/>
-          <p:cNvSpPr/>
+        </p:grpSpPr>
+        <p:sp>
+          <p:nvSpPr>
+            <p:cNvPr id="8" name="Shape 6"/>
+            <p:cNvSpPr/>
+            <p:nvPr/>
+          </p:nvSpPr>
+          <p:spPr>
+            <a:xfrm>
+              <a:off x="3246120" y="1828800"/>
+              <a:ext cx="2651760" cy="3017520"/>
+            </a:xfrm>
+            <a:prstGeom prst="roundRect">
+              <a:avLst>
+                <a:gd name="adj" fmla="val 3448"/>
+              </a:avLst>
+            </a:prstGeom>
+            <a:solidFill>
+              <a:srgbClr val="FFFFFF"/>
+            </a:solidFill>
+            <a:ln w="12700">
+              <a:solidFill>
+                <a:srgbClr val="2E86AB"/>
+              </a:solidFill>
+              <a:prstDash val="dash"/>
+            </a:ln>
+          </p:spPr>
+          <p:txBody>
+            <a:bodyPr/>
+            <a:lstStyle/>
+            <a:p>
+              <a:endParaRPr lang="es-ES"/>
+            </a:p>
+          </p:txBody>
+        </p:sp>
+        <p:sp>
+          <p:nvSpPr>
+            <p:cNvPr id="9" name="Text 7"/>
+            <p:cNvSpPr/>
+            <p:nvPr/>
+          </p:nvSpPr>
+          <p:spPr>
+            <a:xfrm>
+              <a:off x="3429000" y="2011680"/>
+              <a:ext cx="2286000" cy="274320"/>
+            </a:xfrm>
+            <a:prstGeom prst="rect">
+              <a:avLst/>
+            </a:prstGeom>
+            <a:noFill/>
+            <a:ln/>
+          </p:spPr>
+          <p:txBody>
+            <a:bodyPr wrap="square" lIns="0" tIns="0" rIns="0" bIns="0" rtlCol="0" anchor="ctr"/>
+            <a:lstStyle/>
+            <a:p>
+              <a:pPr marL="0" indent="0">
+                <a:buNone/>
+              </a:pPr>
+              <a:r>
+                <a:rPr lang="en-US" sz="1000" b="1" kern="0" spc="300" dirty="0">
+                  <a:solidFill>
+                    <a:srgbClr val="2E86AB"/>
+                  </a:solidFill>
+                  <a:latin typeface="Georgia" panose="02040502050405020303" pitchFamily="18" charset="0"/>
+                  <a:ea typeface="Calibri" pitchFamily="34" charset="-122"/>
+                  <a:cs typeface="Calibri" pitchFamily="34" charset="-120"/>
+                </a:rPr>
+                <a:t>PERFIL DE ALOJAMIENTO</a:t>
+              </a:r>
+              <a:endParaRPr lang="en-US" sz="1000" dirty="0">
+                <a:latin typeface="Georgia" panose="02040502050405020303" pitchFamily="18" charset="0"/>
+              </a:endParaRPr>
+            </a:p>
+          </p:txBody>
+        </p:sp>
+        <p:sp>
+          <p:nvSpPr>
+            <p:cNvPr id="10" name="Text 8"/>
+            <p:cNvSpPr/>
+            <p:nvPr/>
+          </p:nvSpPr>
+          <p:spPr>
+            <a:xfrm>
+              <a:off x="3429000" y="2377440"/>
+              <a:ext cx="2286000" cy="2286000"/>
+            </a:xfrm>
+            <a:prstGeom prst="rect">
+              <a:avLst/>
+            </a:prstGeom>
+            <a:noFill/>
+            <a:ln/>
+          </p:spPr>
+          <p:txBody>
+            <a:bodyPr wrap="square" lIns="0" tIns="0" rIns="0" bIns="0" rtlCol="0" anchor="ctr"/>
+            <a:lstStyle/>
+            <a:p>
+              <a:pPr marL="171450" indent="-171450">
+                <a:buFont typeface="Arial" panose="020B0604020202020204" pitchFamily="34" charset="0"/>
+                <a:buChar char="•"/>
+              </a:pPr>
+              <a:r>
+                <a:rPr lang="en-US" sz="1100" b="0" dirty="0" err="1">
+                  <a:effectLst/>
+                  <a:latin typeface="Georgia" panose="02040502050405020303" pitchFamily="18" charset="0"/>
+                </a:rPr>
+                <a:t>accomodates</a:t>
+              </a:r>
+              <a:r>
+                <a:rPr lang="en-US" sz="1100" b="0" dirty="0">
+                  <a:effectLst/>
+                  <a:latin typeface="Georgia" panose="02040502050405020303" pitchFamily="18" charset="0"/>
+                </a:rPr>
+                <a:t>,</a:t>
+              </a:r>
+            </a:p>
+            <a:p>
+              <a:pPr marL="171450" indent="-171450">
+                <a:buFont typeface="Arial" panose="020B0604020202020204" pitchFamily="34" charset="0"/>
+                <a:buChar char="•"/>
+              </a:pPr>
+              <a:r>
+                <a:rPr lang="en-US" sz="1100" b="0" dirty="0">
+                  <a:effectLst/>
+                  <a:latin typeface="Georgia" panose="02040502050405020303" pitchFamily="18" charset="0"/>
+                </a:rPr>
+                <a:t>bedrooms, </a:t>
+              </a:r>
+            </a:p>
+            <a:p>
+              <a:pPr marL="171450" indent="-171450">
+                <a:buFont typeface="Arial" panose="020B0604020202020204" pitchFamily="34" charset="0"/>
+                <a:buChar char="•"/>
+              </a:pPr>
+              <a:r>
+                <a:rPr lang="en-US" sz="1100" b="0" dirty="0">
+                  <a:effectLst/>
+                  <a:latin typeface="Georgia" panose="02040502050405020303" pitchFamily="18" charset="0"/>
+                </a:rPr>
+                <a:t>bathrooms, </a:t>
+              </a:r>
+            </a:p>
+            <a:p>
+              <a:pPr marL="171450" indent="-171450">
+                <a:buFont typeface="Arial" panose="020B0604020202020204" pitchFamily="34" charset="0"/>
+                <a:buChar char="•"/>
+              </a:pPr>
+              <a:r>
+                <a:rPr lang="en-US" sz="1100" b="0" dirty="0">
+                  <a:effectLst/>
+                  <a:latin typeface="Georgia" panose="02040502050405020303" pitchFamily="18" charset="0"/>
+                </a:rPr>
+                <a:t>beds, </a:t>
+              </a:r>
+            </a:p>
+            <a:p>
+              <a:pPr marL="171450" indent="-171450">
+                <a:buFont typeface="Arial" panose="020B0604020202020204" pitchFamily="34" charset="0"/>
+                <a:buChar char="•"/>
+              </a:pPr>
+              <a:r>
+                <a:rPr lang="en-US" sz="1100" b="0" dirty="0">
+                  <a:effectLst/>
+                  <a:latin typeface="Georgia" panose="02040502050405020303" pitchFamily="18" charset="0"/>
+                </a:rPr>
+                <a:t>availability_90,</a:t>
+              </a:r>
+            </a:p>
+            <a:p>
+              <a:pPr marL="171450" indent="-171450">
+                <a:buFont typeface="Arial" panose="020B0604020202020204" pitchFamily="34" charset="0"/>
+                <a:buChar char="•"/>
+              </a:pPr>
+              <a:r>
+                <a:rPr lang="en-US" sz="1100" b="0" dirty="0">
+                  <a:effectLst/>
+                  <a:latin typeface="Georgia" panose="02040502050405020303" pitchFamily="18" charset="0"/>
+                </a:rPr>
+                <a:t>availability_365, </a:t>
+              </a:r>
+            </a:p>
+            <a:p>
+              <a:pPr marL="171450" indent="-171450">
+                <a:buFont typeface="Arial" panose="020B0604020202020204" pitchFamily="34" charset="0"/>
+                <a:buChar char="•"/>
+              </a:pPr>
+              <a:r>
+                <a:rPr lang="en-US" sz="1100" b="0" dirty="0">
+                  <a:effectLst/>
+                  <a:latin typeface="Georgia" panose="02040502050405020303" pitchFamily="18" charset="0"/>
+                </a:rPr>
+                <a:t>reviews per month, </a:t>
+              </a:r>
+            </a:p>
+            <a:p>
+              <a:pPr marL="171450" indent="-171450">
+                <a:buFont typeface="Arial" panose="020B0604020202020204" pitchFamily="34" charset="0"/>
+                <a:buChar char="•"/>
+              </a:pPr>
+              <a:r>
+                <a:rPr lang="en-US" sz="1100" b="0" dirty="0">
+                  <a:effectLst/>
+                  <a:latin typeface="Georgia" panose="02040502050405020303" pitchFamily="18" charset="0"/>
+                </a:rPr>
+                <a:t>number of reviews, </a:t>
+              </a:r>
+            </a:p>
+            <a:p>
+              <a:pPr marL="171450" indent="-171450">
+                <a:buFont typeface="Arial" panose="020B0604020202020204" pitchFamily="34" charset="0"/>
+                <a:buChar char="•"/>
+              </a:pPr>
+              <a:r>
+                <a:rPr lang="en-US" sz="1100" b="0" dirty="0" err="1">
+                  <a:effectLst/>
+                  <a:latin typeface="Georgia" panose="02040502050405020303" pitchFamily="18" charset="0"/>
+                </a:rPr>
+                <a:t>is_instant_bookable</a:t>
+              </a:r>
+              <a:endParaRPr lang="en-US" sz="1100" dirty="0"/>
+            </a:p>
+          </p:txBody>
+        </p:sp>
+      </p:grpSp>
+      <p:grpSp>
+        <p:nvGrpSpPr>
+          <p:cNvPr id="19" name="Group 18">
+            <a:extLst>
+              <a:ext uri="{FF2B5EF4-FFF2-40B4-BE49-F238E27FC236}">
+                <a16:creationId xmlns:a16="http://schemas.microsoft.com/office/drawing/2014/main" id="{1C04494E-1F26-4566-9B92-DD2E3911FF76}"/>
+              </a:ext>
+            </a:extLst>
+          </p:cNvPr>
+          <p:cNvGrpSpPr/>
           <p:nvPr/>
-        </p:nvSpPr>
-        <p:spPr>
+        </p:nvGrpSpPr>
+        <p:grpSpPr>
           <a:xfrm>
-            <a:off x="457200" y="1828800"/>
-            <a:ext cx="2651760" cy="3017520"/>
+            <a:off x="6762680" y="1318259"/>
+            <a:ext cx="1905000" cy="1253491"/>
+            <a:chOff x="3246120" y="1828800"/>
+            <a:chExt cx="2651760" cy="1785548"/>
           </a:xfrm>
-          <a:prstGeom prst="roundRect">
-            <a:avLst>
-              <a:gd name="adj" fmla="val 3448"/>
-            </a:avLst>
-          </a:prstGeom>
-          <a:solidFill>
-            <a:srgbClr val="FFFFFF"/>
-          </a:solidFill>
-          <a:ln w="12700">
+        </p:grpSpPr>
+        <p:sp>
+          <p:nvSpPr>
+            <p:cNvPr id="20" name="Shape 6">
+              <a:extLst>
+                <a:ext uri="{FF2B5EF4-FFF2-40B4-BE49-F238E27FC236}">
+                  <a16:creationId xmlns:a16="http://schemas.microsoft.com/office/drawing/2014/main" id="{69F170A4-0EDF-45B8-B533-156ABD7654C7}"/>
+                </a:ext>
+              </a:extLst>
+            </p:cNvPr>
+            <p:cNvSpPr/>
+            <p:nvPr/>
+          </p:nvSpPr>
+          <p:spPr>
+            <a:xfrm>
+              <a:off x="3246120" y="1828800"/>
+              <a:ext cx="2651760" cy="1785547"/>
+            </a:xfrm>
+            <a:prstGeom prst="roundRect">
+              <a:avLst>
+                <a:gd name="adj" fmla="val 3448"/>
+              </a:avLst>
+            </a:prstGeom>
             <a:solidFill>
-              <a:srgbClr val="2E86AB"/>
+              <a:srgbClr val="FFFFFF"/>
             </a:solidFill>
-            <a:prstDash val="dash"/>
-          </a:ln>
-        </p:spPr>
-        <p:txBody>
-          <a:bodyPr/>
-          <a:lstStyle/>
-          <a:p>
-            <a:endParaRPr lang="es-ES"/>
-          </a:p>
-        </p:txBody>
-      </p:sp>
-      <p:sp>
-        <p:nvSpPr>
-          <p:cNvPr id="6" name="Text 4"/>
-          <p:cNvSpPr/>
+            <a:ln w="12700">
+              <a:solidFill>
+                <a:srgbClr val="2E86AB"/>
+              </a:solidFill>
+              <a:prstDash val="dash"/>
+            </a:ln>
+          </p:spPr>
+          <p:txBody>
+            <a:bodyPr/>
+            <a:lstStyle/>
+            <a:p>
+              <a:endParaRPr lang="es-ES"/>
+            </a:p>
+          </p:txBody>
+        </p:sp>
+        <p:sp>
+          <p:nvSpPr>
+            <p:cNvPr id="21" name="Text 7">
+              <a:extLst>
+                <a:ext uri="{FF2B5EF4-FFF2-40B4-BE49-F238E27FC236}">
+                  <a16:creationId xmlns:a16="http://schemas.microsoft.com/office/drawing/2014/main" id="{8B855F86-1633-40EC-9845-BF6A9FB47DB7}"/>
+                </a:ext>
+              </a:extLst>
+            </p:cNvPr>
+            <p:cNvSpPr/>
+            <p:nvPr/>
+          </p:nvSpPr>
+          <p:spPr>
+            <a:xfrm>
+              <a:off x="3293853" y="2011679"/>
+              <a:ext cx="2556295" cy="274320"/>
+            </a:xfrm>
+            <a:prstGeom prst="rect">
+              <a:avLst/>
+            </a:prstGeom>
+            <a:noFill/>
+            <a:ln/>
+          </p:spPr>
+          <p:txBody>
+            <a:bodyPr wrap="square" lIns="0" tIns="0" rIns="0" bIns="0" rtlCol="0" anchor="ctr"/>
+            <a:lstStyle/>
+            <a:p>
+              <a:pPr marL="0" indent="0">
+                <a:buNone/>
+              </a:pPr>
+              <a:r>
+                <a:rPr lang="en-US" sz="1000" b="1" kern="0" spc="300" dirty="0">
+                  <a:solidFill>
+                    <a:srgbClr val="2E86AB"/>
+                  </a:solidFill>
+                  <a:latin typeface="Georgia" panose="02040502050405020303" pitchFamily="18" charset="0"/>
+                  <a:ea typeface="Calibri" pitchFamily="34" charset="-122"/>
+                  <a:cs typeface="Calibri" pitchFamily="34" charset="-120"/>
+                </a:rPr>
+                <a:t>ESTACIONALIDAD</a:t>
+              </a:r>
+              <a:endParaRPr lang="en-US" sz="1000" dirty="0">
+                <a:latin typeface="Georgia" panose="02040502050405020303" pitchFamily="18" charset="0"/>
+              </a:endParaRPr>
+            </a:p>
+          </p:txBody>
+        </p:sp>
+        <p:sp>
+          <p:nvSpPr>
+            <p:cNvPr id="22" name="Text 8">
+              <a:extLst>
+                <a:ext uri="{FF2B5EF4-FFF2-40B4-BE49-F238E27FC236}">
+                  <a16:creationId xmlns:a16="http://schemas.microsoft.com/office/drawing/2014/main" id="{D44257D9-1733-4D27-AE65-F3F5EA892DE1}"/>
+                </a:ext>
+              </a:extLst>
+            </p:cNvPr>
+            <p:cNvSpPr/>
+            <p:nvPr/>
+          </p:nvSpPr>
+          <p:spPr>
+            <a:xfrm>
+              <a:off x="3429000" y="2377441"/>
+              <a:ext cx="2285999" cy="1236907"/>
+            </a:xfrm>
+            <a:prstGeom prst="rect">
+              <a:avLst/>
+            </a:prstGeom>
+            <a:noFill/>
+            <a:ln/>
+          </p:spPr>
+          <p:txBody>
+            <a:bodyPr wrap="square" lIns="0" tIns="0" rIns="0" bIns="0" rtlCol="0" anchor="ctr"/>
+            <a:lstStyle/>
+            <a:p>
+              <a:r>
+                <a:rPr lang="en-US" sz="1100" b="0" dirty="0">
+                  <a:effectLst/>
+                  <a:latin typeface="Georgia" panose="02040502050405020303" pitchFamily="18" charset="0"/>
+                </a:rPr>
+                <a:t>proxy:</a:t>
+              </a:r>
+            </a:p>
+            <a:p>
+              <a:endParaRPr lang="en-US" sz="1100" b="0" dirty="0">
+                <a:effectLst/>
+                <a:latin typeface="Georgia" panose="02040502050405020303" pitchFamily="18" charset="0"/>
+              </a:endParaRPr>
+            </a:p>
+            <a:p>
+              <a:pPr marL="171450" indent="-171450">
+                <a:buFont typeface="Arial" panose="020B0604020202020204" pitchFamily="34" charset="0"/>
+                <a:buChar char="•"/>
+              </a:pPr>
+              <a:r>
+                <a:rPr lang="en-US" sz="1100" b="0" dirty="0" err="1">
+                  <a:effectLst/>
+                  <a:latin typeface="Georgia" panose="02040502050405020303" pitchFamily="18" charset="0"/>
+                </a:rPr>
+                <a:t>first_review_date</a:t>
+              </a:r>
+              <a:r>
+                <a:rPr lang="en-US" sz="1100" b="0" dirty="0">
+                  <a:effectLst/>
+                  <a:latin typeface="Georgia" panose="02040502050405020303" pitchFamily="18" charset="0"/>
+                </a:rPr>
+                <a:t> </a:t>
+              </a:r>
+            </a:p>
+            <a:p>
+              <a:pPr marL="171450" indent="-171450">
+                <a:buFont typeface="Arial" panose="020B0604020202020204" pitchFamily="34" charset="0"/>
+                <a:buChar char="•"/>
+              </a:pPr>
+              <a:r>
+                <a:rPr lang="en-US" sz="1100" b="0" dirty="0" err="1">
+                  <a:effectLst/>
+                  <a:latin typeface="Georgia" panose="02040502050405020303" pitchFamily="18" charset="0"/>
+                </a:rPr>
+                <a:t>insert_date</a:t>
+              </a:r>
+              <a:endParaRPr lang="en-US" sz="1100" b="0" dirty="0">
+                <a:effectLst/>
+                <a:latin typeface="Georgia" panose="02040502050405020303" pitchFamily="18" charset="0"/>
+              </a:endParaRPr>
+            </a:p>
+            <a:p>
+              <a:pPr marL="171450" indent="-171450">
+                <a:buFont typeface="Arial" panose="020B0604020202020204" pitchFamily="34" charset="0"/>
+                <a:buChar char="•"/>
+              </a:pPr>
+              <a:endParaRPr lang="en-US" sz="1100" dirty="0"/>
+            </a:p>
+          </p:txBody>
+        </p:sp>
+      </p:grpSp>
+      <p:grpSp>
+        <p:nvGrpSpPr>
+          <p:cNvPr id="23" name="Group 22">
+            <a:extLst>
+              <a:ext uri="{FF2B5EF4-FFF2-40B4-BE49-F238E27FC236}">
+                <a16:creationId xmlns:a16="http://schemas.microsoft.com/office/drawing/2014/main" id="{9BD8C5E4-55F0-4E56-85CA-C46B03AFE983}"/>
+              </a:ext>
+            </a:extLst>
+          </p:cNvPr>
+          <p:cNvGrpSpPr/>
           <p:nvPr/>
-        </p:nvSpPr>
-        <p:spPr>
+        </p:nvGrpSpPr>
+        <p:grpSpPr>
           <a:xfrm>
-            <a:off x="640080" y="2011680"/>
-            <a:ext cx="2286000" cy="274320"/>
+            <a:off x="2499359" y="1318259"/>
+            <a:ext cx="1905000" cy="1633947"/>
+            <a:chOff x="3246120" y="1828800"/>
+            <a:chExt cx="2651760" cy="1785548"/>
           </a:xfrm>
-          <a:prstGeom prst="rect">
-            <a:avLst/>
-          </a:prstGeom>
-          <a:noFill/>
-          <a:ln/>
-        </p:spPr>
-        <p:txBody>
-          <a:bodyPr wrap="square" lIns="0" tIns="0" rIns="0" bIns="0" rtlCol="0" anchor="ctr"/>
-          <a:lstStyle/>
-          <a:p>
-            <a:pPr marL="0" indent="0">
-              <a:buNone/>
-            </a:pPr>
-            <a:r>
-              <a:rPr lang="en-US" sz="1000" b="1" kern="0" spc="300" dirty="0">
-                <a:solidFill>
-                  <a:srgbClr val="2E86AB"/>
-                </a:solidFill>
-                <a:latin typeface="Calibri" pitchFamily="34" charset="0"/>
-                <a:ea typeface="Calibri" pitchFamily="34" charset="-122"/>
-                <a:cs typeface="Calibri" pitchFamily="34" charset="-120"/>
-              </a:rPr>
-              <a:t>HALLAZGOS CLAVE</a:t>
-            </a:r>
-            <a:endParaRPr lang="en-US" sz="1000" dirty="0"/>
-          </a:p>
-        </p:txBody>
-      </p:sp>
-      <p:sp>
-        <p:nvSpPr>
-          <p:cNvPr id="7" name="Text 5"/>
-          <p:cNvSpPr/>
+        </p:grpSpPr>
+        <p:sp>
+          <p:nvSpPr>
+            <p:cNvPr id="24" name="Shape 6">
+              <a:extLst>
+                <a:ext uri="{FF2B5EF4-FFF2-40B4-BE49-F238E27FC236}">
+                  <a16:creationId xmlns:a16="http://schemas.microsoft.com/office/drawing/2014/main" id="{018E260F-FD4E-4521-B1C6-7FF05511ECD9}"/>
+                </a:ext>
+              </a:extLst>
+            </p:cNvPr>
+            <p:cNvSpPr/>
+            <p:nvPr/>
+          </p:nvSpPr>
+          <p:spPr>
+            <a:xfrm>
+              <a:off x="3246120" y="1828800"/>
+              <a:ext cx="2651760" cy="1785547"/>
+            </a:xfrm>
+            <a:prstGeom prst="roundRect">
+              <a:avLst>
+                <a:gd name="adj" fmla="val 3448"/>
+              </a:avLst>
+            </a:prstGeom>
+            <a:solidFill>
+              <a:srgbClr val="FFFFFF"/>
+            </a:solidFill>
+            <a:ln w="12700">
+              <a:solidFill>
+                <a:srgbClr val="2E86AB"/>
+              </a:solidFill>
+              <a:prstDash val="dash"/>
+            </a:ln>
+          </p:spPr>
+          <p:txBody>
+            <a:bodyPr/>
+            <a:lstStyle/>
+            <a:p>
+              <a:endParaRPr lang="es-ES"/>
+            </a:p>
+          </p:txBody>
+        </p:sp>
+        <p:sp>
+          <p:nvSpPr>
+            <p:cNvPr id="25" name="Text 7">
+              <a:extLst>
+                <a:ext uri="{FF2B5EF4-FFF2-40B4-BE49-F238E27FC236}">
+                  <a16:creationId xmlns:a16="http://schemas.microsoft.com/office/drawing/2014/main" id="{00C7E105-62E9-4E7D-938D-7A2AE0878BD9}"/>
+                </a:ext>
+              </a:extLst>
+            </p:cNvPr>
+            <p:cNvSpPr/>
+            <p:nvPr/>
+          </p:nvSpPr>
+          <p:spPr>
+            <a:xfrm>
+              <a:off x="3293853" y="1965660"/>
+              <a:ext cx="2556295" cy="274319"/>
+            </a:xfrm>
+            <a:prstGeom prst="rect">
+              <a:avLst/>
+            </a:prstGeom>
+            <a:noFill/>
+            <a:ln/>
+          </p:spPr>
+          <p:txBody>
+            <a:bodyPr wrap="square" lIns="0" tIns="0" rIns="0" bIns="0" rtlCol="0" anchor="ctr"/>
+            <a:lstStyle/>
+            <a:p>
+              <a:pPr marL="0" indent="0">
+                <a:buNone/>
+              </a:pPr>
+              <a:r>
+                <a:rPr lang="en-US" sz="1000" b="1" kern="0" spc="300" dirty="0">
+                  <a:solidFill>
+                    <a:srgbClr val="2E86AB"/>
+                  </a:solidFill>
+                  <a:latin typeface="Georgia" panose="02040502050405020303" pitchFamily="18" charset="0"/>
+                  <a:ea typeface="Calibri" pitchFamily="34" charset="-122"/>
+                  <a:cs typeface="Calibri" pitchFamily="34" charset="-120"/>
+                </a:rPr>
+                <a:t>DISPONIBILIDAD</a:t>
+              </a:r>
+              <a:endParaRPr lang="en-US" sz="1000" dirty="0">
+                <a:latin typeface="Georgia" panose="02040502050405020303" pitchFamily="18" charset="0"/>
+              </a:endParaRPr>
+            </a:p>
+          </p:txBody>
+        </p:sp>
+        <p:sp>
+          <p:nvSpPr>
+            <p:cNvPr id="26" name="Text 8">
+              <a:extLst>
+                <a:ext uri="{FF2B5EF4-FFF2-40B4-BE49-F238E27FC236}">
+                  <a16:creationId xmlns:a16="http://schemas.microsoft.com/office/drawing/2014/main" id="{E3CEB4B0-A76A-4DFA-AF5A-D6EC9582E0A7}"/>
+                </a:ext>
+              </a:extLst>
+            </p:cNvPr>
+            <p:cNvSpPr/>
+            <p:nvPr/>
+          </p:nvSpPr>
+          <p:spPr>
+            <a:xfrm>
+              <a:off x="3429000" y="2377441"/>
+              <a:ext cx="2285999" cy="1236907"/>
+            </a:xfrm>
+            <a:prstGeom prst="rect">
+              <a:avLst/>
+            </a:prstGeom>
+            <a:noFill/>
+            <a:ln/>
+          </p:spPr>
+          <p:txBody>
+            <a:bodyPr wrap="square" lIns="0" tIns="0" rIns="0" bIns="0" rtlCol="0" anchor="ctr"/>
+            <a:lstStyle/>
+            <a:p>
+              <a:pPr marL="171450" indent="-171450">
+                <a:buFont typeface="Arial" panose="020B0604020202020204" pitchFamily="34" charset="0"/>
+                <a:buChar char="•"/>
+              </a:pPr>
+              <a:r>
+                <a:rPr lang="en-US" sz="1100" dirty="0">
+                  <a:latin typeface="Georgia" panose="02040502050405020303" pitchFamily="18" charset="0"/>
+                </a:rPr>
+                <a:t>a</a:t>
+              </a:r>
+              <a:r>
+                <a:rPr lang="en-US" sz="1100" b="0" dirty="0">
+                  <a:effectLst/>
+                  <a:latin typeface="Georgia" panose="02040502050405020303" pitchFamily="18" charset="0"/>
+                </a:rPr>
+                <a:t>vailability_30</a:t>
+              </a:r>
+            </a:p>
+            <a:p>
+              <a:pPr marL="171450" indent="-171450">
+                <a:buFont typeface="Arial" panose="020B0604020202020204" pitchFamily="34" charset="0"/>
+                <a:buChar char="•"/>
+              </a:pPr>
+              <a:r>
+                <a:rPr lang="en-US" sz="1100" dirty="0">
+                  <a:latin typeface="Georgia" panose="02040502050405020303" pitchFamily="18" charset="0"/>
+                </a:rPr>
+                <a:t>availability_60</a:t>
+              </a:r>
+            </a:p>
+            <a:p>
+              <a:pPr marL="171450" indent="-171450">
+                <a:buFont typeface="Arial" panose="020B0604020202020204" pitchFamily="34" charset="0"/>
+                <a:buChar char="•"/>
+              </a:pPr>
+              <a:r>
+                <a:rPr lang="en-US" sz="1100" dirty="0">
+                  <a:latin typeface="Georgia" panose="02040502050405020303" pitchFamily="18" charset="0"/>
+                </a:rPr>
+                <a:t>availability_90</a:t>
+              </a:r>
+            </a:p>
+            <a:p>
+              <a:pPr marL="171450" indent="-171450">
+                <a:buFont typeface="Arial" panose="020B0604020202020204" pitchFamily="34" charset="0"/>
+                <a:buChar char="•"/>
+              </a:pPr>
+              <a:r>
+                <a:rPr lang="en-US" sz="1100" dirty="0">
+                  <a:latin typeface="Georgia" panose="02040502050405020303" pitchFamily="18" charset="0"/>
+                </a:rPr>
+                <a:t>availability_365</a:t>
+              </a:r>
+            </a:p>
+            <a:p>
+              <a:pPr marL="171450" indent="-171450">
+                <a:buFont typeface="Arial" panose="020B0604020202020204" pitchFamily="34" charset="0"/>
+                <a:buChar char="•"/>
+              </a:pPr>
+              <a:r>
+                <a:rPr lang="en-US" sz="1100" b="0" dirty="0" err="1">
+                  <a:effectLst/>
+                  <a:latin typeface="Georgia" panose="02040502050405020303" pitchFamily="18" charset="0"/>
+                </a:rPr>
+                <a:t>insert_date</a:t>
+              </a:r>
+              <a:endParaRPr lang="en-US" sz="1100" dirty="0">
+                <a:latin typeface="Georgia" panose="02040502050405020303" pitchFamily="18" charset="0"/>
+              </a:endParaRPr>
+            </a:p>
+          </p:txBody>
+        </p:sp>
+      </p:grpSp>
+      <p:grpSp>
+        <p:nvGrpSpPr>
+          <p:cNvPr id="27" name="Group 26">
+            <a:extLst>
+              <a:ext uri="{FF2B5EF4-FFF2-40B4-BE49-F238E27FC236}">
+                <a16:creationId xmlns:a16="http://schemas.microsoft.com/office/drawing/2014/main" id="{0D8B81C9-AA7B-4C1B-AF0C-95F0D3195380}"/>
+              </a:ext>
+            </a:extLst>
+          </p:cNvPr>
+          <p:cNvGrpSpPr/>
           <p:nvPr/>
-        </p:nvSpPr>
-        <p:spPr>
+        </p:nvGrpSpPr>
+        <p:grpSpPr>
           <a:xfrm>
-            <a:off x="640080" y="2377440"/>
-            <a:ext cx="2286000" cy="2286000"/>
+            <a:off x="4632957" y="1318259"/>
+            <a:ext cx="1905000" cy="1911469"/>
+            <a:chOff x="3246120" y="1828800"/>
+            <a:chExt cx="2651760" cy="3017520"/>
           </a:xfrm>
-          <a:prstGeom prst="rect">
-            <a:avLst/>
-          </a:prstGeom>
-          <a:noFill/>
-          <a:ln/>
-        </p:spPr>
-        <p:txBody>
-          <a:bodyPr wrap="square" lIns="0" tIns="0" rIns="0" bIns="0" rtlCol="0" anchor="ctr"/>
-          <a:lstStyle/>
-          <a:p>
-            <a:pPr marL="0" indent="0">
-              <a:buNone/>
-            </a:pPr>
-            <a:r>
-              <a:rPr lang="en-US" sz="1100" i="1" dirty="0">
-                <a:solidFill>
-                  <a:srgbClr val="64748B"/>
-                </a:solidFill>
-                <a:latin typeface="Calibri" pitchFamily="34" charset="0"/>
-                <a:ea typeface="Calibri" pitchFamily="34" charset="-122"/>
-                <a:cs typeface="Calibri" pitchFamily="34" charset="-120"/>
-              </a:rPr>
-              <a:t>Lo más relevante que encontraste:</a:t>
-            </a:r>
-            <a:endParaRPr lang="en-US" sz="1100" dirty="0"/>
-          </a:p>
-          <a:p>
-            <a:pPr marL="0" indent="0">
-              <a:buNone/>
-            </a:pPr>
-            <a:endParaRPr lang="en-US" sz="1100" dirty="0"/>
-          </a:p>
-          <a:p>
-            <a:pPr marL="0" indent="0">
-              <a:buNone/>
-            </a:pPr>
-            <a:r>
-              <a:rPr lang="en-US" sz="1100" i="1" dirty="0">
-                <a:solidFill>
-                  <a:srgbClr val="64748B"/>
-                </a:solidFill>
-                <a:latin typeface="Calibri" pitchFamily="34" charset="0"/>
-                <a:ea typeface="Calibri" pitchFamily="34" charset="-122"/>
-                <a:cs typeface="Calibri" pitchFamily="34" charset="-120"/>
-              </a:rPr>
-              <a:t>• Ciudad con precio más alto/bajo</a:t>
-            </a:r>
-            <a:endParaRPr lang="en-US" sz="1100" dirty="0"/>
-          </a:p>
-          <a:p>
-            <a:pPr marL="0" indent="0">
-              <a:buNone/>
-            </a:pPr>
-            <a:r>
-              <a:rPr lang="en-US" sz="1100" i="1" dirty="0">
-                <a:solidFill>
-                  <a:srgbClr val="64748B"/>
-                </a:solidFill>
-                <a:latin typeface="Calibri" pitchFamily="34" charset="0"/>
-                <a:ea typeface="Calibri" pitchFamily="34" charset="-122"/>
-                <a:cs typeface="Calibri" pitchFamily="34" charset="-120"/>
-              </a:rPr>
-              <a:t>• Tipo de alojamiento que marca tendencia</a:t>
-            </a:r>
-            <a:endParaRPr lang="en-US" sz="1100" dirty="0"/>
-          </a:p>
-          <a:p>
-            <a:pPr marL="0" indent="0">
-              <a:buNone/>
-            </a:pPr>
-            <a:r>
-              <a:rPr lang="en-US" sz="1100" i="1" dirty="0">
-                <a:solidFill>
-                  <a:srgbClr val="64748B"/>
-                </a:solidFill>
-                <a:latin typeface="Calibri" pitchFamily="34" charset="0"/>
-                <a:ea typeface="Calibri" pitchFamily="34" charset="-122"/>
-                <a:cs typeface="Calibri" pitchFamily="34" charset="-120"/>
-              </a:rPr>
-              <a:t>• Brechas notables por destino</a:t>
-            </a:r>
-            <a:endParaRPr lang="en-US" sz="1100" dirty="0"/>
-          </a:p>
-        </p:txBody>
-      </p:sp>
-      <p:sp>
-        <p:nvSpPr>
-          <p:cNvPr id="8" name="Shape 6"/>
-          <p:cNvSpPr/>
+        </p:grpSpPr>
+        <p:sp>
+          <p:nvSpPr>
+            <p:cNvPr id="28" name="Shape 6">
+              <a:extLst>
+                <a:ext uri="{FF2B5EF4-FFF2-40B4-BE49-F238E27FC236}">
+                  <a16:creationId xmlns:a16="http://schemas.microsoft.com/office/drawing/2014/main" id="{A19DF887-A8DE-41B6-B70D-7D860E1FA0C6}"/>
+                </a:ext>
+              </a:extLst>
+            </p:cNvPr>
+            <p:cNvSpPr/>
+            <p:nvPr/>
+          </p:nvSpPr>
+          <p:spPr>
+            <a:xfrm>
+              <a:off x="3246120" y="1828800"/>
+              <a:ext cx="2651760" cy="3017520"/>
+            </a:xfrm>
+            <a:prstGeom prst="roundRect">
+              <a:avLst>
+                <a:gd name="adj" fmla="val 3448"/>
+              </a:avLst>
+            </a:prstGeom>
+            <a:solidFill>
+              <a:srgbClr val="FFFFFF"/>
+            </a:solidFill>
+            <a:ln w="12700">
+              <a:solidFill>
+                <a:srgbClr val="2E86AB"/>
+              </a:solidFill>
+              <a:prstDash val="dash"/>
+            </a:ln>
+          </p:spPr>
+          <p:txBody>
+            <a:bodyPr/>
+            <a:lstStyle/>
+            <a:p>
+              <a:endParaRPr lang="es-ES" dirty="0"/>
+            </a:p>
+          </p:txBody>
+        </p:sp>
+        <p:sp>
+          <p:nvSpPr>
+            <p:cNvPr id="29" name="Text 7">
+              <a:extLst>
+                <a:ext uri="{FF2B5EF4-FFF2-40B4-BE49-F238E27FC236}">
+                  <a16:creationId xmlns:a16="http://schemas.microsoft.com/office/drawing/2014/main" id="{EC7905A5-690F-4B7A-B54C-324C4A5E3A3A}"/>
+                </a:ext>
+              </a:extLst>
+            </p:cNvPr>
+            <p:cNvSpPr/>
+            <p:nvPr/>
+          </p:nvSpPr>
+          <p:spPr>
+            <a:xfrm>
+              <a:off x="3429000" y="2011680"/>
+              <a:ext cx="2286000" cy="274320"/>
+            </a:xfrm>
+            <a:prstGeom prst="rect">
+              <a:avLst/>
+            </a:prstGeom>
+            <a:noFill/>
+            <a:ln/>
+          </p:spPr>
+          <p:txBody>
+            <a:bodyPr wrap="square" lIns="0" tIns="0" rIns="0" bIns="0" rtlCol="0" anchor="ctr"/>
+            <a:lstStyle/>
+            <a:p>
+              <a:pPr marL="0" indent="0">
+                <a:buNone/>
+              </a:pPr>
+              <a:r>
+                <a:rPr lang="en-US" sz="1000" b="1" kern="0" spc="300" dirty="0">
+                  <a:solidFill>
+                    <a:srgbClr val="2E86AB"/>
+                  </a:solidFill>
+                  <a:latin typeface="Georgia" panose="02040502050405020303" pitchFamily="18" charset="0"/>
+                  <a:ea typeface="Calibri" pitchFamily="34" charset="-122"/>
+                  <a:cs typeface="Calibri" pitchFamily="34" charset="-120"/>
+                </a:rPr>
+                <a:t>SEGMENTACIÓN GEOGRÁFICA</a:t>
+              </a:r>
+              <a:endParaRPr lang="en-US" sz="1000" dirty="0">
+                <a:latin typeface="Georgia" panose="02040502050405020303" pitchFamily="18" charset="0"/>
+              </a:endParaRPr>
+            </a:p>
+          </p:txBody>
+        </p:sp>
+        <p:sp>
+          <p:nvSpPr>
+            <p:cNvPr id="30" name="Text 8">
+              <a:extLst>
+                <a:ext uri="{FF2B5EF4-FFF2-40B4-BE49-F238E27FC236}">
+                  <a16:creationId xmlns:a16="http://schemas.microsoft.com/office/drawing/2014/main" id="{DBABECBC-E83E-47C8-8AA2-814EB370427D}"/>
+                </a:ext>
+              </a:extLst>
+            </p:cNvPr>
+            <p:cNvSpPr/>
+            <p:nvPr/>
+          </p:nvSpPr>
+          <p:spPr>
+            <a:xfrm>
+              <a:off x="3429000" y="2377440"/>
+              <a:ext cx="2286000" cy="2286000"/>
+            </a:xfrm>
+            <a:prstGeom prst="rect">
+              <a:avLst/>
+            </a:prstGeom>
+            <a:noFill/>
+            <a:ln/>
+          </p:spPr>
+          <p:txBody>
+            <a:bodyPr wrap="square" lIns="0" tIns="0" rIns="0" bIns="0" rtlCol="0" anchor="ctr"/>
+            <a:lstStyle/>
+            <a:p>
+              <a:pPr marL="171450" indent="-171450">
+                <a:buFont typeface="Arial" panose="020B0604020202020204" pitchFamily="34" charset="0"/>
+                <a:buChar char="•"/>
+              </a:pPr>
+              <a:r>
+                <a:rPr lang="en-US" sz="1100" b="0" dirty="0">
+                  <a:effectLst/>
+                  <a:latin typeface="Georgia" panose="02040502050405020303" pitchFamily="18" charset="0"/>
+                </a:rPr>
+                <a:t>city,</a:t>
+              </a:r>
+            </a:p>
+            <a:p>
+              <a:pPr marL="171450" indent="-171450">
+                <a:buFont typeface="Arial" panose="020B0604020202020204" pitchFamily="34" charset="0"/>
+                <a:buChar char="•"/>
+              </a:pPr>
+              <a:r>
+                <a:rPr lang="en-US" sz="1100" dirty="0" err="1">
+                  <a:latin typeface="Georgia" panose="02040502050405020303" pitchFamily="18" charset="0"/>
+                </a:rPr>
+                <a:t>n</a:t>
+              </a:r>
+              <a:r>
+                <a:rPr lang="en-US" sz="1100" b="0" dirty="0" err="1">
+                  <a:effectLst/>
+                  <a:latin typeface="Georgia" panose="02040502050405020303" pitchFamily="18" charset="0"/>
+                </a:rPr>
+                <a:t>eighbourhood_name</a:t>
+              </a:r>
+              <a:r>
+                <a:rPr lang="en-US" sz="1100" b="0" dirty="0">
+                  <a:effectLst/>
+                  <a:latin typeface="Georgia" panose="02040502050405020303" pitchFamily="18" charset="0"/>
+                </a:rPr>
+                <a:t>, </a:t>
+              </a:r>
+            </a:p>
+            <a:p>
+              <a:pPr marL="171450" indent="-171450">
+                <a:buFont typeface="Arial" panose="020B0604020202020204" pitchFamily="34" charset="0"/>
+                <a:buChar char="•"/>
+              </a:pPr>
+              <a:r>
+                <a:rPr lang="en-US" sz="1100" b="0" dirty="0" err="1">
+                  <a:effectLst/>
+                  <a:latin typeface="Georgia" panose="02040502050405020303" pitchFamily="18" charset="0"/>
+                </a:rPr>
+                <a:t>neighbourhood</a:t>
+              </a:r>
+              <a:r>
+                <a:rPr lang="en-US" sz="1100" b="0" dirty="0">
+                  <a:effectLst/>
+                  <a:latin typeface="Georgia" panose="02040502050405020303" pitchFamily="18" charset="0"/>
+                </a:rPr>
+                <a:t> _district, </a:t>
+              </a:r>
+            </a:p>
+            <a:p>
+              <a:pPr marL="171450" indent="-171450">
+                <a:buFont typeface="Arial" panose="020B0604020202020204" pitchFamily="34" charset="0"/>
+                <a:buChar char="•"/>
+              </a:pPr>
+              <a:r>
+                <a:rPr lang="en-US" sz="1100" b="0" dirty="0">
+                  <a:effectLst/>
+                  <a:latin typeface="Georgia" panose="02040502050405020303" pitchFamily="18" charset="0"/>
+                </a:rPr>
+                <a:t>distance between the cities</a:t>
+              </a:r>
+            </a:p>
+          </p:txBody>
+        </p:sp>
+      </p:grpSp>
+      <p:grpSp>
+        <p:nvGrpSpPr>
+          <p:cNvPr id="37" name="Group 36">
+            <a:extLst>
+              <a:ext uri="{FF2B5EF4-FFF2-40B4-BE49-F238E27FC236}">
+                <a16:creationId xmlns:a16="http://schemas.microsoft.com/office/drawing/2014/main" id="{C333BD17-BE67-4913-B734-B7574E333AFA}"/>
+              </a:ext>
+            </a:extLst>
+          </p:cNvPr>
+          <p:cNvGrpSpPr/>
           <p:nvPr/>
-        </p:nvSpPr>
-        <p:spPr>
+        </p:nvGrpSpPr>
+        <p:grpSpPr>
           <a:xfrm>
-            <a:off x="3246120" y="1828800"/>
-            <a:ext cx="2651760" cy="3017520"/>
+            <a:off x="5061855" y="3694066"/>
+            <a:ext cx="2011680" cy="914400"/>
+            <a:chOff x="1542602" y="3665316"/>
+            <a:chExt cx="2011680" cy="914400"/>
           </a:xfrm>
-          <a:prstGeom prst="roundRect">
-            <a:avLst>
-              <a:gd name="adj" fmla="val 3448"/>
-            </a:avLst>
-          </a:prstGeom>
-          <a:solidFill>
-            <a:srgbClr val="FFFFFF"/>
-          </a:solidFill>
-          <a:ln w="12700">
+        </p:grpSpPr>
+        <p:sp>
+          <p:nvSpPr>
+            <p:cNvPr id="33" name="Shape 2">
+              <a:extLst>
+                <a:ext uri="{FF2B5EF4-FFF2-40B4-BE49-F238E27FC236}">
+                  <a16:creationId xmlns:a16="http://schemas.microsoft.com/office/drawing/2014/main" id="{102E0F78-B001-4EC0-8087-74E61E183D8E}"/>
+                </a:ext>
+              </a:extLst>
+            </p:cNvPr>
+            <p:cNvSpPr/>
+            <p:nvPr/>
+          </p:nvSpPr>
+          <p:spPr>
+            <a:xfrm>
+              <a:off x="1542602" y="3665316"/>
+              <a:ext cx="54864" cy="914400"/>
+            </a:xfrm>
+            <a:prstGeom prst="rect">
+              <a:avLst/>
+            </a:prstGeom>
             <a:solidFill>
-              <a:srgbClr val="2E86AB"/>
+              <a:srgbClr val="1E3A5F"/>
             </a:solidFill>
-            <a:prstDash val="dash"/>
-          </a:ln>
-        </p:spPr>
-        <p:txBody>
-          <a:bodyPr/>
-          <a:lstStyle/>
-          <a:p>
-            <a:endParaRPr lang="es-ES"/>
-          </a:p>
-        </p:txBody>
-      </p:sp>
-      <p:sp>
-        <p:nvSpPr>
-          <p:cNvPr id="9" name="Text 7"/>
-          <p:cNvSpPr/>
+            <a:ln/>
+          </p:spPr>
+          <p:txBody>
+            <a:bodyPr/>
+            <a:lstStyle/>
+            <a:p>
+              <a:endParaRPr lang="es-ES"/>
+            </a:p>
+          </p:txBody>
+        </p:sp>
+        <p:sp>
+          <p:nvSpPr>
+            <p:cNvPr id="35" name="Text 4">
+              <a:extLst>
+                <a:ext uri="{FF2B5EF4-FFF2-40B4-BE49-F238E27FC236}">
+                  <a16:creationId xmlns:a16="http://schemas.microsoft.com/office/drawing/2014/main" id="{412F740A-09DE-4AE5-B1D4-45B8A473F18D}"/>
+                </a:ext>
+              </a:extLst>
+            </p:cNvPr>
+            <p:cNvSpPr/>
+            <p:nvPr/>
+          </p:nvSpPr>
+          <p:spPr>
+            <a:xfrm>
+              <a:off x="1707194" y="3939636"/>
+              <a:ext cx="1847088" cy="384048"/>
+            </a:xfrm>
+            <a:prstGeom prst="rect">
+              <a:avLst/>
+            </a:prstGeom>
+            <a:noFill/>
+            <a:ln/>
+          </p:spPr>
+          <p:txBody>
+            <a:bodyPr wrap="square" lIns="0" tIns="0" rIns="0" bIns="0" rtlCol="0" anchor="ctr"/>
+            <a:lstStyle/>
+            <a:p>
+              <a:pPr marL="0" indent="0">
+                <a:buNone/>
+              </a:pPr>
+              <a:r>
+                <a:rPr lang="en-US" sz="2100" b="1" dirty="0">
+                  <a:latin typeface="Georgia" pitchFamily="34" charset="0"/>
+                  <a:ea typeface="Georgia" pitchFamily="34" charset="-122"/>
+                  <a:cs typeface="Georgia" pitchFamily="34" charset="-120"/>
+                </a:rPr>
+                <a:t>Sistema de </a:t>
+              </a:r>
+              <a:r>
+                <a:rPr lang="en-US" sz="2100" b="1" dirty="0" err="1">
+                  <a:latin typeface="Georgia" pitchFamily="34" charset="0"/>
+                  <a:ea typeface="Georgia" pitchFamily="34" charset="-122"/>
+                  <a:cs typeface="Georgia" pitchFamily="34" charset="-120"/>
+                </a:rPr>
+                <a:t>valoración</a:t>
+              </a:r>
+              <a:r>
+                <a:rPr lang="en-US" sz="2100" b="1" dirty="0">
+                  <a:latin typeface="Georgia" pitchFamily="34" charset="0"/>
+                  <a:ea typeface="Georgia" pitchFamily="34" charset="-122"/>
+                  <a:cs typeface="Georgia" pitchFamily="34" charset="-120"/>
+                </a:rPr>
+                <a:t> </a:t>
+              </a:r>
+              <a:endParaRPr lang="en-US" sz="2100" dirty="0"/>
+            </a:p>
+          </p:txBody>
+        </p:sp>
+      </p:grpSp>
+      <p:grpSp>
+        <p:nvGrpSpPr>
+          <p:cNvPr id="38" name="Group 37">
+            <a:extLst>
+              <a:ext uri="{FF2B5EF4-FFF2-40B4-BE49-F238E27FC236}">
+                <a16:creationId xmlns:a16="http://schemas.microsoft.com/office/drawing/2014/main" id="{6418486F-DC4C-444D-8369-7C6B524693D2}"/>
+              </a:ext>
+            </a:extLst>
+          </p:cNvPr>
+          <p:cNvGrpSpPr/>
           <p:nvPr/>
-        </p:nvSpPr>
-        <p:spPr>
+        </p:nvGrpSpPr>
+        <p:grpSpPr>
           <a:xfrm>
-            <a:off x="3429000" y="2011680"/>
-            <a:ext cx="2286000" cy="274320"/>
+            <a:off x="2446018" y="3694066"/>
+            <a:ext cx="2011680" cy="914400"/>
+            <a:chOff x="1542602" y="3665316"/>
+            <a:chExt cx="2011680" cy="914400"/>
           </a:xfrm>
-          <a:prstGeom prst="rect">
-            <a:avLst/>
-          </a:prstGeom>
-          <a:noFill/>
-          <a:ln/>
-        </p:spPr>
-        <p:txBody>
-          <a:bodyPr wrap="square" lIns="0" tIns="0" rIns="0" bIns="0" rtlCol="0" anchor="ctr"/>
-          <a:lstStyle/>
-          <a:p>
-            <a:pPr marL="0" indent="0">
-              <a:buNone/>
-            </a:pPr>
-            <a:r>
-              <a:rPr lang="en-US" sz="1000" b="1" kern="0" spc="300" dirty="0">
-                <a:solidFill>
-                  <a:srgbClr val="2E86AB"/>
-                </a:solidFill>
-                <a:latin typeface="Calibri" pitchFamily="34" charset="0"/>
-                <a:ea typeface="Calibri" pitchFamily="34" charset="-122"/>
-                <a:cs typeface="Calibri" pitchFamily="34" charset="-120"/>
-              </a:rPr>
-              <a:t>INTERPRETACIÓN DE NEGOCIO</a:t>
-            </a:r>
-            <a:endParaRPr lang="en-US" sz="1000" dirty="0"/>
-          </a:p>
-        </p:txBody>
-      </p:sp>
-      <p:sp>
-        <p:nvSpPr>
-          <p:cNvPr id="10" name="Text 8"/>
-          <p:cNvSpPr/>
-          <p:nvPr/>
-        </p:nvSpPr>
-        <p:spPr>
-          <a:xfrm>
-            <a:off x="3429000" y="2377440"/>
-            <a:ext cx="2286000" cy="2286000"/>
-          </a:xfrm>
-          <a:prstGeom prst="rect">
-            <a:avLst/>
-          </a:prstGeom>
-          <a:noFill/>
-          <a:ln/>
-        </p:spPr>
-        <p:txBody>
-          <a:bodyPr wrap="square" lIns="0" tIns="0" rIns="0" bIns="0" rtlCol="0" anchor="ctr"/>
-          <a:lstStyle/>
-          <a:p>
-            <a:pPr marL="0" indent="0">
-              <a:buNone/>
-            </a:pPr>
-            <a:r>
-              <a:rPr lang="en-US" sz="1100" i="1" dirty="0">
-                <a:solidFill>
-                  <a:srgbClr val="64748B"/>
-                </a:solidFill>
-                <a:latin typeface="Calibri" pitchFamily="34" charset="0"/>
-                <a:ea typeface="Calibri" pitchFamily="34" charset="-122"/>
-                <a:cs typeface="Calibri" pitchFamily="34" charset="-120"/>
-              </a:rPr>
-              <a:t>Por qué importa para StaySpain:</a:t>
-            </a:r>
-            <a:endParaRPr lang="en-US" sz="1100" dirty="0"/>
-          </a:p>
-          <a:p>
-            <a:pPr marL="0" indent="0">
-              <a:buNone/>
-            </a:pPr>
-            <a:endParaRPr lang="en-US" sz="1100" dirty="0"/>
-          </a:p>
-          <a:p>
-            <a:pPr marL="0" indent="0">
-              <a:buNone/>
-            </a:pPr>
-            <a:r>
-              <a:rPr lang="en-US" sz="1100" i="1" dirty="0">
-                <a:solidFill>
-                  <a:srgbClr val="64748B"/>
-                </a:solidFill>
-                <a:latin typeface="Calibri" pitchFamily="34" charset="0"/>
-                <a:ea typeface="Calibri" pitchFamily="34" charset="-122"/>
-                <a:cs typeface="Calibri" pitchFamily="34" charset="-120"/>
-              </a:rPr>
-              <a:t>• Posicionamiento de precio</a:t>
-            </a:r>
-            <a:endParaRPr lang="en-US" sz="1100" dirty="0"/>
-          </a:p>
-          <a:p>
-            <a:pPr marL="0" indent="0">
-              <a:buNone/>
-            </a:pPr>
-            <a:r>
-              <a:rPr lang="en-US" sz="1100" i="1" dirty="0">
-                <a:solidFill>
-                  <a:srgbClr val="64748B"/>
-                </a:solidFill>
-                <a:latin typeface="Calibri" pitchFamily="34" charset="0"/>
-                <a:ea typeface="Calibri" pitchFamily="34" charset="-122"/>
-                <a:cs typeface="Calibri" pitchFamily="34" charset="-120"/>
-              </a:rPr>
-              <a:t>• Segmentos con margen alto</a:t>
-            </a:r>
-            <a:endParaRPr lang="en-US" sz="1100" dirty="0"/>
-          </a:p>
-          <a:p>
-            <a:pPr marL="0" indent="0">
-              <a:buNone/>
-            </a:pPr>
-            <a:r>
-              <a:rPr lang="en-US" sz="1100" i="1" dirty="0">
-                <a:solidFill>
-                  <a:srgbClr val="64748B"/>
-                </a:solidFill>
-                <a:latin typeface="Calibri" pitchFamily="34" charset="0"/>
-                <a:ea typeface="Calibri" pitchFamily="34" charset="-122"/>
-                <a:cs typeface="Calibri" pitchFamily="34" charset="-120"/>
-              </a:rPr>
-              <a:t>• Mercados con tarifa baja a revisar</a:t>
-            </a:r>
-            <a:endParaRPr lang="en-US" sz="1100" dirty="0"/>
-          </a:p>
-        </p:txBody>
-      </p:sp>
-      <p:sp>
-        <p:nvSpPr>
-          <p:cNvPr id="11" name="Shape 9"/>
-          <p:cNvSpPr/>
-          <p:nvPr/>
-        </p:nvSpPr>
-        <p:spPr>
-          <a:xfrm>
-            <a:off x="6035040" y="1828800"/>
-            <a:ext cx="2651760" cy="3017520"/>
-          </a:xfrm>
-          <a:prstGeom prst="roundRect">
-            <a:avLst>
-              <a:gd name="adj" fmla="val 3448"/>
-            </a:avLst>
-          </a:prstGeom>
-          <a:solidFill>
-            <a:srgbClr val="FFFFFF"/>
-          </a:solidFill>
-          <a:ln w="12700">
+        </p:grpSpPr>
+        <p:sp>
+          <p:nvSpPr>
+            <p:cNvPr id="39" name="Shape 2">
+              <a:extLst>
+                <a:ext uri="{FF2B5EF4-FFF2-40B4-BE49-F238E27FC236}">
+                  <a16:creationId xmlns:a16="http://schemas.microsoft.com/office/drawing/2014/main" id="{790304EE-D66D-4CDB-837B-E593DFE66356}"/>
+                </a:ext>
+              </a:extLst>
+            </p:cNvPr>
+            <p:cNvSpPr/>
+            <p:nvPr/>
+          </p:nvSpPr>
+          <p:spPr>
+            <a:xfrm>
+              <a:off x="1542602" y="3665316"/>
+              <a:ext cx="54864" cy="914400"/>
+            </a:xfrm>
+            <a:prstGeom prst="rect">
+              <a:avLst/>
+            </a:prstGeom>
             <a:solidFill>
-              <a:srgbClr val="2E86AB"/>
+              <a:srgbClr val="1E3A5F"/>
             </a:solidFill>
-            <a:prstDash val="dash"/>
-          </a:ln>
-        </p:spPr>
-        <p:txBody>
-          <a:bodyPr/>
-          <a:lstStyle/>
-          <a:p>
-            <a:endParaRPr lang="es-ES"/>
-          </a:p>
-        </p:txBody>
-      </p:sp>
-      <p:sp>
-        <p:nvSpPr>
-          <p:cNvPr id="12" name="Text 10"/>
-          <p:cNvSpPr/>
-          <p:nvPr/>
-        </p:nvSpPr>
-        <p:spPr>
-          <a:xfrm>
-            <a:off x="6217920" y="2011680"/>
-            <a:ext cx="2286000" cy="274320"/>
-          </a:xfrm>
-          <a:prstGeom prst="rect">
-            <a:avLst/>
-          </a:prstGeom>
-          <a:noFill/>
-          <a:ln/>
-        </p:spPr>
-        <p:txBody>
-          <a:bodyPr wrap="square" lIns="0" tIns="0" rIns="0" bIns="0" rtlCol="0" anchor="ctr"/>
-          <a:lstStyle/>
-          <a:p>
-            <a:pPr marL="0" indent="0">
-              <a:buNone/>
-            </a:pPr>
-            <a:r>
-              <a:rPr lang="en-US" sz="1000" b="1" kern="0" spc="300" dirty="0">
-                <a:solidFill>
-                  <a:srgbClr val="2E86AB"/>
-                </a:solidFill>
-                <a:latin typeface="Calibri" pitchFamily="34" charset="0"/>
-                <a:ea typeface="Calibri" pitchFamily="34" charset="-122"/>
-                <a:cs typeface="Calibri" pitchFamily="34" charset="-120"/>
-              </a:rPr>
-              <a:t>PROPUESTAS PRIORIZADAS</a:t>
-            </a:r>
-            <a:endParaRPr lang="en-US" sz="1000" dirty="0"/>
-          </a:p>
-        </p:txBody>
-      </p:sp>
-      <p:sp>
-        <p:nvSpPr>
-          <p:cNvPr id="13" name="Text 11"/>
-          <p:cNvSpPr/>
-          <p:nvPr/>
-        </p:nvSpPr>
-        <p:spPr>
-          <a:xfrm>
-            <a:off x="6217920" y="2377440"/>
-            <a:ext cx="2286000" cy="2286000"/>
-          </a:xfrm>
-          <a:prstGeom prst="rect">
-            <a:avLst/>
-          </a:prstGeom>
-          <a:noFill/>
-          <a:ln/>
-        </p:spPr>
-        <p:txBody>
-          <a:bodyPr wrap="square" lIns="0" tIns="0" rIns="0" bIns="0" rtlCol="0" anchor="ctr"/>
-          <a:lstStyle/>
-          <a:p>
-            <a:pPr marL="0" indent="0">
-              <a:buNone/>
-            </a:pPr>
-            <a:r>
-              <a:rPr lang="en-US" sz="1100" i="1" dirty="0">
-                <a:solidFill>
-                  <a:srgbClr val="64748B"/>
-                </a:solidFill>
-                <a:latin typeface="Calibri" pitchFamily="34" charset="0"/>
-                <a:ea typeface="Calibri" pitchFamily="34" charset="-122"/>
-                <a:cs typeface="Calibri" pitchFamily="34" charset="-120"/>
-              </a:rPr>
-              <a:t>1.  Propuesta principal (Prioridad: Alta)</a:t>
-            </a:r>
-            <a:endParaRPr lang="en-US" sz="1100" dirty="0"/>
-          </a:p>
-          <a:p>
-            <a:pPr marL="0" indent="0">
-              <a:buNone/>
-            </a:pPr>
-            <a:r>
-              <a:rPr lang="en-US" sz="1100" i="1" dirty="0">
-                <a:solidFill>
-                  <a:srgbClr val="64748B"/>
-                </a:solidFill>
-                <a:latin typeface="Calibri" pitchFamily="34" charset="0"/>
-                <a:ea typeface="Calibri" pitchFamily="34" charset="-122"/>
-                <a:cs typeface="Calibri" pitchFamily="34" charset="-120"/>
-              </a:rPr>
-              <a:t>     Recursos: …</a:t>
-            </a:r>
-            <a:endParaRPr lang="en-US" sz="1100" dirty="0"/>
-          </a:p>
-          <a:p>
-            <a:pPr marL="0" indent="0">
-              <a:buNone/>
-            </a:pPr>
-            <a:endParaRPr lang="en-US" sz="1100" dirty="0"/>
-          </a:p>
-          <a:p>
-            <a:pPr marL="0" indent="0">
-              <a:buNone/>
-            </a:pPr>
-            <a:r>
-              <a:rPr lang="en-US" sz="1100" i="1" dirty="0">
-                <a:solidFill>
-                  <a:srgbClr val="64748B"/>
-                </a:solidFill>
-                <a:latin typeface="Calibri" pitchFamily="34" charset="0"/>
-                <a:ea typeface="Calibri" pitchFamily="34" charset="-122"/>
-                <a:cs typeface="Calibri" pitchFamily="34" charset="-120"/>
-              </a:rPr>
-              <a:t>2.  Segunda propuesta (Prioridad: Media)</a:t>
-            </a:r>
-            <a:endParaRPr lang="en-US" sz="1100" dirty="0"/>
-          </a:p>
-          <a:p>
-            <a:pPr marL="0" indent="0">
-              <a:buNone/>
-            </a:pPr>
-            <a:r>
-              <a:rPr lang="en-US" sz="1100" i="1" dirty="0">
-                <a:solidFill>
-                  <a:srgbClr val="64748B"/>
-                </a:solidFill>
-                <a:latin typeface="Calibri" pitchFamily="34" charset="0"/>
-                <a:ea typeface="Calibri" pitchFamily="34" charset="-122"/>
-                <a:cs typeface="Calibri" pitchFamily="34" charset="-120"/>
-              </a:rPr>
-              <a:t>     Recursos: …</a:t>
-            </a:r>
-            <a:endParaRPr lang="en-US" sz="1100" dirty="0"/>
-          </a:p>
-        </p:txBody>
-      </p:sp>
+            <a:ln/>
+          </p:spPr>
+          <p:txBody>
+            <a:bodyPr/>
+            <a:lstStyle/>
+            <a:p>
+              <a:endParaRPr lang="es-ES"/>
+            </a:p>
+          </p:txBody>
+        </p:sp>
+        <p:sp>
+          <p:nvSpPr>
+            <p:cNvPr id="40" name="Text 4">
+              <a:extLst>
+                <a:ext uri="{FF2B5EF4-FFF2-40B4-BE49-F238E27FC236}">
+                  <a16:creationId xmlns:a16="http://schemas.microsoft.com/office/drawing/2014/main" id="{2C5EC044-B8E3-4DC3-A28E-09D92007ECE0}"/>
+                </a:ext>
+              </a:extLst>
+            </p:cNvPr>
+            <p:cNvSpPr/>
+            <p:nvPr/>
+          </p:nvSpPr>
+          <p:spPr>
+            <a:xfrm>
+              <a:off x="1707194" y="3939636"/>
+              <a:ext cx="1847088" cy="384048"/>
+            </a:xfrm>
+            <a:prstGeom prst="rect">
+              <a:avLst/>
+            </a:prstGeom>
+            <a:noFill/>
+            <a:ln/>
+          </p:spPr>
+          <p:txBody>
+            <a:bodyPr wrap="square" lIns="0" tIns="0" rIns="0" bIns="0" rtlCol="0" anchor="ctr"/>
+            <a:lstStyle/>
+            <a:p>
+              <a:pPr marL="0" indent="0">
+                <a:buNone/>
+              </a:pPr>
+              <a:r>
+                <a:rPr lang="en-US" sz="2100" b="1" dirty="0">
+                  <a:latin typeface="Georgia" pitchFamily="34" charset="0"/>
+                  <a:ea typeface="Georgia" pitchFamily="34" charset="-122"/>
+                  <a:cs typeface="Georgia" pitchFamily="34" charset="-120"/>
+                </a:rPr>
+                <a:t>Sistema de </a:t>
+              </a:r>
+              <a:r>
+                <a:rPr lang="en-US" sz="2100" b="1" dirty="0" err="1">
+                  <a:latin typeface="Georgia" pitchFamily="34" charset="0"/>
+                  <a:ea typeface="Georgia" pitchFamily="34" charset="-122"/>
+                  <a:cs typeface="Georgia" pitchFamily="34" charset="-120"/>
+                </a:rPr>
+                <a:t>clasificación</a:t>
+              </a:r>
+              <a:r>
+                <a:rPr lang="en-US" sz="2100" b="1" dirty="0">
+                  <a:latin typeface="Georgia" pitchFamily="34" charset="0"/>
+                  <a:ea typeface="Georgia" pitchFamily="34" charset="-122"/>
+                  <a:cs typeface="Georgia" pitchFamily="34" charset="-120"/>
+                </a:rPr>
+                <a:t> </a:t>
+              </a:r>
+              <a:endParaRPr lang="en-US" sz="2100" dirty="0"/>
+            </a:p>
+          </p:txBody>
+        </p:sp>
+      </p:grpSp>
     </p:spTree>
   </p:cSld>
   <p:clrMapOvr>
@@ -4110,7 +6587,7 @@
 </p:sld>
 </file>
 
-<file path=ppt/slides/slide5.xml><?xml version="1.0" encoding="utf-8"?>
+<file path=ppt/slides/slide6.xml><?xml version="1.0" encoding="utf-8"?>
 <p:sld xmlns:a="http://schemas.openxmlformats.org/drawingml/2006/main" xmlns:r="http://schemas.openxmlformats.org/officeDocument/2006/relationships" xmlns:p="http://schemas.openxmlformats.org/presentationml/2006/main">
   <p:cSld name="Slide 5">
     <p:bg>
@@ -7537,7 +10014,7 @@
 </p:sld>
 </file>
 
-<file path=ppt/slides/slide6.xml><?xml version="1.0" encoding="utf-8"?>
+<file path=ppt/slides/slide7.xml><?xml version="1.0" encoding="utf-8"?>
 <p:sld xmlns:a="http://schemas.openxmlformats.org/drawingml/2006/main" xmlns:r="http://schemas.openxmlformats.org/officeDocument/2006/relationships" xmlns:p="http://schemas.openxmlformats.org/presentationml/2006/main">
   <p:cSld name="Slide 6">
     <p:bg>
@@ -8738,7 +11215,7 @@
 </p:sld>
 </file>
 
-<file path=ppt/slides/slide7.xml><?xml version="1.0" encoding="utf-8"?>
+<file path=ppt/slides/slide8.xml><?xml version="1.0" encoding="utf-8"?>
 <p:sld xmlns:a="http://schemas.openxmlformats.org/drawingml/2006/main" xmlns:r="http://schemas.openxmlformats.org/officeDocument/2006/relationships" xmlns:p="http://schemas.openxmlformats.org/presentationml/2006/main">
   <p:cSld name="Slide 7">
     <p:bg>
@@ -8850,7 +11327,7 @@
         <p:spPr>
           <a:xfrm>
             <a:off x="457200" y="1371600"/>
-            <a:ext cx="2697480" cy="3291840"/>
+            <a:ext cx="2697480" cy="3604260"/>
           </a:xfrm>
           <a:prstGeom prst="roundRect">
             <a:avLst>
@@ -8910,7 +11387,7 @@
         </p:nvSpPr>
         <p:spPr>
           <a:xfrm>
-            <a:off x="685800" y="1600200"/>
+            <a:off x="685800" y="1551543"/>
             <a:ext cx="2240280" cy="320040"/>
           </a:xfrm>
           <a:prstGeom prst="rect">
@@ -8931,13 +11408,15 @@
                 <a:solidFill>
                   <a:srgbClr val="1E3A5F"/>
                 </a:solidFill>
-                <a:latin typeface="Calibri" pitchFamily="34" charset="0"/>
+                <a:latin typeface="Georgia" panose="02040502050405020303" pitchFamily="18" charset="0"/>
                 <a:ea typeface="Calibri" pitchFamily="34" charset="-122"/>
                 <a:cs typeface="Calibri" pitchFamily="34" charset="-120"/>
               </a:rPr>
               <a:t>HALLAZGOS TRANSVERSALES</a:t>
             </a:r>
-            <a:endParaRPr lang="en-US" sz="1100" dirty="0"/>
+            <a:endParaRPr lang="en-US" sz="1100" dirty="0">
+              <a:latin typeface="Georgia" panose="02040502050405020303" pitchFamily="18" charset="0"/>
+            </a:endParaRPr>
           </a:p>
         </p:txBody>
       </p:sp>
@@ -8949,8 +11428,8 @@
         </p:nvSpPr>
         <p:spPr>
           <a:xfrm>
-            <a:off x="685800" y="2011680"/>
-            <a:ext cx="2240280" cy="2514600"/>
+            <a:off x="685800" y="1978374"/>
+            <a:ext cx="2240280" cy="2890806"/>
           </a:xfrm>
           <a:prstGeom prst="rect">
             <a:avLst/>
@@ -8969,17 +11448,41 @@
               <a:buNone/>
             </a:pPr>
             <a:r>
-              <a:rPr lang="en-US" sz="1100" dirty="0">
+              <a:rPr lang="en-US" sz="1050" dirty="0">
                 <a:solidFill>
                   <a:srgbClr val="1E293B"/>
                 </a:solidFill>
-                <a:latin typeface="Calibri" pitchFamily="34" charset="0"/>
-                <a:ea typeface="Calibri" pitchFamily="34" charset="-122"/>
-                <a:cs typeface="Calibri" pitchFamily="34" charset="-120"/>
-              </a:rPr>
-              <a:t>•  La cartera presenta una clara dualidad: mercados urbanos tensos vs. destinos estacionales holgados.</a:t>
-            </a:r>
-            <a:endParaRPr lang="en-US" sz="1100" dirty="0"/>
+                <a:latin typeface="Georgia" panose="02040502050405020303" pitchFamily="18" charset="0"/>
+                <a:ea typeface="Calibri" pitchFamily="34" charset="-122"/>
+                <a:cs typeface="Calibri" pitchFamily="34" charset="-120"/>
+              </a:rPr>
+              <a:t>•  La cartera presenta una clara </a:t>
+            </a:r>
+            <a:r>
+              <a:rPr lang="en-US" sz="1050" b="1" i="1" dirty="0">
+                <a:solidFill>
+                  <a:srgbClr val="1E293B"/>
+                </a:solidFill>
+                <a:latin typeface="Georgia" panose="02040502050405020303" pitchFamily="18" charset="0"/>
+                <a:ea typeface="Calibri" pitchFamily="34" charset="-122"/>
+                <a:cs typeface="Calibri" pitchFamily="34" charset="-120"/>
+              </a:rPr>
+              <a:t>dualidad</a:t>
+            </a:r>
+            <a:r>
+              <a:rPr lang="en-US" sz="1050" dirty="0">
+                <a:solidFill>
+                  <a:srgbClr val="1E293B"/>
+                </a:solidFill>
+                <a:latin typeface="Georgia" panose="02040502050405020303" pitchFamily="18" charset="0"/>
+                <a:ea typeface="Calibri" pitchFamily="34" charset="-122"/>
+                <a:cs typeface="Calibri" pitchFamily="34" charset="-120"/>
+              </a:rPr>
+              <a:t>: mercados urbanos tensos vs. destinos estacionales holgados.</a:t>
+            </a:r>
+            <a:endParaRPr lang="en-US" sz="1050" dirty="0">
+              <a:latin typeface="Georgia" panose="02040502050405020303" pitchFamily="18" charset="0"/>
+            </a:endParaRPr>
           </a:p>
           <a:p>
             <a:pPr marL="0" indent="0">
@@ -8989,17 +11492,41 @@
               <a:buNone/>
             </a:pPr>
             <a:r>
-              <a:rPr lang="en-US" sz="1100" dirty="0">
+              <a:rPr lang="en-US" sz="1050" dirty="0">
                 <a:solidFill>
                   <a:srgbClr val="1E293B"/>
                 </a:solidFill>
-                <a:latin typeface="Calibri" pitchFamily="34" charset="0"/>
-                <a:ea typeface="Calibri" pitchFamily="34" charset="-122"/>
-                <a:cs typeface="Calibri" pitchFamily="34" charset="-120"/>
-              </a:rPr>
-              <a:t> </a:t>
-            </a:r>
-            <a:endParaRPr lang="en-US" sz="1100" dirty="0"/>
+                <a:latin typeface="Georgia" panose="02040502050405020303" pitchFamily="18" charset="0"/>
+                <a:ea typeface="Calibri" pitchFamily="34" charset="-122"/>
+                <a:cs typeface="Calibri" pitchFamily="34" charset="-120"/>
+              </a:rPr>
+              <a:t> •  Existe inventario potencialmente </a:t>
+            </a:r>
+            <a:r>
+              <a:rPr lang="en-US" sz="1050" b="1" i="1" dirty="0">
+                <a:solidFill>
+                  <a:srgbClr val="1E293B"/>
+                </a:solidFill>
+                <a:latin typeface="Georgia" panose="02040502050405020303" pitchFamily="18" charset="0"/>
+                <a:ea typeface="Calibri" pitchFamily="34" charset="-122"/>
+                <a:cs typeface="Calibri" pitchFamily="34" charset="-120"/>
+              </a:rPr>
+              <a:t>inactivo</a:t>
+            </a:r>
+            <a:r>
+              <a:rPr lang="en-US" sz="1050" dirty="0">
+                <a:solidFill>
+                  <a:srgbClr val="1E293B"/>
+                </a:solidFill>
+                <a:latin typeface="Georgia" panose="02040502050405020303" pitchFamily="18" charset="0"/>
+                <a:ea typeface="Calibri" pitchFamily="34" charset="-122"/>
+                <a:cs typeface="Calibri" pitchFamily="34" charset="-120"/>
+              </a:rPr>
+              <a:t> que infla la oferta sin convertir.</a:t>
+            </a:r>
+            <a:endParaRPr lang="en-US" sz="1050" dirty="0">
+              <a:latin typeface="Georgia" panose="02040502050405020303" pitchFamily="18" charset="0"/>
+            </a:endParaRPr>
           </a:p>
           <a:p>
             <a:pPr marL="0" indent="0">
@@ -9009,57 +11536,686 @@
               <a:buNone/>
             </a:pPr>
             <a:r>
-              <a:rPr lang="en-US" sz="1100" dirty="0">
+              <a:rPr lang="en-US" sz="1050" dirty="0">
                 <a:solidFill>
                   <a:srgbClr val="1E293B"/>
                 </a:solidFill>
-                <a:latin typeface="Calibri" pitchFamily="34" charset="0"/>
-                <a:ea typeface="Calibri" pitchFamily="34" charset="-122"/>
-                <a:cs typeface="Calibri" pitchFamily="34" charset="-120"/>
-              </a:rPr>
-              <a:t>•  Existe inventario potencialmente inactivo que infla la oferta sin convertir.</a:t>
-            </a:r>
-            <a:endParaRPr lang="en-US" sz="1100" dirty="0"/>
+                <a:latin typeface="Georgia" panose="02040502050405020303" pitchFamily="18" charset="0"/>
+                <a:ea typeface="Calibri" pitchFamily="34" charset="-122"/>
+                <a:cs typeface="Calibri" pitchFamily="34" charset="-120"/>
+              </a:rPr>
+              <a:t> •  Las </a:t>
+            </a:r>
+            <a:r>
+              <a:rPr lang="en-US" sz="1050" b="1" i="1" dirty="0">
+                <a:solidFill>
+                  <a:srgbClr val="1E293B"/>
+                </a:solidFill>
+                <a:latin typeface="Georgia" panose="02040502050405020303" pitchFamily="18" charset="0"/>
+                <a:ea typeface="Calibri" pitchFamily="34" charset="-122"/>
+                <a:cs typeface="Calibri" pitchFamily="34" charset="-120"/>
+              </a:rPr>
+              <a:t>decisiones</a:t>
+            </a:r>
+            <a:r>
+              <a:rPr lang="en-US" sz="1050" dirty="0">
+                <a:solidFill>
+                  <a:srgbClr val="1E293B"/>
+                </a:solidFill>
+                <a:latin typeface="Georgia" panose="02040502050405020303" pitchFamily="18" charset="0"/>
+                <a:ea typeface="Calibri" pitchFamily="34" charset="-122"/>
+                <a:cs typeface="Calibri" pitchFamily="34" charset="-120"/>
+              </a:rPr>
+              <a:t> de precio y de inventario deben tomarse de </a:t>
+            </a:r>
+            <a:r>
+              <a:rPr lang="en-US" sz="1050" b="1" i="1" dirty="0">
+                <a:solidFill>
+                  <a:srgbClr val="1E293B"/>
+                </a:solidFill>
+                <a:latin typeface="Georgia" panose="02040502050405020303" pitchFamily="18" charset="0"/>
+                <a:ea typeface="Calibri" pitchFamily="34" charset="-122"/>
+                <a:cs typeface="Calibri" pitchFamily="34" charset="-120"/>
+              </a:rPr>
+              <a:t>forma coordinada</a:t>
+            </a:r>
+            <a:r>
+              <a:rPr lang="en-US" sz="1050" dirty="0">
+                <a:solidFill>
+                  <a:srgbClr val="1E293B"/>
+                </a:solidFill>
+                <a:latin typeface="Georgia" panose="02040502050405020303" pitchFamily="18" charset="0"/>
+                <a:ea typeface="Calibri" pitchFamily="34" charset="-122"/>
+                <a:cs typeface="Calibri" pitchFamily="34" charset="-120"/>
+              </a:rPr>
+              <a:t>: oferta y demanda son dos caras de la misma </a:t>
+            </a:r>
+            <a:r>
+              <a:rPr lang="en-US" sz="1050" dirty="0" err="1">
+                <a:solidFill>
+                  <a:srgbClr val="1E293B"/>
+                </a:solidFill>
+                <a:latin typeface="Georgia" panose="02040502050405020303" pitchFamily="18" charset="0"/>
+                <a:ea typeface="Calibri" pitchFamily="34" charset="-122"/>
+                <a:cs typeface="Calibri" pitchFamily="34" charset="-120"/>
+              </a:rPr>
+              <a:t>cartera</a:t>
+            </a:r>
+            <a:r>
+              <a:rPr lang="en-US" sz="1050" dirty="0">
+                <a:solidFill>
+                  <a:srgbClr val="1E293B"/>
+                </a:solidFill>
+                <a:latin typeface="Georgia" panose="02040502050405020303" pitchFamily="18" charset="0"/>
+                <a:ea typeface="Calibri" pitchFamily="34" charset="-122"/>
+                <a:cs typeface="Calibri" pitchFamily="34" charset="-120"/>
+              </a:rPr>
+              <a:t>.</a:t>
+            </a:r>
           </a:p>
           <a:p>
-            <a:pPr marL="0" indent="0">
+            <a:pPr>
               <a:spcAft>
                 <a:spcPts val="200"/>
               </a:spcAft>
-              <a:buNone/>
             </a:pPr>
             <a:r>
-              <a:rPr lang="en-US" sz="1100" dirty="0">
+              <a:rPr lang="en-US" sz="1050" dirty="0">
                 <a:solidFill>
                   <a:srgbClr val="1E293B"/>
                 </a:solidFill>
-                <a:latin typeface="Calibri" pitchFamily="34" charset="0"/>
-                <a:ea typeface="Calibri" pitchFamily="34" charset="-122"/>
-                <a:cs typeface="Calibri" pitchFamily="34" charset="-120"/>
+                <a:latin typeface="Georgia" panose="02040502050405020303" pitchFamily="18" charset="0"/>
+                <a:ea typeface="Calibri" pitchFamily="34" charset="-122"/>
+                <a:cs typeface="Calibri" pitchFamily="34" charset="-120"/>
+              </a:rPr>
+              <a:t> •  </a:t>
+            </a:r>
+            <a:r>
+              <a:rPr kumimoji="0" lang="en-US" altLang="en-US" sz="1050" b="0" i="0" u="none" strike="noStrike" cap="none" normalizeH="0" baseline="0" dirty="0">
+                <a:ln>
+                  <a:noFill/>
+                </a:ln>
+                <a:solidFill>
+                  <a:schemeClr val="tx1"/>
+                </a:solidFill>
+                <a:effectLst/>
+                <a:latin typeface="Georgia" panose="02040502050405020303" pitchFamily="18" charset="0"/>
+              </a:rPr>
+              <a:t>El </a:t>
+            </a:r>
+            <a:r>
+              <a:rPr kumimoji="0" lang="en-US" altLang="en-US" sz="1050" b="0" i="0" u="none" strike="noStrike" cap="none" normalizeH="0" baseline="0" dirty="0" err="1">
+                <a:ln>
+                  <a:noFill/>
+                </a:ln>
+                <a:solidFill>
+                  <a:schemeClr val="tx1"/>
+                </a:solidFill>
+                <a:effectLst/>
+                <a:latin typeface="Georgia" panose="02040502050405020303" pitchFamily="18" charset="0"/>
+              </a:rPr>
+              <a:t>tipo</a:t>
+            </a:r>
+            <a:r>
+              <a:rPr kumimoji="0" lang="en-US" altLang="en-US" sz="1050" b="0" i="0" u="none" strike="noStrike" cap="none" normalizeH="0" baseline="0" dirty="0">
+                <a:ln>
+                  <a:noFill/>
+                </a:ln>
+                <a:solidFill>
+                  <a:schemeClr val="tx1"/>
+                </a:solidFill>
+                <a:effectLst/>
+                <a:latin typeface="Georgia" panose="02040502050405020303" pitchFamily="18" charset="0"/>
+              </a:rPr>
+              <a:t> de </a:t>
+            </a:r>
+            <a:r>
+              <a:rPr kumimoji="0" lang="en-US" altLang="en-US" sz="1050" b="0" i="0" u="none" strike="noStrike" cap="none" normalizeH="0" baseline="0" dirty="0" err="1">
+                <a:ln>
+                  <a:noFill/>
+                </a:ln>
+                <a:solidFill>
+                  <a:schemeClr val="tx1"/>
+                </a:solidFill>
+                <a:effectLst/>
+                <a:latin typeface="Georgia" panose="02040502050405020303" pitchFamily="18" charset="0"/>
+              </a:rPr>
+              <a:t>alojamiento</a:t>
+            </a:r>
+            <a:r>
+              <a:rPr kumimoji="0" lang="en-US" altLang="en-US" sz="1050" b="0" i="0" u="none" strike="noStrike" cap="none" normalizeH="0" baseline="0" dirty="0">
+                <a:ln>
+                  <a:noFill/>
+                </a:ln>
+                <a:solidFill>
+                  <a:schemeClr val="tx1"/>
+                </a:solidFill>
+                <a:effectLst/>
+                <a:latin typeface="Georgia" panose="02040502050405020303" pitchFamily="18" charset="0"/>
+              </a:rPr>
+              <a:t>, </a:t>
+            </a:r>
+            <a:r>
+              <a:rPr kumimoji="0" lang="en-US" altLang="en-US" sz="1050" b="0" i="0" u="none" strike="noStrike" cap="none" normalizeH="0" baseline="0" dirty="0" err="1">
+                <a:ln>
+                  <a:noFill/>
+                </a:ln>
+                <a:solidFill>
+                  <a:schemeClr val="tx1"/>
+                </a:solidFill>
+                <a:effectLst/>
+                <a:latin typeface="Georgia" panose="02040502050405020303" pitchFamily="18" charset="0"/>
+              </a:rPr>
+              <a:t>el</a:t>
+            </a:r>
+            <a:r>
+              <a:rPr kumimoji="0" lang="en-US" altLang="en-US" sz="1050" b="0" i="0" u="none" strike="noStrike" cap="none" normalizeH="0" baseline="0" dirty="0">
+                <a:ln>
+                  <a:noFill/>
+                </a:ln>
+                <a:solidFill>
+                  <a:schemeClr val="tx1"/>
+                </a:solidFill>
+                <a:effectLst/>
+                <a:latin typeface="Georgia" panose="02040502050405020303" pitchFamily="18" charset="0"/>
               </a:rPr>
               <a:t> </a:t>
             </a:r>
-            <a:endParaRPr lang="en-US" sz="1100" dirty="0"/>
-          </a:p>
-          <a:p>
-            <a:pPr marL="0" indent="0">
-              <a:spcAft>
-                <a:spcPts val="200"/>
-              </a:spcAft>
-              <a:buNone/>
-            </a:pPr>
-            <a:r>
-              <a:rPr lang="en-US" sz="1100" dirty="0">
+            <a:r>
+              <a:rPr kumimoji="0" lang="en-US" altLang="en-US" sz="1050" b="0" i="0" u="none" strike="noStrike" cap="none" normalizeH="0" baseline="0" dirty="0" err="1">
+                <a:ln>
+                  <a:noFill/>
+                </a:ln>
+                <a:solidFill>
+                  <a:schemeClr val="tx1"/>
+                </a:solidFill>
+                <a:effectLst/>
+                <a:latin typeface="Georgia" panose="02040502050405020303" pitchFamily="18" charset="0"/>
+              </a:rPr>
+              <a:t>número</a:t>
+            </a:r>
+            <a:r>
+              <a:rPr kumimoji="0" lang="en-US" altLang="en-US" sz="1050" b="0" i="0" u="none" strike="noStrike" cap="none" normalizeH="0" baseline="0" dirty="0">
+                <a:ln>
+                  <a:noFill/>
+                </a:ln>
+                <a:solidFill>
+                  <a:schemeClr val="tx1"/>
+                </a:solidFill>
+                <a:effectLst/>
+                <a:latin typeface="Georgia" panose="02040502050405020303" pitchFamily="18" charset="0"/>
+              </a:rPr>
+              <a:t> de </a:t>
+            </a:r>
+            <a:r>
+              <a:rPr kumimoji="0" lang="en-US" altLang="en-US" sz="1050" b="0" i="0" u="none" strike="noStrike" cap="none" normalizeH="0" baseline="0" dirty="0" err="1">
+                <a:ln>
+                  <a:noFill/>
+                </a:ln>
+                <a:solidFill>
+                  <a:schemeClr val="tx1"/>
+                </a:solidFill>
+                <a:effectLst/>
+                <a:latin typeface="Georgia" panose="02040502050405020303" pitchFamily="18" charset="0"/>
+              </a:rPr>
+              <a:t>huéspedes</a:t>
+            </a:r>
+            <a:r>
+              <a:rPr kumimoji="0" lang="en-US" altLang="en-US" sz="1050" b="0" i="0" u="none" strike="noStrike" cap="none" normalizeH="0" baseline="0" dirty="0">
+                <a:ln>
+                  <a:noFill/>
+                </a:ln>
+                <a:solidFill>
+                  <a:schemeClr val="tx1"/>
+                </a:solidFill>
+                <a:effectLst/>
+                <a:latin typeface="Georgia" panose="02040502050405020303" pitchFamily="18" charset="0"/>
+              </a:rPr>
+              <a:t>, </a:t>
+            </a:r>
+            <a:r>
+              <a:rPr kumimoji="0" lang="en-US" altLang="en-US" sz="1050" b="0" i="0" u="none" strike="noStrike" cap="none" normalizeH="0" baseline="0" dirty="0" err="1">
+                <a:ln>
+                  <a:noFill/>
+                </a:ln>
+                <a:solidFill>
+                  <a:schemeClr val="tx1"/>
+                </a:solidFill>
+                <a:effectLst/>
+                <a:latin typeface="Georgia" panose="02040502050405020303" pitchFamily="18" charset="0"/>
+              </a:rPr>
+              <a:t>el</a:t>
+            </a:r>
+            <a:r>
+              <a:rPr kumimoji="0" lang="en-US" altLang="en-US" sz="1050" b="0" i="0" u="none" strike="noStrike" cap="none" normalizeH="0" baseline="0" dirty="0">
+                <a:ln>
+                  <a:noFill/>
+                </a:ln>
+                <a:solidFill>
+                  <a:schemeClr val="tx1"/>
+                </a:solidFill>
+                <a:effectLst/>
+                <a:latin typeface="Georgia" panose="02040502050405020303" pitchFamily="18" charset="0"/>
+              </a:rPr>
+              <a:t> </a:t>
+            </a:r>
+            <a:r>
+              <a:rPr kumimoji="0" lang="en-US" altLang="en-US" sz="1050" b="0" i="0" u="none" strike="noStrike" cap="none" normalizeH="0" baseline="0" dirty="0" err="1">
+                <a:ln>
+                  <a:noFill/>
+                </a:ln>
+                <a:solidFill>
+                  <a:schemeClr val="tx1"/>
+                </a:solidFill>
+                <a:effectLst/>
+                <a:latin typeface="Georgia" panose="02040502050405020303" pitchFamily="18" charset="0"/>
+              </a:rPr>
+              <a:t>número</a:t>
+            </a:r>
+            <a:r>
+              <a:rPr kumimoji="0" lang="en-US" altLang="en-US" sz="1050" b="0" i="0" u="none" strike="noStrike" cap="none" normalizeH="0" baseline="0" dirty="0">
+                <a:ln>
+                  <a:noFill/>
+                </a:ln>
+                <a:solidFill>
+                  <a:schemeClr val="tx1"/>
+                </a:solidFill>
+                <a:effectLst/>
+                <a:latin typeface="Georgia" panose="02040502050405020303" pitchFamily="18" charset="0"/>
+              </a:rPr>
+              <a:t> de camas, los </a:t>
+            </a:r>
+            <a:r>
+              <a:rPr kumimoji="0" lang="en-US" altLang="en-US" sz="1050" b="0" i="0" u="none" strike="noStrike" cap="none" normalizeH="0" baseline="0" dirty="0" err="1">
+                <a:ln>
+                  <a:noFill/>
+                </a:ln>
+                <a:solidFill>
+                  <a:schemeClr val="tx1"/>
+                </a:solidFill>
+                <a:effectLst/>
+                <a:latin typeface="Georgia" panose="02040502050405020303" pitchFamily="18" charset="0"/>
+              </a:rPr>
+              <a:t>cuartos</a:t>
+            </a:r>
+            <a:r>
+              <a:rPr kumimoji="0" lang="en-US" altLang="en-US" sz="1050" b="0" i="0" u="none" strike="noStrike" cap="none" normalizeH="0" baseline="0" dirty="0">
+                <a:ln>
+                  <a:noFill/>
+                </a:ln>
+                <a:solidFill>
+                  <a:schemeClr val="tx1"/>
+                </a:solidFill>
+                <a:effectLst/>
+                <a:latin typeface="Georgia" panose="02040502050405020303" pitchFamily="18" charset="0"/>
+              </a:rPr>
+              <a:t> de </a:t>
+            </a:r>
+            <a:r>
+              <a:rPr kumimoji="0" lang="en-US" altLang="en-US" sz="1050" b="0" i="0" u="none" strike="noStrike" cap="none" normalizeH="0" baseline="0" dirty="0" err="1">
+                <a:ln>
+                  <a:noFill/>
+                </a:ln>
+                <a:solidFill>
+                  <a:schemeClr val="tx1"/>
+                </a:solidFill>
+                <a:effectLst/>
+                <a:latin typeface="Georgia" panose="02040502050405020303" pitchFamily="18" charset="0"/>
+              </a:rPr>
+              <a:t>baño</a:t>
+            </a:r>
+            <a:r>
+              <a:rPr kumimoji="0" lang="en-US" altLang="en-US" sz="1050" b="0" i="0" u="none" strike="noStrike" cap="none" normalizeH="0" baseline="0" dirty="0">
+                <a:ln>
+                  <a:noFill/>
+                </a:ln>
+                <a:solidFill>
+                  <a:schemeClr val="tx1"/>
+                </a:solidFill>
+                <a:effectLst/>
+                <a:latin typeface="Georgia" panose="02040502050405020303" pitchFamily="18" charset="0"/>
+              </a:rPr>
+              <a:t>, los </a:t>
+            </a:r>
+            <a:r>
+              <a:rPr kumimoji="0" lang="en-US" altLang="en-US" sz="1050" b="0" i="0" u="none" strike="noStrike" cap="none" normalizeH="0" baseline="0" dirty="0" err="1">
+                <a:ln>
+                  <a:noFill/>
+                </a:ln>
+                <a:solidFill>
+                  <a:schemeClr val="tx1"/>
+                </a:solidFill>
+                <a:effectLst/>
+                <a:latin typeface="Georgia" panose="02040502050405020303" pitchFamily="18" charset="0"/>
+              </a:rPr>
+              <a:t>dormitorios</a:t>
+            </a:r>
+            <a:r>
+              <a:rPr kumimoji="0" lang="en-US" altLang="en-US" sz="1050" b="0" i="0" u="none" strike="noStrike" cap="none" normalizeH="0" baseline="0" dirty="0">
+                <a:ln>
+                  <a:noFill/>
+                </a:ln>
+                <a:solidFill>
+                  <a:schemeClr val="tx1"/>
+                </a:solidFill>
+                <a:effectLst/>
+                <a:latin typeface="Georgia" panose="02040502050405020303" pitchFamily="18" charset="0"/>
+              </a:rPr>
+              <a:t> y </a:t>
+            </a:r>
+            <a:r>
+              <a:rPr kumimoji="0" lang="en-US" altLang="en-US" sz="1050" b="0" i="0" u="none" strike="noStrike" cap="none" normalizeH="0" baseline="0" dirty="0" err="1">
+                <a:ln>
+                  <a:noFill/>
+                </a:ln>
+                <a:solidFill>
+                  <a:schemeClr val="tx1"/>
+                </a:solidFill>
+                <a:effectLst/>
+                <a:latin typeface="Georgia" panose="02040502050405020303" pitchFamily="18" charset="0"/>
+              </a:rPr>
+              <a:t>el</a:t>
+            </a:r>
+            <a:r>
+              <a:rPr kumimoji="0" lang="en-US" altLang="en-US" sz="1050" b="0" i="0" u="none" strike="noStrike" cap="none" normalizeH="0" baseline="0" dirty="0">
+                <a:ln>
+                  <a:noFill/>
+                </a:ln>
+                <a:solidFill>
+                  <a:schemeClr val="tx1"/>
+                </a:solidFill>
+                <a:effectLst/>
+                <a:latin typeface="Georgia" panose="02040502050405020303" pitchFamily="18" charset="0"/>
+              </a:rPr>
+              <a:t> </a:t>
+            </a:r>
+            <a:r>
+              <a:rPr kumimoji="0" lang="en-US" altLang="en-US" sz="1050" b="0" i="0" u="none" strike="noStrike" cap="none" normalizeH="0" baseline="0" dirty="0" err="1">
+                <a:ln>
+                  <a:noFill/>
+                </a:ln>
+                <a:solidFill>
+                  <a:schemeClr val="tx1"/>
+                </a:solidFill>
+                <a:effectLst/>
+                <a:latin typeface="Georgia" panose="02040502050405020303" pitchFamily="18" charset="0"/>
+              </a:rPr>
+              <a:t>nivel</a:t>
+            </a:r>
+            <a:r>
+              <a:rPr kumimoji="0" lang="en-US" altLang="en-US" sz="1050" b="0" i="0" u="none" strike="noStrike" cap="none" normalizeH="0" baseline="0" dirty="0">
+                <a:ln>
+                  <a:noFill/>
+                </a:ln>
+                <a:solidFill>
+                  <a:schemeClr val="tx1"/>
+                </a:solidFill>
+                <a:effectLst/>
+                <a:latin typeface="Georgia" panose="02040502050405020303" pitchFamily="18" charset="0"/>
+              </a:rPr>
+              <a:t> de </a:t>
+            </a:r>
+            <a:r>
+              <a:rPr kumimoji="0" lang="en-US" altLang="en-US" sz="1050" b="0" i="0" u="none" strike="noStrike" cap="none" normalizeH="0" baseline="0" dirty="0" err="1">
+                <a:ln>
+                  <a:noFill/>
+                </a:ln>
+                <a:solidFill>
+                  <a:schemeClr val="tx1"/>
+                </a:solidFill>
+                <a:effectLst/>
+                <a:latin typeface="Georgia" panose="02040502050405020303" pitchFamily="18" charset="0"/>
+              </a:rPr>
+              <a:t>ocupación</a:t>
+            </a:r>
+            <a:r>
+              <a:rPr kumimoji="0" lang="en-US" altLang="en-US" sz="1050" b="0" i="0" u="none" strike="noStrike" cap="none" normalizeH="0" baseline="0" dirty="0">
+                <a:ln>
+                  <a:noFill/>
+                </a:ln>
+                <a:solidFill>
+                  <a:schemeClr val="tx1"/>
+                </a:solidFill>
+                <a:effectLst/>
+                <a:latin typeface="Georgia" panose="02040502050405020303" pitchFamily="18" charset="0"/>
+              </a:rPr>
+              <a:t> </a:t>
+            </a:r>
+            <a:r>
+              <a:rPr kumimoji="0" lang="en-US" altLang="en-US" sz="1050" b="0" i="0" u="none" strike="noStrike" cap="none" normalizeH="0" baseline="0" dirty="0" err="1">
+                <a:ln>
+                  <a:noFill/>
+                </a:ln>
+                <a:solidFill>
+                  <a:schemeClr val="tx1"/>
+                </a:solidFill>
+                <a:effectLst/>
+                <a:latin typeface="Georgia" panose="02040502050405020303" pitchFamily="18" charset="0"/>
+              </a:rPr>
+              <a:t>anual</a:t>
+            </a:r>
+            <a:r>
+              <a:rPr kumimoji="0" lang="en-US" altLang="en-US" sz="1050" b="0" i="0" u="none" strike="noStrike" cap="none" normalizeH="0" baseline="0" dirty="0">
+                <a:ln>
+                  <a:noFill/>
+                </a:ln>
+                <a:solidFill>
+                  <a:schemeClr val="tx1"/>
+                </a:solidFill>
+                <a:effectLst/>
+                <a:latin typeface="Georgia" panose="02040502050405020303" pitchFamily="18" charset="0"/>
+              </a:rPr>
+              <a:t> son los </a:t>
+            </a:r>
+            <a:r>
+              <a:rPr kumimoji="0" lang="en-US" altLang="en-US" sz="1050" b="1" i="1" u="none" strike="noStrike" cap="none" normalizeH="0" baseline="0" dirty="0" err="1">
+                <a:ln>
+                  <a:noFill/>
+                </a:ln>
+                <a:solidFill>
+                  <a:schemeClr val="tx1"/>
+                </a:solidFill>
+                <a:effectLst/>
+                <a:latin typeface="Georgia" panose="02040502050405020303" pitchFamily="18" charset="0"/>
+              </a:rPr>
+              <a:t>factores</a:t>
+            </a:r>
+            <a:r>
+              <a:rPr kumimoji="0" lang="en-US" altLang="en-US" sz="1050" b="1" i="1" u="none" strike="noStrike" cap="none" normalizeH="0" baseline="0" dirty="0">
+                <a:ln>
+                  <a:noFill/>
+                </a:ln>
+                <a:solidFill>
+                  <a:schemeClr val="tx1"/>
+                </a:solidFill>
+                <a:effectLst/>
+                <a:latin typeface="Georgia" panose="02040502050405020303" pitchFamily="18" charset="0"/>
+              </a:rPr>
+              <a:t> que </a:t>
+            </a:r>
+            <a:r>
+              <a:rPr kumimoji="0" lang="en-US" altLang="en-US" sz="1050" b="1" i="1" u="none" strike="noStrike" cap="none" normalizeH="0" baseline="0" dirty="0" err="1">
+                <a:ln>
+                  <a:noFill/>
+                </a:ln>
+                <a:solidFill>
+                  <a:schemeClr val="tx1"/>
+                </a:solidFill>
+                <a:effectLst/>
+                <a:latin typeface="Georgia" panose="02040502050405020303" pitchFamily="18" charset="0"/>
+              </a:rPr>
+              <a:t>más</a:t>
+            </a:r>
+            <a:r>
+              <a:rPr kumimoji="0" lang="en-US" altLang="en-US" sz="1050" b="1" i="1" u="none" strike="noStrike" cap="none" normalizeH="0" baseline="0" dirty="0">
+                <a:ln>
+                  <a:noFill/>
+                </a:ln>
+                <a:solidFill>
+                  <a:schemeClr val="tx1"/>
+                </a:solidFill>
+                <a:effectLst/>
+                <a:latin typeface="Georgia" panose="02040502050405020303" pitchFamily="18" charset="0"/>
+              </a:rPr>
+              <a:t> </a:t>
+            </a:r>
+            <a:r>
+              <a:rPr kumimoji="0" lang="en-US" altLang="en-US" sz="1050" b="1" i="1" u="none" strike="noStrike" cap="none" normalizeH="0" baseline="0" dirty="0" err="1">
+                <a:ln>
+                  <a:noFill/>
+                </a:ln>
+                <a:solidFill>
+                  <a:schemeClr val="tx1"/>
+                </a:solidFill>
+                <a:effectLst/>
+                <a:latin typeface="Georgia" panose="02040502050405020303" pitchFamily="18" charset="0"/>
+              </a:rPr>
+              <a:t>influyen</a:t>
+            </a:r>
+            <a:r>
+              <a:rPr kumimoji="0" lang="en-US" altLang="en-US" sz="1050" b="1" i="1" u="none" strike="noStrike" cap="none" normalizeH="0" baseline="0" dirty="0">
+                <a:ln>
+                  <a:noFill/>
+                </a:ln>
+                <a:solidFill>
+                  <a:schemeClr val="tx1"/>
+                </a:solidFill>
+                <a:effectLst/>
+                <a:latin typeface="Georgia" panose="02040502050405020303" pitchFamily="18" charset="0"/>
+              </a:rPr>
+              <a:t> </a:t>
+            </a:r>
+            <a:r>
+              <a:rPr kumimoji="0" lang="en-US" altLang="en-US" sz="1050" b="0" i="0" u="none" strike="noStrike" cap="none" normalizeH="0" baseline="0" dirty="0" err="1">
+                <a:ln>
+                  <a:noFill/>
+                </a:ln>
+                <a:solidFill>
+                  <a:schemeClr val="tx1"/>
+                </a:solidFill>
+                <a:effectLst/>
+                <a:latin typeface="Georgia" panose="02040502050405020303" pitchFamily="18" charset="0"/>
+              </a:rPr>
+              <a:t>en</a:t>
+            </a:r>
+            <a:r>
+              <a:rPr kumimoji="0" lang="en-US" altLang="en-US" sz="1050" b="0" i="0" u="none" strike="noStrike" cap="none" normalizeH="0" baseline="0" dirty="0">
+                <a:ln>
+                  <a:noFill/>
+                </a:ln>
+                <a:solidFill>
+                  <a:schemeClr val="tx1"/>
+                </a:solidFill>
+                <a:effectLst/>
+                <a:latin typeface="Georgia" panose="02040502050405020303" pitchFamily="18" charset="0"/>
+              </a:rPr>
+              <a:t> la </a:t>
+            </a:r>
+            <a:r>
+              <a:rPr kumimoji="0" lang="en-US" altLang="en-US" sz="1050" b="0" i="0" u="none" strike="noStrike" cap="none" normalizeH="0" baseline="0" dirty="0" err="1">
+                <a:ln>
+                  <a:noFill/>
+                </a:ln>
+                <a:solidFill>
+                  <a:schemeClr val="tx1"/>
+                </a:solidFill>
+                <a:effectLst/>
+                <a:latin typeface="Georgia" panose="02040502050405020303" pitchFamily="18" charset="0"/>
+              </a:rPr>
+              <a:t>fijación</a:t>
+            </a:r>
+            <a:r>
+              <a:rPr kumimoji="0" lang="en-US" altLang="en-US" sz="1050" b="0" i="0" u="none" strike="noStrike" cap="none" normalizeH="0" baseline="0" dirty="0">
+                <a:ln>
+                  <a:noFill/>
+                </a:ln>
+                <a:solidFill>
+                  <a:schemeClr val="tx1"/>
+                </a:solidFill>
+                <a:effectLst/>
+                <a:latin typeface="Georgia" panose="02040502050405020303" pitchFamily="18" charset="0"/>
+              </a:rPr>
+              <a:t> de </a:t>
+            </a:r>
+            <a:r>
+              <a:rPr kumimoji="0" lang="en-US" altLang="en-US" sz="1050" b="1" i="1" u="none" strike="noStrike" cap="none" normalizeH="0" baseline="0" dirty="0" err="1">
+                <a:ln>
+                  <a:noFill/>
+                </a:ln>
+                <a:solidFill>
+                  <a:schemeClr val="tx1"/>
+                </a:solidFill>
+                <a:effectLst/>
+                <a:latin typeface="Georgia" panose="02040502050405020303" pitchFamily="18" charset="0"/>
+              </a:rPr>
+              <a:t>precios</a:t>
+            </a:r>
+            <a:r>
+              <a:rPr kumimoji="0" lang="en-US" altLang="en-US" sz="1050" b="0" i="0" u="none" strike="noStrike" cap="none" normalizeH="0" baseline="0" dirty="0">
+                <a:ln>
+                  <a:noFill/>
+                </a:ln>
+                <a:solidFill>
+                  <a:schemeClr val="tx1"/>
+                </a:solidFill>
+                <a:effectLst/>
+                <a:latin typeface="Georgia" panose="02040502050405020303" pitchFamily="18" charset="0"/>
+              </a:rPr>
+              <a:t> y </a:t>
+            </a:r>
+            <a:r>
+              <a:rPr kumimoji="0" lang="en-US" altLang="en-US" sz="1050" b="0" i="0" u="none" strike="noStrike" cap="none" normalizeH="0" baseline="0" dirty="0" err="1">
+                <a:ln>
+                  <a:noFill/>
+                </a:ln>
+                <a:solidFill>
+                  <a:schemeClr val="tx1"/>
+                </a:solidFill>
+                <a:effectLst/>
+                <a:latin typeface="Georgia" panose="02040502050405020303" pitchFamily="18" charset="0"/>
+              </a:rPr>
+              <a:t>permiten</a:t>
+            </a:r>
+            <a:r>
+              <a:rPr kumimoji="0" lang="en-US" altLang="en-US" sz="1050" b="0" i="0" u="none" strike="noStrike" cap="none" normalizeH="0" baseline="0" dirty="0">
+                <a:ln>
+                  <a:noFill/>
+                </a:ln>
+                <a:solidFill>
+                  <a:schemeClr val="tx1"/>
+                </a:solidFill>
+                <a:effectLst/>
+                <a:latin typeface="Georgia" panose="02040502050405020303" pitchFamily="18" charset="0"/>
+              </a:rPr>
+              <a:t> la </a:t>
+            </a:r>
+            <a:r>
+              <a:rPr kumimoji="0" lang="en-US" altLang="en-US" sz="1050" b="0" i="0" u="none" strike="noStrike" cap="none" normalizeH="0" baseline="0" dirty="0" err="1">
+                <a:ln>
+                  <a:noFill/>
+                </a:ln>
+                <a:solidFill>
+                  <a:schemeClr val="tx1"/>
+                </a:solidFill>
+                <a:effectLst/>
+                <a:latin typeface="Georgia" panose="02040502050405020303" pitchFamily="18" charset="0"/>
+              </a:rPr>
+              <a:t>segmentación</a:t>
+            </a:r>
+            <a:r>
+              <a:rPr lang="en-US" sz="1050" dirty="0">
                 <a:solidFill>
                   <a:srgbClr val="1E293B"/>
                 </a:solidFill>
-                <a:latin typeface="Calibri" pitchFamily="34" charset="0"/>
-                <a:ea typeface="Calibri" pitchFamily="34" charset="-122"/>
-                <a:cs typeface="Calibri" pitchFamily="34" charset="-120"/>
-              </a:rPr>
-              <a:t>•  Las decisiones de precio y de inventario deben tomarse de forma coordinada: oferta y demanda son dos caras de la misma cartera.</a:t>
-            </a:r>
-            <a:endParaRPr lang="en-US" sz="1100" dirty="0"/>
+                <a:latin typeface="Georgia" panose="02040502050405020303" pitchFamily="18" charset="0"/>
+                <a:ea typeface="Calibri" pitchFamily="34" charset="-122"/>
+                <a:cs typeface="Calibri" pitchFamily="34" charset="-120"/>
+              </a:rPr>
+              <a:t> </a:t>
+            </a:r>
+            <a:endParaRPr lang="en-US" sz="1050" dirty="0">
+              <a:latin typeface="Georgia" panose="02040502050405020303" pitchFamily="18" charset="0"/>
+            </a:endParaRPr>
           </a:p>
         </p:txBody>
       </p:sp>
@@ -9072,7 +12228,7 @@
         <p:spPr>
           <a:xfrm>
             <a:off x="3291840" y="1371600"/>
-            <a:ext cx="2697480" cy="3291840"/>
+            <a:ext cx="2697480" cy="3604260"/>
           </a:xfrm>
           <a:prstGeom prst="roundRect">
             <a:avLst>
@@ -9132,7 +12288,7 @@
         </p:nvSpPr>
         <p:spPr>
           <a:xfrm>
-            <a:off x="3520440" y="1600200"/>
+            <a:off x="3520440" y="1551543"/>
             <a:ext cx="2240280" cy="320040"/>
           </a:xfrm>
           <a:prstGeom prst="rect">
@@ -9153,13 +12309,15 @@
                 <a:solidFill>
                   <a:srgbClr val="1E3A5F"/>
                 </a:solidFill>
-                <a:latin typeface="Calibri" pitchFamily="34" charset="0"/>
+                <a:latin typeface="Georgia" panose="02040502050405020303" pitchFamily="18" charset="0"/>
                 <a:ea typeface="Calibri" pitchFamily="34" charset="-122"/>
                 <a:cs typeface="Calibri" pitchFamily="34" charset="-120"/>
               </a:rPr>
               <a:t>LIMITACIONES DEL ANÁLISIS</a:t>
             </a:r>
-            <a:endParaRPr lang="en-US" sz="1100" dirty="0"/>
+            <a:endParaRPr lang="en-US" sz="1100" dirty="0">
+              <a:latin typeface="Georgia" panose="02040502050405020303" pitchFamily="18" charset="0"/>
+            </a:endParaRPr>
           </a:p>
         </p:txBody>
       </p:sp>
@@ -9171,8 +12329,8 @@
         </p:nvSpPr>
         <p:spPr>
           <a:xfrm>
-            <a:off x="3520440" y="2011680"/>
-            <a:ext cx="2240280" cy="2514600"/>
+            <a:off x="3520440" y="1978374"/>
+            <a:ext cx="2240280" cy="2857500"/>
           </a:xfrm>
           <a:prstGeom prst="rect">
             <a:avLst/>
@@ -9191,17 +12349,261 @@
               <a:buNone/>
             </a:pPr>
             <a:r>
-              <a:rPr lang="en-US" sz="1100" dirty="0">
+              <a:rPr lang="en-US" sz="1050" dirty="0">
                 <a:solidFill>
                   <a:srgbClr val="1E293B"/>
                 </a:solidFill>
-                <a:latin typeface="Calibri" pitchFamily="34" charset="0"/>
-                <a:ea typeface="Calibri" pitchFamily="34" charset="-122"/>
-                <a:cs typeface="Calibri" pitchFamily="34" charset="-120"/>
-              </a:rPr>
-              <a:t>•  El dataset es una fotografía estática (insert_date): no permite estudiar estacionalidad ni evolución temporal real.</a:t>
-            </a:r>
-            <a:endParaRPr lang="en-US" sz="1100" dirty="0"/>
+                <a:latin typeface="Georgia" panose="02040502050405020303" pitchFamily="18" charset="0"/>
+                <a:ea typeface="Calibri" pitchFamily="34" charset="-122"/>
+                <a:cs typeface="Calibri" pitchFamily="34" charset="-120"/>
+              </a:rPr>
+              <a:t>•  El dataset es my </a:t>
+            </a:r>
+            <a:r>
+              <a:rPr lang="en-US" sz="1050" b="1" i="1" dirty="0" err="1">
+                <a:solidFill>
+                  <a:srgbClr val="1E293B"/>
+                </a:solidFill>
+                <a:latin typeface="Georgia" panose="02040502050405020303" pitchFamily="18" charset="0"/>
+                <a:ea typeface="Calibri" pitchFamily="34" charset="-122"/>
+                <a:cs typeface="Calibri" pitchFamily="34" charset="-120"/>
+              </a:rPr>
+              <a:t>sesgado</a:t>
+            </a:r>
+            <a:r>
+              <a:rPr lang="en-US" sz="1050" dirty="0">
+                <a:solidFill>
+                  <a:srgbClr val="1E293B"/>
+                </a:solidFill>
+                <a:latin typeface="Georgia" panose="02040502050405020303" pitchFamily="18" charset="0"/>
+                <a:ea typeface="Calibri" pitchFamily="34" charset="-122"/>
+                <a:cs typeface="Calibri" pitchFamily="34" charset="-120"/>
+              </a:rPr>
+              <a:t> por </a:t>
+            </a:r>
+            <a:r>
+              <a:rPr lang="en-US" sz="1050" dirty="0" err="1">
+                <a:solidFill>
+                  <a:srgbClr val="1E293B"/>
+                </a:solidFill>
+                <a:latin typeface="Georgia" panose="02040502050405020303" pitchFamily="18" charset="0"/>
+                <a:ea typeface="Calibri" pitchFamily="34" charset="-122"/>
+                <a:cs typeface="Calibri" pitchFamily="34" charset="-120"/>
+              </a:rPr>
+              <a:t>el</a:t>
+            </a:r>
+            <a:r>
+              <a:rPr lang="en-US" sz="1050" dirty="0">
+                <a:solidFill>
+                  <a:srgbClr val="1E293B"/>
+                </a:solidFill>
+                <a:latin typeface="Georgia" panose="02040502050405020303" pitchFamily="18" charset="0"/>
+                <a:ea typeface="Calibri" pitchFamily="34" charset="-122"/>
+                <a:cs typeface="Calibri" pitchFamily="34" charset="-120"/>
+              </a:rPr>
+              <a:t> </a:t>
+            </a:r>
+            <a:r>
+              <a:rPr lang="en-US" sz="1050" dirty="0" err="1">
+                <a:solidFill>
+                  <a:srgbClr val="1E293B"/>
+                </a:solidFill>
+                <a:latin typeface="Georgia" panose="02040502050405020303" pitchFamily="18" charset="0"/>
+                <a:ea typeface="Calibri" pitchFamily="34" charset="-122"/>
+                <a:cs typeface="Calibri" pitchFamily="34" charset="-120"/>
+              </a:rPr>
+              <a:t>parametro</a:t>
+            </a:r>
+            <a:r>
+              <a:rPr lang="en-US" sz="1050" dirty="0">
+                <a:solidFill>
+                  <a:srgbClr val="1E293B"/>
+                </a:solidFill>
+                <a:latin typeface="Georgia" panose="02040502050405020303" pitchFamily="18" charset="0"/>
+                <a:ea typeface="Calibri" pitchFamily="34" charset="-122"/>
+                <a:cs typeface="Calibri" pitchFamily="34" charset="-120"/>
+              </a:rPr>
+              <a:t> ‘</a:t>
+            </a:r>
+            <a:r>
+              <a:rPr lang="en-US" sz="1050" dirty="0" err="1">
+                <a:solidFill>
+                  <a:srgbClr val="1E293B"/>
+                </a:solidFill>
+                <a:latin typeface="Georgia" panose="02040502050405020303" pitchFamily="18" charset="0"/>
+                <a:ea typeface="Calibri" pitchFamily="34" charset="-122"/>
+                <a:cs typeface="Calibri" pitchFamily="34" charset="-120"/>
+              </a:rPr>
+              <a:t>insert_date</a:t>
+            </a:r>
+            <a:r>
+              <a:rPr lang="en-US" sz="1050" dirty="0">
+                <a:solidFill>
+                  <a:srgbClr val="1E293B"/>
+                </a:solidFill>
+                <a:latin typeface="Georgia" panose="02040502050405020303" pitchFamily="18" charset="0"/>
+                <a:ea typeface="Calibri" pitchFamily="34" charset="-122"/>
+                <a:cs typeface="Calibri" pitchFamily="34" charset="-120"/>
+              </a:rPr>
+              <a:t>’: es una </a:t>
+            </a:r>
+            <a:r>
+              <a:rPr lang="en-US" sz="1050" dirty="0" err="1">
+                <a:solidFill>
+                  <a:srgbClr val="1E293B"/>
+                </a:solidFill>
+                <a:latin typeface="Georgia" panose="02040502050405020303" pitchFamily="18" charset="0"/>
+                <a:ea typeface="Calibri" pitchFamily="34" charset="-122"/>
+                <a:cs typeface="Calibri" pitchFamily="34" charset="-120"/>
+              </a:rPr>
+              <a:t>fotografía</a:t>
+            </a:r>
+            <a:r>
+              <a:rPr lang="en-US" sz="1050" dirty="0">
+                <a:solidFill>
+                  <a:srgbClr val="1E293B"/>
+                </a:solidFill>
+                <a:latin typeface="Georgia" panose="02040502050405020303" pitchFamily="18" charset="0"/>
+                <a:ea typeface="Calibri" pitchFamily="34" charset="-122"/>
+                <a:cs typeface="Calibri" pitchFamily="34" charset="-120"/>
+              </a:rPr>
+              <a:t> </a:t>
+            </a:r>
+            <a:r>
+              <a:rPr lang="en-US" sz="1050" dirty="0" err="1">
+                <a:solidFill>
+                  <a:srgbClr val="1E293B"/>
+                </a:solidFill>
+                <a:latin typeface="Georgia" panose="02040502050405020303" pitchFamily="18" charset="0"/>
+                <a:ea typeface="Calibri" pitchFamily="34" charset="-122"/>
+                <a:cs typeface="Calibri" pitchFamily="34" charset="-120"/>
+              </a:rPr>
+              <a:t>estática</a:t>
+            </a:r>
+            <a:r>
+              <a:rPr lang="en-US" sz="1050" dirty="0">
+                <a:solidFill>
+                  <a:srgbClr val="1E293B"/>
+                </a:solidFill>
+                <a:latin typeface="Georgia" panose="02040502050405020303" pitchFamily="18" charset="0"/>
+                <a:ea typeface="Calibri" pitchFamily="34" charset="-122"/>
+                <a:cs typeface="Calibri" pitchFamily="34" charset="-120"/>
+              </a:rPr>
+              <a:t> que no </a:t>
+            </a:r>
+            <a:r>
+              <a:rPr lang="en-US" sz="1050" dirty="0" err="1">
+                <a:solidFill>
+                  <a:srgbClr val="1E293B"/>
+                </a:solidFill>
+                <a:latin typeface="Georgia" panose="02040502050405020303" pitchFamily="18" charset="0"/>
+                <a:ea typeface="Calibri" pitchFamily="34" charset="-122"/>
+                <a:cs typeface="Calibri" pitchFamily="34" charset="-120"/>
+              </a:rPr>
+              <a:t>permite</a:t>
+            </a:r>
+            <a:r>
+              <a:rPr lang="en-US" sz="1050" dirty="0">
+                <a:solidFill>
+                  <a:srgbClr val="1E293B"/>
+                </a:solidFill>
+                <a:latin typeface="Georgia" panose="02040502050405020303" pitchFamily="18" charset="0"/>
+                <a:ea typeface="Calibri" pitchFamily="34" charset="-122"/>
+                <a:cs typeface="Calibri" pitchFamily="34" charset="-120"/>
+              </a:rPr>
+              <a:t> </a:t>
+            </a:r>
+            <a:r>
+              <a:rPr lang="en-US" sz="1050" dirty="0" err="1">
+                <a:solidFill>
+                  <a:srgbClr val="1E293B"/>
+                </a:solidFill>
+                <a:latin typeface="Georgia" panose="02040502050405020303" pitchFamily="18" charset="0"/>
+                <a:ea typeface="Calibri" pitchFamily="34" charset="-122"/>
+                <a:cs typeface="Calibri" pitchFamily="34" charset="-120"/>
+              </a:rPr>
+              <a:t>estudiar</a:t>
+            </a:r>
+            <a:r>
+              <a:rPr lang="en-US" sz="1050" dirty="0">
+                <a:solidFill>
+                  <a:srgbClr val="1E293B"/>
+                </a:solidFill>
+                <a:latin typeface="Georgia" panose="02040502050405020303" pitchFamily="18" charset="0"/>
+                <a:ea typeface="Calibri" pitchFamily="34" charset="-122"/>
+                <a:cs typeface="Calibri" pitchFamily="34" charset="-120"/>
+              </a:rPr>
+              <a:t> </a:t>
+            </a:r>
+            <a:r>
+              <a:rPr lang="en-US" sz="1050" dirty="0" err="1">
+                <a:solidFill>
+                  <a:srgbClr val="1E293B"/>
+                </a:solidFill>
+                <a:latin typeface="Georgia" panose="02040502050405020303" pitchFamily="18" charset="0"/>
+                <a:ea typeface="Calibri" pitchFamily="34" charset="-122"/>
+                <a:cs typeface="Calibri" pitchFamily="34" charset="-120"/>
+              </a:rPr>
+              <a:t>estacionalidad</a:t>
+            </a:r>
+            <a:r>
+              <a:rPr lang="en-US" sz="1050" dirty="0">
+                <a:solidFill>
+                  <a:srgbClr val="1E293B"/>
+                </a:solidFill>
+                <a:latin typeface="Georgia" panose="02040502050405020303" pitchFamily="18" charset="0"/>
+                <a:ea typeface="Calibri" pitchFamily="34" charset="-122"/>
+                <a:cs typeface="Calibri" pitchFamily="34" charset="-120"/>
+              </a:rPr>
+              <a:t> </a:t>
+            </a:r>
+            <a:r>
+              <a:rPr lang="en-US" sz="1050" dirty="0" err="1">
+                <a:solidFill>
+                  <a:srgbClr val="1E293B"/>
+                </a:solidFill>
+                <a:latin typeface="Georgia" panose="02040502050405020303" pitchFamily="18" charset="0"/>
+                <a:ea typeface="Calibri" pitchFamily="34" charset="-122"/>
+                <a:cs typeface="Calibri" pitchFamily="34" charset="-120"/>
+              </a:rPr>
+              <a:t>ni</a:t>
+            </a:r>
+            <a:r>
+              <a:rPr lang="en-US" sz="1050" dirty="0">
+                <a:solidFill>
+                  <a:srgbClr val="1E293B"/>
+                </a:solidFill>
+                <a:latin typeface="Georgia" panose="02040502050405020303" pitchFamily="18" charset="0"/>
+                <a:ea typeface="Calibri" pitchFamily="34" charset="-122"/>
+                <a:cs typeface="Calibri" pitchFamily="34" charset="-120"/>
+              </a:rPr>
+              <a:t> </a:t>
+            </a:r>
+            <a:r>
+              <a:rPr lang="en-US" sz="1050" dirty="0" err="1">
+                <a:solidFill>
+                  <a:srgbClr val="1E293B"/>
+                </a:solidFill>
+                <a:latin typeface="Georgia" panose="02040502050405020303" pitchFamily="18" charset="0"/>
+                <a:ea typeface="Calibri" pitchFamily="34" charset="-122"/>
+                <a:cs typeface="Calibri" pitchFamily="34" charset="-120"/>
+              </a:rPr>
+              <a:t>evolución</a:t>
+            </a:r>
+            <a:r>
+              <a:rPr lang="en-US" sz="1050" dirty="0">
+                <a:solidFill>
+                  <a:srgbClr val="1E293B"/>
+                </a:solidFill>
+                <a:latin typeface="Georgia" panose="02040502050405020303" pitchFamily="18" charset="0"/>
+                <a:ea typeface="Calibri" pitchFamily="34" charset="-122"/>
+                <a:cs typeface="Calibri" pitchFamily="34" charset="-120"/>
+              </a:rPr>
+              <a:t> temporal real.</a:t>
+            </a:r>
+            <a:endParaRPr lang="en-US" sz="1050" dirty="0">
+              <a:latin typeface="Georgia" panose="02040502050405020303" pitchFamily="18" charset="0"/>
+            </a:endParaRPr>
           </a:p>
           <a:p>
             <a:pPr marL="0" indent="0">
@@ -9211,17 +12613,184 @@
               <a:buNone/>
             </a:pPr>
             <a:r>
-              <a:rPr lang="en-US" sz="1100" dirty="0">
+              <a:rPr lang="en-US" sz="1050" dirty="0">
                 <a:solidFill>
                   <a:srgbClr val="1E293B"/>
                 </a:solidFill>
-                <a:latin typeface="Calibri" pitchFamily="34" charset="0"/>
+                <a:latin typeface="Georgia" panose="02040502050405020303" pitchFamily="18" charset="0"/>
+                <a:ea typeface="Calibri" pitchFamily="34" charset="-122"/>
+                <a:cs typeface="Calibri" pitchFamily="34" charset="-120"/>
+              </a:rPr>
+              <a:t> •  </a:t>
+            </a:r>
+            <a:r>
+              <a:rPr lang="en-US" sz="1050" b="1" i="1" dirty="0" err="1">
+                <a:solidFill>
+                  <a:srgbClr val="1E293B"/>
+                </a:solidFill>
+                <a:latin typeface="Georgia" panose="02040502050405020303" pitchFamily="18" charset="0"/>
+                <a:ea typeface="Calibri" pitchFamily="34" charset="-122"/>
+                <a:cs typeface="Calibri" pitchFamily="34" charset="-120"/>
+              </a:rPr>
+              <a:t>Disponibilidad</a:t>
+            </a:r>
+            <a:r>
+              <a:rPr lang="en-US" sz="1050" b="1" i="1" dirty="0">
+                <a:solidFill>
+                  <a:srgbClr val="1E293B"/>
+                </a:solidFill>
+                <a:latin typeface="Georgia" panose="02040502050405020303" pitchFamily="18" charset="0"/>
+                <a:ea typeface="Calibri" pitchFamily="34" charset="-122"/>
+                <a:cs typeface="Calibri" pitchFamily="34" charset="-120"/>
+              </a:rPr>
+              <a:t> ≠ </a:t>
+            </a:r>
+            <a:r>
+              <a:rPr lang="en-US" sz="1050" b="1" i="1" dirty="0" err="1">
+                <a:solidFill>
+                  <a:srgbClr val="1E293B"/>
+                </a:solidFill>
+                <a:latin typeface="Georgia" panose="02040502050405020303" pitchFamily="18" charset="0"/>
+                <a:ea typeface="Calibri" pitchFamily="34" charset="-122"/>
+                <a:cs typeface="Calibri" pitchFamily="34" charset="-120"/>
+              </a:rPr>
+              <a:t>ocupación</a:t>
+            </a:r>
+            <a:r>
+              <a:rPr lang="en-US" sz="1050" b="1" i="1" dirty="0">
+                <a:solidFill>
+                  <a:srgbClr val="1E293B"/>
+                </a:solidFill>
+                <a:latin typeface="Georgia" panose="02040502050405020303" pitchFamily="18" charset="0"/>
+                <a:ea typeface="Calibri" pitchFamily="34" charset="-122"/>
+                <a:cs typeface="Calibri" pitchFamily="34" charset="-120"/>
+              </a:rPr>
+              <a:t> real</a:t>
+            </a:r>
+            <a:r>
+              <a:rPr lang="en-US" sz="1050" dirty="0">
+                <a:solidFill>
+                  <a:srgbClr val="1E293B"/>
+                </a:solidFill>
+                <a:latin typeface="Georgia" panose="02040502050405020303" pitchFamily="18" charset="0"/>
+                <a:ea typeface="Calibri" pitchFamily="34" charset="-122"/>
+                <a:cs typeface="Calibri" pitchFamily="34" charset="-120"/>
+              </a:rPr>
+              <a:t>: un día "no disponible" </a:t>
+            </a:r>
+            <a:r>
+              <a:rPr lang="en-US" sz="1050" dirty="0" err="1">
+                <a:solidFill>
+                  <a:srgbClr val="1E293B"/>
+                </a:solidFill>
+                <a:latin typeface="Georgia" panose="02040502050405020303" pitchFamily="18" charset="0"/>
+                <a:ea typeface="Calibri" pitchFamily="34" charset="-122"/>
+                <a:cs typeface="Calibri" pitchFamily="34" charset="-120"/>
+              </a:rPr>
+              <a:t>puede</a:t>
+            </a:r>
+            <a:r>
+              <a:rPr lang="en-US" sz="1050" dirty="0">
+                <a:solidFill>
+                  <a:srgbClr val="1E293B"/>
+                </a:solidFill>
+                <a:latin typeface="Georgia" panose="02040502050405020303" pitchFamily="18" charset="0"/>
+                <a:ea typeface="Calibri" pitchFamily="34" charset="-122"/>
+                <a:cs typeface="Calibri" pitchFamily="34" charset="-120"/>
+              </a:rPr>
+              <a:t> ser una </a:t>
+            </a:r>
+            <a:r>
+              <a:rPr lang="en-US" sz="1050" dirty="0" err="1">
+                <a:solidFill>
+                  <a:srgbClr val="1E293B"/>
+                </a:solidFill>
+                <a:latin typeface="Georgia" panose="02040502050405020303" pitchFamily="18" charset="0"/>
+                <a:ea typeface="Calibri" pitchFamily="34" charset="-122"/>
+                <a:cs typeface="Calibri" pitchFamily="34" charset="-120"/>
+              </a:rPr>
+              <a:t>reserva</a:t>
+            </a:r>
+            <a:r>
+              <a:rPr lang="en-US" sz="1050" dirty="0">
+                <a:solidFill>
+                  <a:srgbClr val="1E293B"/>
+                </a:solidFill>
+                <a:latin typeface="Georgia" panose="02040502050405020303" pitchFamily="18" charset="0"/>
+                <a:ea typeface="Calibri" pitchFamily="34" charset="-122"/>
+                <a:cs typeface="Calibri" pitchFamily="34" charset="-120"/>
+              </a:rPr>
+              <a:t> o un </a:t>
+            </a:r>
+            <a:r>
+              <a:rPr lang="en-US" sz="1050" dirty="0" err="1">
+                <a:solidFill>
+                  <a:srgbClr val="1E293B"/>
+                </a:solidFill>
+                <a:latin typeface="Georgia" panose="02040502050405020303" pitchFamily="18" charset="0"/>
+                <a:ea typeface="Calibri" pitchFamily="34" charset="-122"/>
+                <a:cs typeface="Calibri" pitchFamily="34" charset="-120"/>
+              </a:rPr>
+              <a:t>bloqueo</a:t>
+            </a:r>
+            <a:r>
+              <a:rPr lang="en-US" sz="1050" dirty="0">
+                <a:solidFill>
+                  <a:srgbClr val="1E293B"/>
+                </a:solidFill>
+                <a:latin typeface="Georgia" panose="02040502050405020303" pitchFamily="18" charset="0"/>
                 <a:ea typeface="Calibri" pitchFamily="34" charset="-122"/>
                 <a:cs typeface="Calibri" pitchFamily="34" charset="-120"/>
               </a:rPr>
               <a:t> </a:t>
             </a:r>
-            <a:endParaRPr lang="en-US" sz="1100" dirty="0"/>
+            <a:r>
+              <a:rPr lang="en-US" sz="1050" dirty="0" err="1">
+                <a:solidFill>
+                  <a:srgbClr val="1E293B"/>
+                </a:solidFill>
+                <a:latin typeface="Georgia" panose="02040502050405020303" pitchFamily="18" charset="0"/>
+                <a:ea typeface="Calibri" pitchFamily="34" charset="-122"/>
+                <a:cs typeface="Calibri" pitchFamily="34" charset="-120"/>
+              </a:rPr>
+              <a:t>voluntario</a:t>
+            </a:r>
+            <a:r>
+              <a:rPr lang="en-US" sz="1050" dirty="0">
+                <a:solidFill>
+                  <a:srgbClr val="1E293B"/>
+                </a:solidFill>
+                <a:latin typeface="Georgia" panose="02040502050405020303" pitchFamily="18" charset="0"/>
+                <a:ea typeface="Calibri" pitchFamily="34" charset="-122"/>
+                <a:cs typeface="Calibri" pitchFamily="34" charset="-120"/>
+              </a:rPr>
+              <a:t> del </a:t>
+            </a:r>
+            <a:r>
+              <a:rPr lang="en-US" sz="1050" dirty="0" err="1">
+                <a:solidFill>
+                  <a:srgbClr val="1E293B"/>
+                </a:solidFill>
+                <a:latin typeface="Georgia" panose="02040502050405020303" pitchFamily="18" charset="0"/>
+                <a:ea typeface="Calibri" pitchFamily="34" charset="-122"/>
+                <a:cs typeface="Calibri" pitchFamily="34" charset="-120"/>
+              </a:rPr>
+              <a:t>propietario</a:t>
+            </a:r>
+            <a:r>
+              <a:rPr lang="en-US" sz="1050" dirty="0">
+                <a:solidFill>
+                  <a:srgbClr val="1E293B"/>
+                </a:solidFill>
+                <a:latin typeface="Georgia" panose="02040502050405020303" pitchFamily="18" charset="0"/>
+                <a:ea typeface="Calibri" pitchFamily="34" charset="-122"/>
+                <a:cs typeface="Calibri" pitchFamily="34" charset="-120"/>
+              </a:rPr>
+              <a:t>.</a:t>
+            </a:r>
+            <a:endParaRPr lang="en-US" sz="1050" dirty="0">
+              <a:latin typeface="Georgia" panose="02040502050405020303" pitchFamily="18" charset="0"/>
+            </a:endParaRPr>
           </a:p>
           <a:p>
             <a:pPr marL="0" indent="0">
@@ -9231,39 +12800,82 @@
               <a:buNone/>
             </a:pPr>
             <a:r>
-              <a:rPr lang="en-US" sz="1100" dirty="0">
+              <a:rPr lang="en-US" sz="1050" dirty="0">
                 <a:solidFill>
                   <a:srgbClr val="1E293B"/>
                 </a:solidFill>
-                <a:latin typeface="Calibri" pitchFamily="34" charset="0"/>
-                <a:ea typeface="Calibri" pitchFamily="34" charset="-122"/>
-                <a:cs typeface="Calibri" pitchFamily="34" charset="-120"/>
-              </a:rPr>
-              <a:t>•  Disponibilidad ≠ ocupación real: un día "no disponible" puede ser una reserva o un bloqueo voluntario del </a:t>
-            </a:r>
-            <a:r>
-              <a:rPr lang="en-US" sz="1100" dirty="0" err="1">
+                <a:latin typeface="Georgia" panose="02040502050405020303" pitchFamily="18" charset="0"/>
+                <a:ea typeface="Calibri" pitchFamily="34" charset="-122"/>
+                <a:cs typeface="Calibri" pitchFamily="34" charset="-120"/>
+              </a:rPr>
+              <a:t> • </a:t>
+            </a:r>
+            <a:r>
+              <a:rPr lang="es-ES" sz="1050" dirty="0">
                 <a:solidFill>
                   <a:srgbClr val="1E293B"/>
                 </a:solidFill>
-                <a:latin typeface="Calibri" pitchFamily="34" charset="0"/>
-                <a:ea typeface="Calibri" pitchFamily="34" charset="-122"/>
-                <a:cs typeface="Calibri" pitchFamily="34" charset="-120"/>
-              </a:rPr>
-              <a:t>propietario</a:t>
-            </a:r>
-            <a:r>
-              <a:rPr lang="en-US" sz="1100" dirty="0">
+                <a:latin typeface="Georgia" panose="02040502050405020303" pitchFamily="18" charset="0"/>
+                <a:ea typeface="Calibri" pitchFamily="34" charset="-122"/>
+                <a:cs typeface="Calibri" pitchFamily="34" charset="-120"/>
+              </a:rPr>
+              <a:t>La aplicación de herramientas estadísticas es </a:t>
+            </a:r>
+            <a:r>
+              <a:rPr lang="es-ES" sz="1050" b="1" i="1" dirty="0">
                 <a:solidFill>
                   <a:srgbClr val="1E293B"/>
                 </a:solidFill>
-                <a:latin typeface="Calibri" pitchFamily="34" charset="0"/>
+                <a:latin typeface="Georgia" panose="02040502050405020303" pitchFamily="18" charset="0"/>
+                <a:ea typeface="Calibri" pitchFamily="34" charset="-122"/>
+                <a:cs typeface="Calibri" pitchFamily="34" charset="-120"/>
+              </a:rPr>
+              <a:t>limitada</a:t>
+            </a:r>
+            <a:r>
+              <a:rPr lang="es-ES" sz="1050" dirty="0">
+                <a:solidFill>
+                  <a:srgbClr val="1E293B"/>
+                </a:solidFill>
+                <a:latin typeface="Georgia" panose="02040502050405020303" pitchFamily="18" charset="0"/>
+                <a:ea typeface="Calibri" pitchFamily="34" charset="-122"/>
+                <a:cs typeface="Calibri" pitchFamily="34" charset="-120"/>
+              </a:rPr>
+              <a:t> debido a la </a:t>
+            </a:r>
+            <a:r>
+              <a:rPr lang="es-ES" sz="1050" b="1" i="1" dirty="0">
+                <a:solidFill>
+                  <a:srgbClr val="1E293B"/>
+                </a:solidFill>
+                <a:latin typeface="Georgia" panose="02040502050405020303" pitchFamily="18" charset="0"/>
+                <a:ea typeface="Calibri" pitchFamily="34" charset="-122"/>
+                <a:cs typeface="Calibri" pitchFamily="34" charset="-120"/>
+              </a:rPr>
+              <a:t>distribución asimétrica</a:t>
+            </a:r>
+            <a:r>
+              <a:rPr lang="es-ES" sz="1050" dirty="0">
+                <a:solidFill>
+                  <a:srgbClr val="1E293B"/>
+                </a:solidFill>
+                <a:latin typeface="Georgia" panose="02040502050405020303" pitchFamily="18" charset="0"/>
+                <a:ea typeface="Calibri" pitchFamily="34" charset="-122"/>
+                <a:cs typeface="Calibri" pitchFamily="34" charset="-120"/>
+              </a:rPr>
+              <a:t> de la mayoría de los parámetros numéricos</a:t>
+            </a:r>
+            <a:r>
+              <a:rPr lang="en-US" sz="1050" dirty="0">
+                <a:solidFill>
+                  <a:srgbClr val="1E293B"/>
+                </a:solidFill>
+                <a:latin typeface="Georgia" panose="02040502050405020303" pitchFamily="18" charset="0"/>
                 <a:ea typeface="Calibri" pitchFamily="34" charset="-122"/>
                 <a:cs typeface="Calibri" pitchFamily="34" charset="-120"/>
               </a:rPr>
               <a:t>.</a:t>
             </a:r>
-            <a:endParaRPr lang="en-US" sz="1100" dirty="0"/>
           </a:p>
           <a:p>
             <a:pPr marL="0" indent="0">
@@ -9273,37 +12885,74 @@
               <a:buNone/>
             </a:pPr>
             <a:r>
-              <a:rPr lang="en-US" sz="1100" dirty="0">
+              <a:rPr lang="en-US" sz="1050" dirty="0">
                 <a:solidFill>
                   <a:srgbClr val="1E293B"/>
                 </a:solidFill>
-                <a:latin typeface="Calibri" pitchFamily="34" charset="0"/>
-                <a:ea typeface="Calibri" pitchFamily="34" charset="-122"/>
-                <a:cs typeface="Calibri" pitchFamily="34" charset="-120"/>
-              </a:rPr>
-              <a:t> </a:t>
-            </a:r>
-            <a:endParaRPr lang="en-US" sz="1100" dirty="0"/>
-          </a:p>
-          <a:p>
-            <a:pPr marL="0" indent="0">
-              <a:spcAft>
-                <a:spcPts val="200"/>
-              </a:spcAft>
-              <a:buNone/>
-            </a:pPr>
-            <a:r>
-              <a:rPr lang="en-US" sz="1100" dirty="0">
+                <a:latin typeface="Georgia" panose="02040502050405020303" pitchFamily="18" charset="0"/>
+                <a:ea typeface="Calibri" pitchFamily="34" charset="-122"/>
+                <a:cs typeface="Calibri" pitchFamily="34" charset="-120"/>
+              </a:rPr>
+              <a:t> • </a:t>
+            </a:r>
+            <a:r>
+              <a:rPr lang="es-ES" sz="1050" dirty="0">
                 <a:solidFill>
                   <a:srgbClr val="1E293B"/>
                 </a:solidFill>
-                <a:latin typeface="Calibri" pitchFamily="34" charset="0"/>
-                <a:ea typeface="Calibri" pitchFamily="34" charset="-122"/>
-                <a:cs typeface="Calibri" pitchFamily="34" charset="-120"/>
-              </a:rPr>
-              <a:t>•  Tamaños muestrales desiguales por ciudad (Menorca, Valencia, Málaga con poco volumen).</a:t>
-            </a:r>
-            <a:endParaRPr lang="en-US" sz="1100" dirty="0"/>
+                <a:latin typeface="Georgia" panose="02040502050405020303" pitchFamily="18" charset="0"/>
+                <a:ea typeface="Calibri" pitchFamily="34" charset="-122"/>
+                <a:cs typeface="Calibri" pitchFamily="34" charset="-120"/>
+              </a:rPr>
+              <a:t>La distribución geográfica produce </a:t>
+            </a:r>
+            <a:r>
+              <a:rPr lang="es-ES" sz="1050" b="1" i="1" dirty="0">
+                <a:solidFill>
+                  <a:srgbClr val="1E293B"/>
+                </a:solidFill>
+                <a:latin typeface="Georgia" panose="02040502050405020303" pitchFamily="18" charset="0"/>
+                <a:ea typeface="Calibri" pitchFamily="34" charset="-122"/>
+                <a:cs typeface="Calibri" pitchFamily="34" charset="-120"/>
+              </a:rPr>
+              <a:t>tamaños </a:t>
+            </a:r>
+            <a:r>
+              <a:rPr lang="es-ES" sz="1050" dirty="0">
+                <a:solidFill>
+                  <a:srgbClr val="1E293B"/>
+                </a:solidFill>
+                <a:latin typeface="Georgia" panose="02040502050405020303" pitchFamily="18" charset="0"/>
+                <a:ea typeface="Calibri" pitchFamily="34" charset="-122"/>
+                <a:cs typeface="Calibri" pitchFamily="34" charset="-120"/>
+              </a:rPr>
+              <a:t>de muestra </a:t>
+            </a:r>
+            <a:r>
+              <a:rPr lang="es-ES" sz="1050" b="1" i="1" dirty="0">
+                <a:solidFill>
+                  <a:srgbClr val="1E293B"/>
+                </a:solidFill>
+                <a:latin typeface="Georgia" panose="02040502050405020303" pitchFamily="18" charset="0"/>
+                <a:ea typeface="Calibri" pitchFamily="34" charset="-122"/>
+                <a:cs typeface="Calibri" pitchFamily="34" charset="-120"/>
+              </a:rPr>
+              <a:t>desiguales</a:t>
+            </a:r>
+            <a:r>
+              <a:rPr lang="es-ES" sz="1050" dirty="0">
+                <a:solidFill>
+                  <a:srgbClr val="1E293B"/>
+                </a:solidFill>
+                <a:latin typeface="Georgia" panose="02040502050405020303" pitchFamily="18" charset="0"/>
+                <a:ea typeface="Calibri" pitchFamily="34" charset="-122"/>
+                <a:cs typeface="Calibri" pitchFamily="34" charset="-120"/>
+              </a:rPr>
+              <a:t> en todo el mercado y no considera el efecto de vecindad</a:t>
+            </a:r>
+            <a:endParaRPr lang="en-US" sz="1050" dirty="0">
+              <a:latin typeface="Georgia" panose="02040502050405020303" pitchFamily="18" charset="0"/>
+            </a:endParaRPr>
           </a:p>
         </p:txBody>
       </p:sp>
@@ -9316,7 +12965,7 @@
         <p:spPr>
           <a:xfrm>
             <a:off x="6126480" y="1371600"/>
-            <a:ext cx="2697480" cy="3291840"/>
+            <a:ext cx="2697480" cy="3604260"/>
           </a:xfrm>
           <a:prstGeom prst="roundRect">
             <a:avLst>
@@ -9376,7 +13025,7 @@
         </p:nvSpPr>
         <p:spPr>
           <a:xfrm>
-            <a:off x="6355080" y="1600200"/>
+            <a:off x="6355080" y="1551543"/>
             <a:ext cx="2240280" cy="320040"/>
           </a:xfrm>
           <a:prstGeom prst="rect">
@@ -9397,13 +13046,15 @@
                 <a:solidFill>
                   <a:srgbClr val="1E3A5F"/>
                 </a:solidFill>
-                <a:latin typeface="Calibri" pitchFamily="34" charset="0"/>
+                <a:latin typeface="Georgia" panose="02040502050405020303" pitchFamily="18" charset="0"/>
                 <a:ea typeface="Calibri" pitchFamily="34" charset="-122"/>
                 <a:cs typeface="Calibri" pitchFamily="34" charset="-120"/>
               </a:rPr>
               <a:t>PRÓXIMOS PASOS</a:t>
             </a:r>
-            <a:endParaRPr lang="en-US" sz="1100" dirty="0"/>
+            <a:endParaRPr lang="en-US" sz="1100" dirty="0">
+              <a:latin typeface="Georgia" panose="02040502050405020303" pitchFamily="18" charset="0"/>
+            </a:endParaRPr>
           </a:p>
         </p:txBody>
       </p:sp>
@@ -9415,8 +13066,8 @@
         </p:nvSpPr>
         <p:spPr>
           <a:xfrm>
-            <a:off x="6355080" y="2011680"/>
-            <a:ext cx="2240280" cy="2514600"/>
+            <a:off x="6355080" y="1978374"/>
+            <a:ext cx="2240280" cy="2857500"/>
           </a:xfrm>
           <a:prstGeom prst="rect">
             <a:avLst/>
@@ -9435,17 +13086,19 @@
               <a:buNone/>
             </a:pPr>
             <a:r>
-              <a:rPr lang="en-US" sz="1100" dirty="0">
+              <a:rPr lang="en-US" sz="1050" u="sng" dirty="0">
                 <a:solidFill>
                   <a:srgbClr val="1E293B"/>
                 </a:solidFill>
-                <a:latin typeface="Calibri" pitchFamily="34" charset="0"/>
+                <a:latin typeface="Georgia" panose="02040502050405020303" pitchFamily="18" charset="0"/>
                 <a:ea typeface="Calibri" pitchFamily="34" charset="-122"/>
                 <a:cs typeface="Calibri" pitchFamily="34" charset="-120"/>
               </a:rPr>
               <a:t>Solicitar a IT/Sistemas:</a:t>
             </a:r>
-            <a:endParaRPr lang="en-US" sz="1100" dirty="0"/>
+            <a:endParaRPr lang="en-US" sz="1050" u="sng" dirty="0">
+              <a:latin typeface="Georgia" panose="02040502050405020303" pitchFamily="18" charset="0"/>
+            </a:endParaRPr>
           </a:p>
           <a:p>
             <a:pPr marL="0" indent="0">
@@ -9455,17 +13108,19 @@
               <a:buNone/>
             </a:pPr>
             <a:r>
-              <a:rPr lang="en-US" sz="1100" dirty="0">
+              <a:rPr lang="en-US" sz="1050" dirty="0">
                 <a:solidFill>
                   <a:srgbClr val="1E293B"/>
                 </a:solidFill>
-                <a:latin typeface="Calibri" pitchFamily="34" charset="0"/>
-                <a:ea typeface="Calibri" pitchFamily="34" charset="-122"/>
-                <a:cs typeface="Calibri" pitchFamily="34" charset="-120"/>
-              </a:rPr>
-              <a:t> </a:t>
-            </a:r>
-            <a:endParaRPr lang="en-US" sz="1100" dirty="0"/>
+                <a:latin typeface="Georgia" panose="02040502050405020303" pitchFamily="18" charset="0"/>
+                <a:ea typeface="Calibri" pitchFamily="34" charset="-122"/>
+                <a:cs typeface="Calibri" pitchFamily="34" charset="-120"/>
+              </a:rPr>
+              <a:t> •  Acceso a la tabla de reservas reales (distinguir ocupación de bloqueos).</a:t>
+            </a:r>
+            <a:endParaRPr lang="en-US" sz="1050" dirty="0">
+              <a:latin typeface="Georgia" panose="02040502050405020303" pitchFamily="18" charset="0"/>
+            </a:endParaRPr>
           </a:p>
           <a:p>
             <a:pPr marL="0" indent="0">
@@ -9475,17 +13130,19 @@
               <a:buNone/>
             </a:pPr>
             <a:r>
-              <a:rPr lang="en-US" sz="1100" dirty="0">
+              <a:rPr lang="en-US" sz="1050" dirty="0">
                 <a:solidFill>
                   <a:srgbClr val="1E293B"/>
                 </a:solidFill>
-                <a:latin typeface="Calibri" pitchFamily="34" charset="0"/>
-                <a:ea typeface="Calibri" pitchFamily="34" charset="-122"/>
-                <a:cs typeface="Calibri" pitchFamily="34" charset="-120"/>
-              </a:rPr>
-              <a:t>•  Acceso a la tabla de reservas reales (distinguir ocupación de bloqueos).</a:t>
-            </a:r>
-            <a:endParaRPr lang="en-US" sz="1100" dirty="0"/>
+                <a:latin typeface="Georgia" panose="02040502050405020303" pitchFamily="18" charset="0"/>
+                <a:ea typeface="Calibri" pitchFamily="34" charset="-122"/>
+                <a:cs typeface="Calibri" pitchFamily="34" charset="-120"/>
+              </a:rPr>
+              <a:t> •  Datos longitudinales (varias capturas en el tiempo) para estacionalidad.</a:t>
+            </a:r>
+            <a:endParaRPr lang="en-US" sz="1050" dirty="0">
+              <a:latin typeface="Georgia" panose="02040502050405020303" pitchFamily="18" charset="0"/>
+            </a:endParaRPr>
           </a:p>
           <a:p>
             <a:pPr marL="0" indent="0">
@@ -9495,17 +13152,38 @@
               <a:buNone/>
             </a:pPr>
             <a:r>
-              <a:rPr lang="en-US" sz="1100" dirty="0">
+              <a:rPr lang="en-US" sz="1050" dirty="0">
                 <a:solidFill>
                   <a:srgbClr val="1E293B"/>
                 </a:solidFill>
-                <a:latin typeface="Calibri" pitchFamily="34" charset="0"/>
-                <a:ea typeface="Calibri" pitchFamily="34" charset="-122"/>
-                <a:cs typeface="Calibri" pitchFamily="34" charset="-120"/>
-              </a:rPr>
-              <a:t> </a:t>
-            </a:r>
-            <a:endParaRPr lang="en-US" sz="1100" dirty="0"/>
+                <a:latin typeface="Georgia" panose="02040502050405020303" pitchFamily="18" charset="0"/>
+                <a:ea typeface="Calibri" pitchFamily="34" charset="-122"/>
+                <a:cs typeface="Calibri" pitchFamily="34" charset="-120"/>
+              </a:rPr>
+              <a:t> •  Métricas de actividad del anfitrión para identificar inventario activo vs. </a:t>
+            </a:r>
+            <a:r>
+              <a:rPr lang="en-US" sz="1050" dirty="0" err="1">
+                <a:solidFill>
+                  <a:srgbClr val="1E293B"/>
+                </a:solidFill>
+                <a:latin typeface="Georgia" panose="02040502050405020303" pitchFamily="18" charset="0"/>
+                <a:ea typeface="Calibri" pitchFamily="34" charset="-122"/>
+                <a:cs typeface="Calibri" pitchFamily="34" charset="-120"/>
+              </a:rPr>
+              <a:t>fantasma</a:t>
+            </a:r>
+            <a:r>
+              <a:rPr lang="en-US" sz="1050" dirty="0">
+                <a:solidFill>
+                  <a:srgbClr val="1E293B"/>
+                </a:solidFill>
+                <a:latin typeface="Georgia" panose="02040502050405020303" pitchFamily="18" charset="0"/>
+                <a:ea typeface="Calibri" pitchFamily="34" charset="-122"/>
+                <a:cs typeface="Calibri" pitchFamily="34" charset="-120"/>
+              </a:rPr>
+              <a:t>.</a:t>
+            </a:r>
           </a:p>
           <a:p>
             <a:pPr marL="0" indent="0">
@@ -9515,17 +13193,11 @@
               <a:buNone/>
             </a:pPr>
             <a:r>
-              <a:rPr lang="en-US" sz="1100" dirty="0">
-                <a:solidFill>
-                  <a:srgbClr val="1E293B"/>
-                </a:solidFill>
-                <a:latin typeface="Calibri" pitchFamily="34" charset="0"/>
-                <a:ea typeface="Calibri" pitchFamily="34" charset="-122"/>
-                <a:cs typeface="Calibri" pitchFamily="34" charset="-120"/>
-              </a:rPr>
-              <a:t>•  Datos longitudinales (varias capturas en el tiempo) para estacionalidad.</a:t>
-            </a:r>
-            <a:endParaRPr lang="en-US" sz="1100" dirty="0"/>
+              <a:rPr lang="es-ES" sz="1050" u="sng" dirty="0">
+                <a:latin typeface="Georgia" panose="02040502050405020303" pitchFamily="18" charset="0"/>
+              </a:rPr>
+              <a:t>Realizar un análisis de segmentación:</a:t>
+            </a:r>
           </a:p>
           <a:p>
             <a:pPr marL="0" indent="0">
@@ -9535,17 +13207,22 @@
               <a:buNone/>
             </a:pPr>
             <a:r>
-              <a:rPr lang="en-US" sz="1100" dirty="0">
+              <a:rPr lang="en-US" sz="1050" dirty="0">
                 <a:solidFill>
                   <a:srgbClr val="1E293B"/>
                 </a:solidFill>
-                <a:latin typeface="Calibri" pitchFamily="34" charset="0"/>
-                <a:ea typeface="Calibri" pitchFamily="34" charset="-122"/>
-                <a:cs typeface="Calibri" pitchFamily="34" charset="-120"/>
-              </a:rPr>
-              <a:t> </a:t>
-            </a:r>
-            <a:endParaRPr lang="en-US" sz="1100" dirty="0"/>
+                <a:latin typeface="Georgia" panose="02040502050405020303" pitchFamily="18" charset="0"/>
+                <a:ea typeface="Calibri" pitchFamily="34" charset="-122"/>
+                <a:cs typeface="Calibri" pitchFamily="34" charset="-120"/>
+              </a:rPr>
+              <a:t> • E</a:t>
+            </a:r>
+            <a:r>
+              <a:rPr lang="es-ES" sz="1050" dirty="0">
+                <a:latin typeface="Georgia" panose="02040502050405020303" pitchFamily="18" charset="0"/>
+              </a:rPr>
+              <a:t>laborar un perfil detallado de la oferta de alojamiento para cada tipo en cada ubicación, utilizando los parámetros más significativos</a:t>
+            </a:r>
           </a:p>
           <a:p>
             <a:pPr marL="0" indent="0">
@@ -9555,17 +13232,37 @@
               <a:buNone/>
             </a:pPr>
             <a:r>
-              <a:rPr lang="en-US" sz="1100" dirty="0">
+              <a:rPr lang="en-US" sz="1050" dirty="0">
                 <a:solidFill>
                   <a:srgbClr val="1E293B"/>
                 </a:solidFill>
-                <a:latin typeface="Calibri" pitchFamily="34" charset="0"/>
-                <a:ea typeface="Calibri" pitchFamily="34" charset="-122"/>
-                <a:cs typeface="Calibri" pitchFamily="34" charset="-120"/>
-              </a:rPr>
-              <a:t>•  Métricas de actividad del anfitrión para identificar inventario activo vs. fantasma.</a:t>
-            </a:r>
-            <a:endParaRPr lang="en-US" sz="1100" dirty="0"/>
+                <a:latin typeface="Georgia" panose="02040502050405020303" pitchFamily="18" charset="0"/>
+                <a:ea typeface="Calibri" pitchFamily="34" charset="-122"/>
+                <a:cs typeface="Calibri" pitchFamily="34" charset="-120"/>
+              </a:rPr>
+              <a:t> • </a:t>
+            </a:r>
+            <a:r>
+              <a:rPr lang="es-ES" sz="1050" dirty="0">
+                <a:latin typeface="Georgia" panose="02040502050405020303" pitchFamily="18" charset="0"/>
+              </a:rPr>
+              <a:t>Crear una sistema de </a:t>
+            </a:r>
+            <a:r>
+              <a:rPr lang="es-ES" sz="1050" dirty="0" err="1">
+                <a:latin typeface="Georgia" panose="02040502050405020303" pitchFamily="18" charset="0"/>
+              </a:rPr>
+              <a:t>de</a:t>
+            </a:r>
+            <a:r>
+              <a:rPr lang="es-ES" sz="1050" dirty="0">
+                <a:latin typeface="Georgia" panose="02040502050405020303" pitchFamily="18" charset="0"/>
+              </a:rPr>
+              <a:t> clasificación de alojamientos y de propuesta de precios</a:t>
+            </a:r>
+            <a:endParaRPr lang="en-US" sz="1050" dirty="0">
+              <a:latin typeface="Georgia" panose="02040502050405020303" pitchFamily="18" charset="0"/>
+            </a:endParaRPr>
           </a:p>
         </p:txBody>
       </p:sp>
@@ -9577,7 +13274,7 @@
 </p:sld>
 </file>
 
-<file path=ppt/slides/slide8.xml><?xml version="1.0" encoding="utf-8"?>
+<file path=ppt/slides/slide9.xml><?xml version="1.0" encoding="utf-8"?>
 <p:sld xmlns:a="http://schemas.openxmlformats.org/drawingml/2006/main" xmlns:r="http://schemas.openxmlformats.org/officeDocument/2006/relationships" xmlns:p="http://schemas.openxmlformats.org/presentationml/2006/main">
   <p:cSld name="Slide 8">
     <p:bg>
